--- a/judge_prep/SABZ_Presentation.pptx
+++ b/judge_prep/SABZ_Presentation.pptx
@@ -6,9 +6,19 @@
   </p:sldMasterIdLst>
   <p:sldIdLst>
     <p:sldId id="256" r:id="rId7"/>
-    <p:sldId id="257" r:id="rId8"/>
-    <p:sldId id="258" r:id="rId9"/>
-    <p:sldId id="259" r:id="rId10"/>
+    <p:sldId id="257" r:id="rId9"/>
+    <p:sldId id="258" r:id="rId10"/>
+    <p:sldId id="259" r:id="rId11"/>
+    <p:sldId id="260" r:id="rId12"/>
+    <p:sldId id="261" r:id="rId13"/>
+    <p:sldId id="262" r:id="rId14"/>
+    <p:sldId id="263" r:id="rId15"/>
+    <p:sldId id="264" r:id="rId16"/>
+    <p:sldId id="265" r:id="rId17"/>
+    <p:sldId id="266" r:id="rId18"/>
+    <p:sldId id="267" r:id="rId19"/>
+    <p:sldId id="268" r:id="rId20"/>
+    <p:sldId id="269" r:id="rId21"/>
   </p:sldIdLst>
   <p:sldSz cx="12191695" cy="6858000" type="screen4x3"/>
   <p:notesSz cx="6858000" cy="9144000"/>
@@ -108,6 +118,1336 @@
     </a:lvl9pPr>
   </p:defaultTextStyle>
 </p:presentation>
+</file>
+
+<file path=ppt/notesMasters/notesMaster1.xml><?xml version="1.0" encoding="utf-8"?>
+<p:notesMaster xmlns:a="http://schemas.openxmlformats.org/drawingml/2006/main" xmlns:p="http://schemas.openxmlformats.org/presentationml/2006/main" xmlns:r="http://schemas.openxmlformats.org/officeDocument/2006/relationships">
+  <p:cSld>
+    <p:bg>
+      <p:bgRef idx="1001">
+        <a:schemeClr val="bg1"/>
+      </p:bgRef>
+    </p:bg>
+    <p:spTree>
+      <p:nvGrpSpPr>
+        <p:cNvPr id="1" name=""/>
+        <p:cNvGrpSpPr/>
+        <p:nvPr/>
+      </p:nvGrpSpPr>
+      <p:grpSpPr>
+        <a:xfrm>
+          <a:off x="0" y="0"/>
+          <a:ext cx="0" cy="0"/>
+          <a:chOff x="0" y="0"/>
+          <a:chExt cx="0" cy="0"/>
+        </a:xfrm>
+      </p:grpSpPr>
+      <p:sp>
+        <p:nvSpPr>
+          <p:cNvPr id="2" name="Header Placeholder 1"/>
+          <p:cNvSpPr>
+            <a:spLocks noGrp="1"/>
+          </p:cNvSpPr>
+          <p:nvPr>
+            <p:ph type="hdr" sz="quarter"/>
+          </p:nvPr>
+        </p:nvSpPr>
+        <p:spPr>
+          <a:xfrm>
+            <a:off x="0" y="0"/>
+            <a:ext cx="2971800" cy="457200"/>
+          </a:xfrm>
+          <a:prstGeom prst="rect">
+            <a:avLst/>
+          </a:prstGeom>
+        </p:spPr>
+        <p:txBody>
+          <a:bodyPr vert="horz" lIns="91440" tIns="45720" rIns="91440" bIns="45720" rtlCol="0"/>
+          <a:lstStyle>
+            <a:lvl1pPr algn="l">
+              <a:defRPr sz="1200"/>
+            </a:lvl1pPr>
+          </a:lstStyle>
+          <a:p>
+            <a:endParaRPr lang="en-US"/>
+          </a:p>
+        </p:txBody>
+      </p:sp>
+      <p:sp>
+        <p:nvSpPr>
+          <p:cNvPr id="3" name="Date Placeholder 2"/>
+          <p:cNvSpPr>
+            <a:spLocks noGrp="1"/>
+          </p:cNvSpPr>
+          <p:nvPr>
+            <p:ph type="dt" idx="1"/>
+          </p:nvPr>
+        </p:nvSpPr>
+        <p:spPr>
+          <a:xfrm>
+            <a:off x="3884613" y="0"/>
+            <a:ext cx="2971800" cy="457200"/>
+          </a:xfrm>
+          <a:prstGeom prst="rect">
+            <a:avLst/>
+          </a:prstGeom>
+        </p:spPr>
+        <p:txBody>
+          <a:bodyPr vert="horz" lIns="91440" tIns="45720" rIns="91440" bIns="45720" rtlCol="0"/>
+          <a:lstStyle>
+            <a:lvl1pPr algn="r">
+              <a:defRPr sz="1200"/>
+            </a:lvl1pPr>
+          </a:lstStyle>
+          <a:p>
+            <a:fld id="{0F89C1C7-3DCD-1040-A9CF-14679D8B5DDD}" type="datetimeFigureOut">
+              <a:rPr lang="en-US" smtClean="0"/>
+              <a:t>10/17/16</a:t>
+            </a:fld>
+            <a:endParaRPr lang="en-US"/>
+          </a:p>
+        </p:txBody>
+      </p:sp>
+      <p:sp>
+        <p:nvSpPr>
+          <p:cNvPr id="4" name="Slide Image Placeholder 3"/>
+          <p:cNvSpPr>
+            <a:spLocks noGrp="1" noRot="1" noChangeAspect="1"/>
+          </p:cNvSpPr>
+          <p:nvPr>
+            <p:ph type="sldImg" idx="2"/>
+          </p:nvPr>
+        </p:nvSpPr>
+        <p:spPr>
+          <a:xfrm>
+            <a:off x="1143000" y="685800"/>
+            <a:ext cx="4572000" cy="3429000"/>
+          </a:xfrm>
+          <a:prstGeom prst="rect">
+            <a:avLst/>
+          </a:prstGeom>
+          <a:noFill/>
+          <a:ln w="12700">
+            <a:solidFill>
+              <a:prstClr val="black"/>
+            </a:solidFill>
+          </a:ln>
+        </p:spPr>
+        <p:txBody>
+          <a:bodyPr vert="horz" lIns="91440" tIns="45720" rIns="91440" bIns="45720" rtlCol="0" anchor="ctr"/>
+          <a:lstStyle/>
+          <a:p>
+            <a:endParaRPr lang="en-US"/>
+          </a:p>
+        </p:txBody>
+      </p:sp>
+      <p:sp>
+        <p:nvSpPr>
+          <p:cNvPr id="5" name="Notes Placeholder 4"/>
+          <p:cNvSpPr>
+            <a:spLocks noGrp="1"/>
+          </p:cNvSpPr>
+          <p:nvPr>
+            <p:ph type="body" sz="quarter" idx="3"/>
+          </p:nvPr>
+        </p:nvSpPr>
+        <p:spPr>
+          <a:xfrm>
+            <a:off x="685800" y="4343400"/>
+            <a:ext cx="5486400" cy="4114800"/>
+          </a:xfrm>
+          <a:prstGeom prst="rect">
+            <a:avLst/>
+          </a:prstGeom>
+        </p:spPr>
+        <p:txBody>
+          <a:bodyPr vert="horz" lIns="91440" tIns="45720" rIns="91440" bIns="45720" rtlCol="0"/>
+          <a:lstStyle/>
+          <a:p>
+            <a:pPr lvl="0"/>
+            <a:r>
+              <a:rPr lang="en-US" smtClean="0"/>
+              <a:t>Click to edit Master text styles</a:t>
+            </a:r>
+          </a:p>
+          <a:p>
+            <a:pPr lvl="1"/>
+            <a:r>
+              <a:rPr lang="en-US" smtClean="0"/>
+              <a:t>Second level</a:t>
+            </a:r>
+          </a:p>
+          <a:p>
+            <a:pPr lvl="2"/>
+            <a:r>
+              <a:rPr lang="en-US" smtClean="0"/>
+              <a:t>Third level</a:t>
+            </a:r>
+          </a:p>
+          <a:p>
+            <a:pPr lvl="3"/>
+            <a:r>
+              <a:rPr lang="en-US" smtClean="0"/>
+              <a:t>Fourth level</a:t>
+            </a:r>
+          </a:p>
+          <a:p>
+            <a:pPr lvl="4"/>
+            <a:r>
+              <a:rPr lang="en-US" smtClean="0"/>
+              <a:t>Fifth level</a:t>
+            </a:r>
+            <a:endParaRPr lang="en-US"/>
+          </a:p>
+        </p:txBody>
+      </p:sp>
+      <p:sp>
+        <p:nvSpPr>
+          <p:cNvPr id="6" name="Footer Placeholder 5"/>
+          <p:cNvSpPr>
+            <a:spLocks noGrp="1"/>
+          </p:cNvSpPr>
+          <p:nvPr>
+            <p:ph type="ftr" sz="quarter" idx="4"/>
+          </p:nvPr>
+        </p:nvSpPr>
+        <p:spPr>
+          <a:xfrm>
+            <a:off x="0" y="8685213"/>
+            <a:ext cx="2971800" cy="457200"/>
+          </a:xfrm>
+          <a:prstGeom prst="rect">
+            <a:avLst/>
+          </a:prstGeom>
+        </p:spPr>
+        <p:txBody>
+          <a:bodyPr vert="horz" lIns="91440" tIns="45720" rIns="91440" bIns="45720" rtlCol="0" anchor="b"/>
+          <a:lstStyle>
+            <a:lvl1pPr algn="l">
+              <a:defRPr sz="1200"/>
+            </a:lvl1pPr>
+          </a:lstStyle>
+          <a:p>
+            <a:endParaRPr lang="en-US"/>
+          </a:p>
+        </p:txBody>
+      </p:sp>
+      <p:sp>
+        <p:nvSpPr>
+          <p:cNvPr id="7" name="Slide Number Placeholder 6"/>
+          <p:cNvSpPr>
+            <a:spLocks noGrp="1"/>
+          </p:cNvSpPr>
+          <p:nvPr>
+            <p:ph type="sldNum" sz="quarter" idx="5"/>
+          </p:nvPr>
+        </p:nvSpPr>
+        <p:spPr>
+          <a:xfrm>
+            <a:off x="3884613" y="8685213"/>
+            <a:ext cx="2971800" cy="457200"/>
+          </a:xfrm>
+          <a:prstGeom prst="rect">
+            <a:avLst/>
+          </a:prstGeom>
+        </p:spPr>
+        <p:txBody>
+          <a:bodyPr vert="horz" lIns="91440" tIns="45720" rIns="91440" bIns="45720" rtlCol="0" anchor="b"/>
+          <a:lstStyle>
+            <a:lvl1pPr algn="r">
+              <a:defRPr sz="1200"/>
+            </a:lvl1pPr>
+          </a:lstStyle>
+          <a:p>
+            <a:fld id="{BB5E49A5-4136-284D-997B-48E1D791AD67}" type="slidenum">
+              <a:rPr lang="en-US" smtClean="0"/>
+              <a:t>‹#›</a:t>
+            </a:fld>
+            <a:endParaRPr lang="en-US"/>
+          </a:p>
+        </p:txBody>
+      </p:sp>
+    </p:spTree>
+    <p:extLst>
+      <p:ext uri="{BB962C8B-B14F-4D97-AF65-F5344CB8AC3E}">
+        <p14:creationId xmlns:p14="http://schemas.microsoft.com/office/powerpoint/2010/main" val="2623252185"/>
+      </p:ext>
+    </p:extLst>
+  </p:cSld>
+  <p:clrMap bg1="lt1" tx1="dk1" bg2="lt2" tx2="dk2" accent1="accent1" accent2="accent2" accent3="accent3" accent4="accent4" accent5="accent5" accent6="accent6" hlink="hlink" folHlink="folHlink"/>
+  <p:notesStyle>
+    <a:lvl1pPr marL="0" algn="l" defTabSz="457200" rtl="0" eaLnBrk="1" latinLnBrk="0" hangingPunct="1">
+      <a:defRPr sz="1200" kern="1200">
+        <a:solidFill>
+          <a:schemeClr val="tx1"/>
+        </a:solidFill>
+        <a:latin typeface="+mn-lt"/>
+        <a:ea typeface="+mn-ea"/>
+        <a:cs typeface="+mn-cs"/>
+      </a:defRPr>
+    </a:lvl1pPr>
+    <a:lvl2pPr marL="457200" algn="l" defTabSz="457200" rtl="0" eaLnBrk="1" latinLnBrk="0" hangingPunct="1">
+      <a:defRPr sz="1200" kern="1200">
+        <a:solidFill>
+          <a:schemeClr val="tx1"/>
+        </a:solidFill>
+        <a:latin typeface="+mn-lt"/>
+        <a:ea typeface="+mn-ea"/>
+        <a:cs typeface="+mn-cs"/>
+      </a:defRPr>
+    </a:lvl2pPr>
+    <a:lvl3pPr marL="914400" algn="l" defTabSz="457200" rtl="0" eaLnBrk="1" latinLnBrk="0" hangingPunct="1">
+      <a:defRPr sz="1200" kern="1200">
+        <a:solidFill>
+          <a:schemeClr val="tx1"/>
+        </a:solidFill>
+        <a:latin typeface="+mn-lt"/>
+        <a:ea typeface="+mn-ea"/>
+        <a:cs typeface="+mn-cs"/>
+      </a:defRPr>
+    </a:lvl3pPr>
+    <a:lvl4pPr marL="1371600" algn="l" defTabSz="457200" rtl="0" eaLnBrk="1" latinLnBrk="0" hangingPunct="1">
+      <a:defRPr sz="1200" kern="1200">
+        <a:solidFill>
+          <a:schemeClr val="tx1"/>
+        </a:solidFill>
+        <a:latin typeface="+mn-lt"/>
+        <a:ea typeface="+mn-ea"/>
+        <a:cs typeface="+mn-cs"/>
+      </a:defRPr>
+    </a:lvl4pPr>
+    <a:lvl5pPr marL="1828800" algn="l" defTabSz="457200" rtl="0" eaLnBrk="1" latinLnBrk="0" hangingPunct="1">
+      <a:defRPr sz="1200" kern="1200">
+        <a:solidFill>
+          <a:schemeClr val="tx1"/>
+        </a:solidFill>
+        <a:latin typeface="+mn-lt"/>
+        <a:ea typeface="+mn-ea"/>
+        <a:cs typeface="+mn-cs"/>
+      </a:defRPr>
+    </a:lvl5pPr>
+    <a:lvl6pPr marL="2286000" algn="l" defTabSz="457200" rtl="0" eaLnBrk="1" latinLnBrk="0" hangingPunct="1">
+      <a:defRPr sz="1200" kern="1200">
+        <a:solidFill>
+          <a:schemeClr val="tx1"/>
+        </a:solidFill>
+        <a:latin typeface="+mn-lt"/>
+        <a:ea typeface="+mn-ea"/>
+        <a:cs typeface="+mn-cs"/>
+      </a:defRPr>
+    </a:lvl6pPr>
+    <a:lvl7pPr marL="2743200" algn="l" defTabSz="457200" rtl="0" eaLnBrk="1" latinLnBrk="0" hangingPunct="1">
+      <a:defRPr sz="1200" kern="1200">
+        <a:solidFill>
+          <a:schemeClr val="tx1"/>
+        </a:solidFill>
+        <a:latin typeface="+mn-lt"/>
+        <a:ea typeface="+mn-ea"/>
+        <a:cs typeface="+mn-cs"/>
+      </a:defRPr>
+    </a:lvl7pPr>
+    <a:lvl8pPr marL="3200400" algn="l" defTabSz="457200" rtl="0" eaLnBrk="1" latinLnBrk="0" hangingPunct="1">
+      <a:defRPr sz="1200" kern="1200">
+        <a:solidFill>
+          <a:schemeClr val="tx1"/>
+        </a:solidFill>
+        <a:latin typeface="+mn-lt"/>
+        <a:ea typeface="+mn-ea"/>
+        <a:cs typeface="+mn-cs"/>
+      </a:defRPr>
+    </a:lvl8pPr>
+    <a:lvl9pPr marL="3657600" algn="l" defTabSz="457200" rtl="0" eaLnBrk="1" latinLnBrk="0" hangingPunct="1">
+      <a:defRPr sz="1200" kern="1200">
+        <a:solidFill>
+          <a:schemeClr val="tx1"/>
+        </a:solidFill>
+        <a:latin typeface="+mn-lt"/>
+        <a:ea typeface="+mn-ea"/>
+        <a:cs typeface="+mn-cs"/>
+      </a:defRPr>
+    </a:lvl9pPr>
+  </p:notesStyle>
+</p:notesMaster>
+</file>
+
+<file path=ppt/notesSlides/notesSlide1.xml><?xml version="1.0" encoding="utf-8"?>
+<p:notes xmlns:a="http://schemas.openxmlformats.org/drawingml/2006/main" xmlns:p="http://schemas.openxmlformats.org/presentationml/2006/main" xmlns:r="http://schemas.openxmlformats.org/officeDocument/2006/relationships">
+  <p:cSld>
+    <p:spTree>
+      <p:nvGrpSpPr>
+        <p:cNvPr id="1" name=""/>
+        <p:cNvGrpSpPr/>
+        <p:nvPr/>
+      </p:nvGrpSpPr>
+      <p:grpSpPr>
+        <a:xfrm>
+          <a:off x="0" y="0"/>
+          <a:ext cx="0" cy="0"/>
+          <a:chOff x="0" y="0"/>
+          <a:chExt cx="0" cy="0"/>
+        </a:xfrm>
+      </p:grpSpPr>
+      <p:sp>
+        <p:nvSpPr>
+          <p:cNvPr id="2" name="Slide Image Placeholder 1"/>
+          <p:cNvSpPr>
+            <a:spLocks noGrp="1"/>
+          </p:cNvSpPr>
+          <p:nvPr>
+            <p:ph type="sldImg" idx="2"/>
+          </p:nvPr>
+        </p:nvSpPr>
+        <p:spPr/>
+      </p:sp>
+      <p:sp>
+        <p:nvSpPr>
+          <p:cNvPr id="3" name="Notes Placeholder 2"/>
+          <p:cNvSpPr>
+            <a:spLocks noGrp="1"/>
+          </p:cNvSpPr>
+          <p:nvPr>
+            <p:ph type="body" idx="3" sz="quarter"/>
+          </p:nvPr>
+        </p:nvSpPr>
+        <p:spPr/>
+        <p:txBody>
+          <a:bodyPr/>
+          <a:lstStyle/>
+          <a:p>
+            <a:r>
+              <a:t>ABDUR REHMAN presents. Welcome the judges, say the one-liner: SABZ is a traffic signal that can see. Then hand the story to yourself on slide 2.</a:t>
+            </a:r>
+          </a:p>
+        </p:txBody>
+      </p:sp>
+      <p:sp>
+        <p:nvSpPr>
+          <p:cNvPr id="4" name="Slide Number Placeholder 3"/>
+          <p:cNvSpPr>
+            <a:spLocks noGrp="1"/>
+          </p:cNvSpPr>
+          <p:nvPr>
+            <p:ph type="sldNum" idx="5" sz="quarter"/>
+          </p:nvPr>
+        </p:nvSpPr>
+        <p:spPr/>
+      </p:sp>
+    </p:spTree>
+  </p:cSld>
+  <p:clrMapOvr>
+    <a:masterClrMapping/>
+  </p:clrMapOvr>
+</p:notes>
+</file>
+
+<file path=ppt/notesSlides/notesSlide10.xml><?xml version="1.0" encoding="utf-8"?>
+<p:notes xmlns:a="http://schemas.openxmlformats.org/drawingml/2006/main" xmlns:p="http://schemas.openxmlformats.org/presentationml/2006/main" xmlns:r="http://schemas.openxmlformats.org/officeDocument/2006/relationships">
+  <p:cSld>
+    <p:spTree>
+      <p:nvGrpSpPr>
+        <p:cNvPr id="1" name=""/>
+        <p:cNvGrpSpPr/>
+        <p:nvPr/>
+      </p:nvGrpSpPr>
+      <p:grpSpPr>
+        <a:xfrm>
+          <a:off x="0" y="0"/>
+          <a:ext cx="0" cy="0"/>
+          <a:chOff x="0" y="0"/>
+          <a:chExt cx="0" cy="0"/>
+        </a:xfrm>
+      </p:grpSpPr>
+      <p:sp>
+        <p:nvSpPr>
+          <p:cNvPr id="2" name="Slide Image Placeholder 1"/>
+          <p:cNvSpPr>
+            <a:spLocks noGrp="1"/>
+          </p:cNvSpPr>
+          <p:nvPr>
+            <p:ph type="sldImg" idx="2"/>
+          </p:nvPr>
+        </p:nvSpPr>
+        <p:spPr/>
+      </p:sp>
+      <p:sp>
+        <p:nvSpPr>
+          <p:cNvPr id="3" name="Notes Placeholder 2"/>
+          <p:cNvSpPr>
+            <a:spLocks noGrp="1"/>
+          </p:cNvSpPr>
+          <p:nvPr>
+            <p:ph type="body" idx="3" sz="quarter"/>
+          </p:nvPr>
+        </p:nvSpPr>
+        <p:spPr/>
+        <p:txBody>
+          <a:bodyPr/>
+          <a:lstStyle/>
+          <a:p>
+            <a:r>
+              <a:t>BILAL presents. Four cards: coordination without a master, offsets that tune themselves bounded, bus priority, grid readiness. Close with the test count - every claim is machine-checked.</a:t>
+            </a:r>
+          </a:p>
+        </p:txBody>
+      </p:sp>
+      <p:sp>
+        <p:nvSpPr>
+          <p:cNvPr id="4" name="Slide Number Placeholder 3"/>
+          <p:cNvSpPr>
+            <a:spLocks noGrp="1"/>
+          </p:cNvSpPr>
+          <p:nvPr>
+            <p:ph type="sldNum" idx="5" sz="quarter"/>
+          </p:nvPr>
+        </p:nvSpPr>
+        <p:spPr/>
+      </p:sp>
+    </p:spTree>
+  </p:cSld>
+  <p:clrMapOvr>
+    <a:masterClrMapping/>
+  </p:clrMapOvr>
+</p:notes>
+</file>
+
+<file path=ppt/notesSlides/notesSlide11.xml><?xml version="1.0" encoding="utf-8"?>
+<p:notes xmlns:a="http://schemas.openxmlformats.org/drawingml/2006/main" xmlns:p="http://schemas.openxmlformats.org/presentationml/2006/main" xmlns:r="http://schemas.openxmlformats.org/officeDocument/2006/relationships">
+  <p:cSld>
+    <p:spTree>
+      <p:nvGrpSpPr>
+        <p:cNvPr id="1" name=""/>
+        <p:cNvGrpSpPr/>
+        <p:nvPr/>
+      </p:nvGrpSpPr>
+      <p:grpSpPr>
+        <a:xfrm>
+          <a:off x="0" y="0"/>
+          <a:ext cx="0" cy="0"/>
+          <a:chOff x="0" y="0"/>
+          <a:chExt cx="0" cy="0"/>
+        </a:xfrm>
+      </p:grpSpPr>
+      <p:sp>
+        <p:nvSpPr>
+          <p:cNvPr id="2" name="Slide Image Placeholder 1"/>
+          <p:cNvSpPr>
+            <a:spLocks noGrp="1"/>
+          </p:cNvSpPr>
+          <p:nvPr>
+            <p:ph type="sldImg" idx="2"/>
+          </p:nvPr>
+        </p:nvSpPr>
+        <p:spPr/>
+      </p:sp>
+      <p:sp>
+        <p:nvSpPr>
+          <p:cNvPr id="3" name="Notes Placeholder 2"/>
+          <p:cNvSpPr>
+            <a:spLocks noGrp="1"/>
+          </p:cNvSpPr>
+          <p:nvPr>
+            <p:ph type="body" idx="3" sz="quarter"/>
+          </p:nvPr>
+        </p:nvSpPr>
+        <p:spPr/>
+        <p:txBody>
+          <a:bodyPr/>
+          <a:lstStyle/>
+          <a:p>
+            <a:r>
+              <a:t>AWAIS presents. Pause. Let the line land. Then switch to the live demo and narrate: watch the green hold because the camera sees the queue still discharging.</a:t>
+            </a:r>
+          </a:p>
+        </p:txBody>
+      </p:sp>
+      <p:sp>
+        <p:nvSpPr>
+          <p:cNvPr id="4" name="Slide Number Placeholder 3"/>
+          <p:cNvSpPr>
+            <a:spLocks noGrp="1"/>
+          </p:cNvSpPr>
+          <p:nvPr>
+            <p:ph type="sldNum" idx="5" sz="quarter"/>
+          </p:nvPr>
+        </p:nvSpPr>
+        <p:spPr/>
+      </p:sp>
+    </p:spTree>
+  </p:cSld>
+  <p:clrMapOvr>
+    <a:masterClrMapping/>
+  </p:clrMapOvr>
+</p:notes>
+</file>
+
+<file path=ppt/notesSlides/notesSlide12.xml><?xml version="1.0" encoding="utf-8"?>
+<p:notes xmlns:a="http://schemas.openxmlformats.org/drawingml/2006/main" xmlns:p="http://schemas.openxmlformats.org/presentationml/2006/main" xmlns:r="http://schemas.openxmlformats.org/officeDocument/2006/relationships">
+  <p:cSld>
+    <p:spTree>
+      <p:nvGrpSpPr>
+        <p:cNvPr id="1" name=""/>
+        <p:cNvGrpSpPr/>
+        <p:nvPr/>
+      </p:nvGrpSpPr>
+      <p:grpSpPr>
+        <a:xfrm>
+          <a:off x="0" y="0"/>
+          <a:ext cx="0" cy="0"/>
+          <a:chOff x="0" y="0"/>
+          <a:chExt cx="0" cy="0"/>
+        </a:xfrm>
+      </p:grpSpPr>
+      <p:sp>
+        <p:nvSpPr>
+          <p:cNvPr id="2" name="Slide Image Placeholder 1"/>
+          <p:cNvSpPr>
+            <a:spLocks noGrp="1"/>
+          </p:cNvSpPr>
+          <p:nvPr>
+            <p:ph type="sldImg" idx="2"/>
+          </p:nvPr>
+        </p:nvSpPr>
+        <p:spPr/>
+      </p:sp>
+      <p:sp>
+        <p:nvSpPr>
+          <p:cNvPr id="3" name="Notes Placeholder 2"/>
+          <p:cNvSpPr>
+            <a:spLocks noGrp="1"/>
+          </p:cNvSpPr>
+          <p:nvPr>
+            <p:ph type="body" idx="3" sz="quarter"/>
+          </p:nvPr>
+        </p:nvSpPr>
+        <p:spPr/>
+        <p:txBody>
+          <a:bodyPr/>
+          <a:lstStyle/>
+          <a:p>
+            <a:r>
+              <a:t>DAWOOD presents. Three phases, each earns the next. Stress: the city can always override. A system the city cannot supervise is a system the city will not buy.</a:t>
+            </a:r>
+          </a:p>
+        </p:txBody>
+      </p:sp>
+      <p:sp>
+        <p:nvSpPr>
+          <p:cNvPr id="4" name="Slide Number Placeholder 3"/>
+          <p:cNvSpPr>
+            <a:spLocks noGrp="1"/>
+          </p:cNvSpPr>
+          <p:nvPr>
+            <p:ph type="sldNum" idx="5" sz="quarter"/>
+          </p:nvPr>
+        </p:nvSpPr>
+        <p:spPr/>
+      </p:sp>
+    </p:spTree>
+  </p:cSld>
+  <p:clrMapOvr>
+    <a:masterClrMapping/>
+  </p:clrMapOvr>
+</p:notes>
+</file>
+
+<file path=ppt/notesSlides/notesSlide13.xml><?xml version="1.0" encoding="utf-8"?>
+<p:notes xmlns:a="http://schemas.openxmlformats.org/drawingml/2006/main" xmlns:p="http://schemas.openxmlformats.org/presentationml/2006/main" xmlns:r="http://schemas.openxmlformats.org/officeDocument/2006/relationships">
+  <p:cSld>
+    <p:spTree>
+      <p:nvGrpSpPr>
+        <p:cNvPr id="1" name=""/>
+        <p:cNvGrpSpPr/>
+        <p:nvPr/>
+      </p:nvGrpSpPr>
+      <p:grpSpPr>
+        <a:xfrm>
+          <a:off x="0" y="0"/>
+          <a:ext cx="0" cy="0"/>
+          <a:chOff x="0" y="0"/>
+          <a:chExt cx="0" cy="0"/>
+        </a:xfrm>
+      </p:grpSpPr>
+      <p:sp>
+        <p:nvSpPr>
+          <p:cNvPr id="2" name="Slide Image Placeholder 1"/>
+          <p:cNvSpPr>
+            <a:spLocks noGrp="1"/>
+          </p:cNvSpPr>
+          <p:nvPr>
+            <p:ph type="sldImg" idx="2"/>
+          </p:nvPr>
+        </p:nvSpPr>
+        <p:spPr/>
+      </p:sp>
+      <p:sp>
+        <p:nvSpPr>
+          <p:cNvPr id="3" name="Notes Placeholder 2"/>
+          <p:cNvSpPr>
+            <a:spLocks noGrp="1"/>
+          </p:cNvSpPr>
+          <p:nvPr>
+            <p:ph type="body" idx="3" sz="quarter"/>
+          </p:nvPr>
+        </p:nvSpPr>
+        <p:spPr/>
+        <p:txBody>
+          <a:bodyPr/>
+          <a:lstStyle/>
+          <a:p>
+            <a:r>
+              <a:t>DAWOOD presents. Keep it short and concrete: who pays, how we charge, why we win. Then close on slide 12.</a:t>
+            </a:r>
+          </a:p>
+        </p:txBody>
+      </p:sp>
+      <p:sp>
+        <p:nvSpPr>
+          <p:cNvPr id="4" name="Slide Number Placeholder 3"/>
+          <p:cNvSpPr>
+            <a:spLocks noGrp="1"/>
+          </p:cNvSpPr>
+          <p:nvPr>
+            <p:ph type="sldNum" idx="5" sz="quarter"/>
+          </p:nvPr>
+        </p:nvSpPr>
+        <p:spPr/>
+      </p:sp>
+    </p:spTree>
+  </p:cSld>
+  <p:clrMapOvr>
+    <a:masterClrMapping/>
+  </p:clrMapOvr>
+</p:notes>
+</file>
+
+<file path=ppt/notesSlides/notesSlide14.xml><?xml version="1.0" encoding="utf-8"?>
+<p:notes xmlns:a="http://schemas.openxmlformats.org/drawingml/2006/main" xmlns:p="http://schemas.openxmlformats.org/presentationml/2006/main" xmlns:r="http://schemas.openxmlformats.org/officeDocument/2006/relationships">
+  <p:cSld>
+    <p:spTree>
+      <p:nvGrpSpPr>
+        <p:cNvPr id="1" name=""/>
+        <p:cNvGrpSpPr/>
+        <p:nvPr/>
+      </p:nvGrpSpPr>
+      <p:grpSpPr>
+        <a:xfrm>
+          <a:off x="0" y="0"/>
+          <a:ext cx="0" cy="0"/>
+          <a:chOff x="0" y="0"/>
+          <a:chExt cx="0" cy="0"/>
+        </a:xfrm>
+      </p:grpSpPr>
+      <p:sp>
+        <p:nvSpPr>
+          <p:cNvPr id="2" name="Slide Image Placeholder 1"/>
+          <p:cNvSpPr>
+            <a:spLocks noGrp="1"/>
+          </p:cNvSpPr>
+          <p:nvPr>
+            <p:ph type="sldImg" idx="2"/>
+          </p:nvPr>
+        </p:nvSpPr>
+        <p:spPr/>
+      </p:sp>
+      <p:sp>
+        <p:nvSpPr>
+          <p:cNvPr id="3" name="Notes Placeholder 2"/>
+          <p:cNvSpPr>
+            <a:spLocks noGrp="1"/>
+          </p:cNvSpPr>
+          <p:nvPr>
+            <p:ph type="body" idx="3" sz="quarter"/>
+          </p:nvPr>
+        </p:nvSpPr>
+        <p:spPr/>
+        <p:txBody>
+          <a:bodyPr/>
+          <a:lstStyle/>
+          <a:p>
+            <a:r>
+              <a:t>DAWOOD closes. End with the line, pause, invite questions. If time was cut, this slide alone carries the close.</a:t>
+            </a:r>
+          </a:p>
+        </p:txBody>
+      </p:sp>
+      <p:sp>
+        <p:nvSpPr>
+          <p:cNvPr id="4" name="Slide Number Placeholder 3"/>
+          <p:cNvSpPr>
+            <a:spLocks noGrp="1"/>
+          </p:cNvSpPr>
+          <p:nvPr>
+            <p:ph type="sldNum" idx="5" sz="quarter"/>
+          </p:nvPr>
+        </p:nvSpPr>
+        <p:spPr/>
+      </p:sp>
+    </p:spTree>
+  </p:cSld>
+  <p:clrMapOvr>
+    <a:masterClrMapping/>
+  </p:clrMapOvr>
+</p:notes>
+</file>
+
+<file path=ppt/notesSlides/notesSlide2.xml><?xml version="1.0" encoding="utf-8"?>
+<p:notes xmlns:a="http://schemas.openxmlformats.org/drawingml/2006/main" xmlns:p="http://schemas.openxmlformats.org/presentationml/2006/main" xmlns:r="http://schemas.openxmlformats.org/officeDocument/2006/relationships">
+  <p:cSld>
+    <p:spTree>
+      <p:nvGrpSpPr>
+        <p:cNvPr id="1" name=""/>
+        <p:cNvGrpSpPr/>
+        <p:nvPr/>
+      </p:nvGrpSpPr>
+      <p:grpSpPr>
+        <a:xfrm>
+          <a:off x="0" y="0"/>
+          <a:ext cx="0" cy="0"/>
+          <a:chOff x="0" y="0"/>
+          <a:chExt cx="0" cy="0"/>
+        </a:xfrm>
+      </p:grpSpPr>
+      <p:sp>
+        <p:nvSpPr>
+          <p:cNvPr id="2" name="Slide Image Placeholder 1"/>
+          <p:cNvSpPr>
+            <a:spLocks noGrp="1"/>
+          </p:cNvSpPr>
+          <p:nvPr>
+            <p:ph type="sldImg" idx="2"/>
+          </p:nvPr>
+        </p:nvSpPr>
+        <p:spPr/>
+      </p:sp>
+      <p:sp>
+        <p:nvSpPr>
+          <p:cNvPr id="3" name="Notes Placeholder 2"/>
+          <p:cNvSpPr>
+            <a:spLocks noGrp="1"/>
+          </p:cNvSpPr>
+          <p:nvPr>
+            <p:ph type="body" idx="3" sz="quarter"/>
+          </p:nvPr>
+        </p:nvSpPr>
+        <p:spPr/>
+        <p:txBody>
+          <a:bodyPr/>
+          <a:lstStyle/>
+          <a:p>
+            <a:r>
+              <a:t>ABDUR REHMAN presents. Land the scale with the 4.1 million number. This is why the problem matters. Then: why do the signals fail? Slide 3.</a:t>
+            </a:r>
+          </a:p>
+        </p:txBody>
+      </p:sp>
+      <p:sp>
+        <p:nvSpPr>
+          <p:cNvPr id="4" name="Slide Number Placeholder 3"/>
+          <p:cNvSpPr>
+            <a:spLocks noGrp="1"/>
+          </p:cNvSpPr>
+          <p:nvPr>
+            <p:ph type="sldNum" idx="5" sz="quarter"/>
+          </p:nvPr>
+        </p:nvSpPr>
+        <p:spPr/>
+      </p:sp>
+    </p:spTree>
+  </p:cSld>
+  <p:clrMapOvr>
+    <a:masterClrMapping/>
+  </p:clrMapOvr>
+</p:notes>
+</file>
+
+<file path=ppt/notesSlides/notesSlide3.xml><?xml version="1.0" encoding="utf-8"?>
+<p:notes xmlns:a="http://schemas.openxmlformats.org/drawingml/2006/main" xmlns:p="http://schemas.openxmlformats.org/presentationml/2006/main" xmlns:r="http://schemas.openxmlformats.org/officeDocument/2006/relationships">
+  <p:cSld>
+    <p:spTree>
+      <p:nvGrpSpPr>
+        <p:cNvPr id="1" name=""/>
+        <p:cNvGrpSpPr/>
+        <p:nvPr/>
+      </p:nvGrpSpPr>
+      <p:grpSpPr>
+        <a:xfrm>
+          <a:off x="0" y="0"/>
+          <a:ext cx="0" cy="0"/>
+          <a:chOff x="0" y="0"/>
+          <a:chExt cx="0" cy="0"/>
+        </a:xfrm>
+      </p:grpSpPr>
+      <p:sp>
+        <p:nvSpPr>
+          <p:cNvPr id="2" name="Slide Image Placeholder 1"/>
+          <p:cNvSpPr>
+            <a:spLocks noGrp="1"/>
+          </p:cNvSpPr>
+          <p:nvPr>
+            <p:ph type="sldImg" idx="2"/>
+          </p:nvPr>
+        </p:nvSpPr>
+        <p:spPr/>
+      </p:sp>
+      <p:sp>
+        <p:nvSpPr>
+          <p:cNvPr id="3" name="Notes Placeholder 2"/>
+          <p:cNvSpPr>
+            <a:spLocks noGrp="1"/>
+          </p:cNvSpPr>
+          <p:nvPr>
+            <p:ph type="body" idx="3" sz="quarter"/>
+          </p:nvPr>
+        </p:nvSpPr>
+        <p:spPr/>
+        <p:txBody>
+          <a:bodyPr/>
+          <a:lstStyle/>
+          <a:p>
+            <a:r>
+              <a:t>ABDUR REHMAN presents. Contrast the three cards. End with: so we built a signal that can see. Hand to Bilal for what is inside.</a:t>
+            </a:r>
+          </a:p>
+        </p:txBody>
+      </p:sp>
+      <p:sp>
+        <p:nvSpPr>
+          <p:cNvPr id="4" name="Slide Number Placeholder 3"/>
+          <p:cNvSpPr>
+            <a:spLocks noGrp="1"/>
+          </p:cNvSpPr>
+          <p:nvPr>
+            <p:ph type="sldNum" idx="5" sz="quarter"/>
+          </p:nvPr>
+        </p:nvSpPr>
+        <p:spPr/>
+      </p:sp>
+    </p:spTree>
+  </p:cSld>
+  <p:clrMapOvr>
+    <a:masterClrMapping/>
+  </p:clrMapOvr>
+</p:notes>
+</file>
+
+<file path=ppt/notesSlides/notesSlide4.xml><?xml version="1.0" encoding="utf-8"?>
+<p:notes xmlns:a="http://schemas.openxmlformats.org/drawingml/2006/main" xmlns:p="http://schemas.openxmlformats.org/presentationml/2006/main" xmlns:r="http://schemas.openxmlformats.org/officeDocument/2006/relationships">
+  <p:cSld>
+    <p:spTree>
+      <p:nvGrpSpPr>
+        <p:cNvPr id="1" name=""/>
+        <p:cNvGrpSpPr/>
+        <p:nvPr/>
+      </p:nvGrpSpPr>
+      <p:grpSpPr>
+        <a:xfrm>
+          <a:off x="0" y="0"/>
+          <a:ext cx="0" cy="0"/>
+          <a:chOff x="0" y="0"/>
+          <a:chExt cx="0" cy="0"/>
+        </a:xfrm>
+      </p:grpSpPr>
+      <p:sp>
+        <p:nvSpPr>
+          <p:cNvPr id="2" name="Slide Image Placeholder 1"/>
+          <p:cNvSpPr>
+            <a:spLocks noGrp="1"/>
+          </p:cNvSpPr>
+          <p:nvPr>
+            <p:ph type="sldImg" idx="2"/>
+          </p:nvPr>
+        </p:nvSpPr>
+        <p:spPr/>
+      </p:sp>
+      <p:sp>
+        <p:nvSpPr>
+          <p:cNvPr id="3" name="Notes Placeholder 2"/>
+          <p:cNvSpPr>
+            <a:spLocks noGrp="1"/>
+          </p:cNvSpPr>
+          <p:nvPr>
+            <p:ph type="body" idx="3" sz="quarter"/>
+          </p:nvPr>
+        </p:nvSpPr>
+        <p:spPr/>
+        <p:txBody>
+          <a:bodyPr/>
+          <a:lstStyle/>
+          <a:p>
+            <a:r>
+              <a:t>BILAL presents. Walk the four boxes left to right. Emphasize: the loop runs every second, and step 3 is not learned, it is guaranteed.</a:t>
+            </a:r>
+          </a:p>
+        </p:txBody>
+      </p:sp>
+      <p:sp>
+        <p:nvSpPr>
+          <p:cNvPr id="4" name="Slide Number Placeholder 3"/>
+          <p:cNvSpPr>
+            <a:spLocks noGrp="1"/>
+          </p:cNvSpPr>
+          <p:nvPr>
+            <p:ph type="sldNum" idx="5" sz="quarter"/>
+          </p:nvPr>
+        </p:nvSpPr>
+        <p:spPr/>
+      </p:sp>
+    </p:spTree>
+  </p:cSld>
+  <p:clrMapOvr>
+    <a:masterClrMapping/>
+  </p:clrMapOvr>
+</p:notes>
+</file>
+
+<file path=ppt/notesSlides/notesSlide5.xml><?xml version="1.0" encoding="utf-8"?>
+<p:notes xmlns:a="http://schemas.openxmlformats.org/drawingml/2006/main" xmlns:p="http://schemas.openxmlformats.org/presentationml/2006/main" xmlns:r="http://schemas.openxmlformats.org/officeDocument/2006/relationships">
+  <p:cSld>
+    <p:spTree>
+      <p:nvGrpSpPr>
+        <p:cNvPr id="1" name=""/>
+        <p:cNvGrpSpPr/>
+        <p:nvPr/>
+      </p:nvGrpSpPr>
+      <p:grpSpPr>
+        <a:xfrm>
+          <a:off x="0" y="0"/>
+          <a:ext cx="0" cy="0"/>
+          <a:chOff x="0" y="0"/>
+          <a:chExt cx="0" cy="0"/>
+        </a:xfrm>
+      </p:grpSpPr>
+      <p:sp>
+        <p:nvSpPr>
+          <p:cNvPr id="2" name="Slide Image Placeholder 1"/>
+          <p:cNvSpPr>
+            <a:spLocks noGrp="1"/>
+          </p:cNvSpPr>
+          <p:nvPr>
+            <p:ph type="sldImg" idx="2"/>
+          </p:nvPr>
+        </p:nvSpPr>
+        <p:spPr/>
+      </p:sp>
+      <p:sp>
+        <p:nvSpPr>
+          <p:cNvPr id="3" name="Notes Placeholder 2"/>
+          <p:cNvSpPr>
+            <a:spLocks noGrp="1"/>
+          </p:cNvSpPr>
+          <p:nvPr>
+            <p:ph type="body" idx="3" sz="quarter"/>
+          </p:nvPr>
+        </p:nvSpPr>
+        <p:spPr/>
+        <p:txBody>
+          <a:bodyPr/>
+          <a:lstStyle/>
+          <a:p>
+            <a:r>
+              <a:t>BILAL presents. Explain like to a smart friend: 18 numbers in, 2 scores out, pick the winner. The reward is the key insight: waiting is the punishment. Mention we wrote the learner ourselves.</a:t>
+            </a:r>
+          </a:p>
+        </p:txBody>
+      </p:sp>
+      <p:sp>
+        <p:nvSpPr>
+          <p:cNvPr id="4" name="Slide Number Placeholder 3"/>
+          <p:cNvSpPr>
+            <a:spLocks noGrp="1"/>
+          </p:cNvSpPr>
+          <p:nvPr>
+            <p:ph type="sldNum" idx="5" sz="quarter"/>
+          </p:nvPr>
+        </p:nvSpPr>
+        <p:spPr/>
+      </p:sp>
+    </p:spTree>
+  </p:cSld>
+  <p:clrMapOvr>
+    <a:masterClrMapping/>
+  </p:clrMapOvr>
+</p:notes>
+</file>
+
+<file path=ppt/notesSlides/notesSlide6.xml><?xml version="1.0" encoding="utf-8"?>
+<p:notes xmlns:a="http://schemas.openxmlformats.org/drawingml/2006/main" xmlns:p="http://schemas.openxmlformats.org/presentationml/2006/main" xmlns:r="http://schemas.openxmlformats.org/officeDocument/2006/relationships">
+  <p:cSld>
+    <p:spTree>
+      <p:nvGrpSpPr>
+        <p:cNvPr id="1" name=""/>
+        <p:cNvGrpSpPr/>
+        <p:nvPr/>
+      </p:nvGrpSpPr>
+      <p:grpSpPr>
+        <a:xfrm>
+          <a:off x="0" y="0"/>
+          <a:ext cx="0" cy="0"/>
+          <a:chOff x="0" y="0"/>
+          <a:chExt cx="0" cy="0"/>
+        </a:xfrm>
+      </p:grpSpPr>
+      <p:sp>
+        <p:nvSpPr>
+          <p:cNvPr id="2" name="Slide Image Placeholder 1"/>
+          <p:cNvSpPr>
+            <a:spLocks noGrp="1"/>
+          </p:cNvSpPr>
+          <p:nvPr>
+            <p:ph type="sldImg" idx="2"/>
+          </p:nvPr>
+        </p:nvSpPr>
+        <p:spPr/>
+      </p:sp>
+      <p:sp>
+        <p:nvSpPr>
+          <p:cNvPr id="3" name="Notes Placeholder 2"/>
+          <p:cNvSpPr>
+            <a:spLocks noGrp="1"/>
+          </p:cNvSpPr>
+          <p:nvPr>
+            <p:ph type="body" idx="3" sz="quarter"/>
+          </p:nvPr>
+        </p:nvSpPr>
+        <p:spPr/>
+        <p:txBody>
+          <a:bodyPr/>
+          <a:lstStyle/>
+          <a:p>
+            <a:r>
+              <a:t>BILAL presents. Judges care about this more than the network. Say it slowly: no weight update can ever change this rule. It is guaranteed, not hoped for.</a:t>
+            </a:r>
+          </a:p>
+        </p:txBody>
+      </p:sp>
+      <p:sp>
+        <p:nvSpPr>
+          <p:cNvPr id="4" name="Slide Number Placeholder 3"/>
+          <p:cNvSpPr>
+            <a:spLocks noGrp="1"/>
+          </p:cNvSpPr>
+          <p:nvPr>
+            <p:ph type="sldNum" idx="5" sz="quarter"/>
+          </p:nvPr>
+        </p:nvSpPr>
+        <p:spPr/>
+      </p:sp>
+    </p:spTree>
+  </p:cSld>
+  <p:clrMapOvr>
+    <a:masterClrMapping/>
+  </p:clrMapOvr>
+</p:notes>
+</file>
+
+<file path=ppt/notesSlides/notesSlide7.xml><?xml version="1.0" encoding="utf-8"?>
+<p:notes xmlns:a="http://schemas.openxmlformats.org/drawingml/2006/main" xmlns:p="http://schemas.openxmlformats.org/presentationml/2006/main" xmlns:r="http://schemas.openxmlformats.org/officeDocument/2006/relationships">
+  <p:cSld>
+    <p:spTree>
+      <p:nvGrpSpPr>
+        <p:cNvPr id="1" name=""/>
+        <p:cNvGrpSpPr/>
+        <p:nvPr/>
+      </p:nvGrpSpPr>
+      <p:grpSpPr>
+        <a:xfrm>
+          <a:off x="0" y="0"/>
+          <a:ext cx="0" cy="0"/>
+          <a:chOff x="0" y="0"/>
+          <a:chExt cx="0" cy="0"/>
+        </a:xfrm>
+      </p:grpSpPr>
+      <p:sp>
+        <p:nvSpPr>
+          <p:cNvPr id="2" name="Slide Image Placeholder 1"/>
+          <p:cNvSpPr>
+            <a:spLocks noGrp="1"/>
+          </p:cNvSpPr>
+          <p:nvPr>
+            <p:ph type="sldImg" idx="2"/>
+          </p:nvPr>
+        </p:nvSpPr>
+        <p:spPr/>
+      </p:sp>
+      <p:sp>
+        <p:nvSpPr>
+          <p:cNvPr id="3" name="Notes Placeholder 2"/>
+          <p:cNvSpPr>
+            <a:spLocks noGrp="1"/>
+          </p:cNvSpPr>
+          <p:nvPr>
+            <p:ph type="body" idx="3" sz="quarter"/>
+          </p:nvPr>
+        </p:nvSpPr>
+        <p:spPr/>
+        <p:txBody>
+          <a:bodyPr/>
+          <a:lstStyle/>
+          <a:p>
+            <a:r>
+              <a:t>BILAL presents. Say the honest version before anyone asks. Credibility is the point of this slide: calibration yes, raw training no, Lahore data comes from the pilot.</a:t>
+            </a:r>
+          </a:p>
+        </p:txBody>
+      </p:sp>
+      <p:sp>
+        <p:nvSpPr>
+          <p:cNvPr id="4" name="Slide Number Placeholder 3"/>
+          <p:cNvSpPr>
+            <a:spLocks noGrp="1"/>
+          </p:cNvSpPr>
+          <p:nvPr>
+            <p:ph type="sldNum" idx="5" sz="quarter"/>
+          </p:nvPr>
+        </p:nvSpPr>
+        <p:spPr/>
+      </p:sp>
+    </p:spTree>
+  </p:cSld>
+  <p:clrMapOvr>
+    <a:masterClrMapping/>
+  </p:clrMapOvr>
+</p:notes>
+</file>
+
+<file path=ppt/notesSlides/notesSlide8.xml><?xml version="1.0" encoding="utf-8"?>
+<p:notes xmlns:a="http://schemas.openxmlformats.org/drawingml/2006/main" xmlns:p="http://schemas.openxmlformats.org/presentationml/2006/main" xmlns:r="http://schemas.openxmlformats.org/officeDocument/2006/relationships">
+  <p:cSld>
+    <p:spTree>
+      <p:nvGrpSpPr>
+        <p:cNvPr id="1" name=""/>
+        <p:cNvGrpSpPr/>
+        <p:nvPr/>
+      </p:nvGrpSpPr>
+      <p:grpSpPr>
+        <a:xfrm>
+          <a:off x="0" y="0"/>
+          <a:ext cx="0" cy="0"/>
+          <a:chOff x="0" y="0"/>
+          <a:chExt cx="0" cy="0"/>
+        </a:xfrm>
+      </p:grpSpPr>
+      <p:sp>
+        <p:nvSpPr>
+          <p:cNvPr id="2" name="Slide Image Placeholder 1"/>
+          <p:cNvSpPr>
+            <a:spLocks noGrp="1"/>
+          </p:cNvSpPr>
+          <p:nvPr>
+            <p:ph type="sldImg" idx="2"/>
+          </p:nvPr>
+        </p:nvSpPr>
+        <p:spPr/>
+      </p:sp>
+      <p:sp>
+        <p:nvSpPr>
+          <p:cNvPr id="3" name="Notes Placeholder 2"/>
+          <p:cNvSpPr>
+            <a:spLocks noGrp="1"/>
+          </p:cNvSpPr>
+          <p:nvPr>
+            <p:ph type="body" idx="3" sz="quarter"/>
+          </p:nvPr>
+        </p:nvSpPr>
+        <p:spPr/>
+        <p:txBody>
+          <a:bodyPr/>
+          <a:lstStyle/>
+          <a:p>
+            <a:r>
+              <a:t>AWAIS presents. Read the table slowly. Wins on asymmetric and school, tie on balanced. Say the tie out loud yourself; it proves honesty. Training is still running to break it.</a:t>
+            </a:r>
+          </a:p>
+        </p:txBody>
+      </p:sp>
+      <p:sp>
+        <p:nvSpPr>
+          <p:cNvPr id="4" name="Slide Number Placeholder 3"/>
+          <p:cNvSpPr>
+            <a:spLocks noGrp="1"/>
+          </p:cNvSpPr>
+          <p:nvPr>
+            <p:ph type="sldNum" idx="5" sz="quarter"/>
+          </p:nvPr>
+        </p:nvSpPr>
+        <p:spPr/>
+      </p:sp>
+    </p:spTree>
+  </p:cSld>
+  <p:clrMapOvr>
+    <a:masterClrMapping/>
+  </p:clrMapOvr>
+</p:notes>
+</file>
+
+<file path=ppt/notesSlides/notesSlide9.xml><?xml version="1.0" encoding="utf-8"?>
+<p:notes xmlns:a="http://schemas.openxmlformats.org/drawingml/2006/main" xmlns:p="http://schemas.openxmlformats.org/presentationml/2006/main" xmlns:r="http://schemas.openxmlformats.org/officeDocument/2006/relationships">
+  <p:cSld>
+    <p:spTree>
+      <p:nvGrpSpPr>
+        <p:cNvPr id="1" name=""/>
+        <p:cNvGrpSpPr/>
+        <p:nvPr/>
+      </p:nvGrpSpPr>
+      <p:grpSpPr>
+        <a:xfrm>
+          <a:off x="0" y="0"/>
+          <a:ext cx="0" cy="0"/>
+          <a:chOff x="0" y="0"/>
+          <a:chExt cx="0" cy="0"/>
+        </a:xfrm>
+      </p:grpSpPr>
+      <p:sp>
+        <p:nvSpPr>
+          <p:cNvPr id="2" name="Slide Image Placeholder 1"/>
+          <p:cNvSpPr>
+            <a:spLocks noGrp="1"/>
+          </p:cNvSpPr>
+          <p:nvPr>
+            <p:ph type="sldImg" idx="2"/>
+          </p:nvPr>
+        </p:nvSpPr>
+        <p:spPr/>
+      </p:sp>
+      <p:sp>
+        <p:nvSpPr>
+          <p:cNvPr id="3" name="Notes Placeholder 2"/>
+          <p:cNvSpPr>
+            <a:spLocks noGrp="1"/>
+          </p:cNvSpPr>
+          <p:nvPr>
+            <p:ph type="body" idx="3" sz="quarter"/>
+          </p:nvPr>
+        </p:nvSpPr>
+        <p:spPr/>
+        <p:txBody>
+          <a:bodyPr/>
+          <a:lstStyle/>
+          <a:p>
+            <a:r>
+              <a:t>AWAIS presents. Same traffic stream per cell, three controllers. Big wins under load (tidal, bursts, night, school); honest ties on balanced/sensor. The point: we publish the harness, competitors publish marketing numbers.</a:t>
+            </a:r>
+          </a:p>
+        </p:txBody>
+      </p:sp>
+      <p:sp>
+        <p:nvSpPr>
+          <p:cNvPr id="4" name="Slide Number Placeholder 3"/>
+          <p:cNvSpPr>
+            <a:spLocks noGrp="1"/>
+          </p:cNvSpPr>
+          <p:nvPr>
+            <p:ph type="sldNum" idx="5" sz="quarter"/>
+          </p:nvPr>
+        </p:nvSpPr>
+        <p:spPr/>
+      </p:sp>
+    </p:spTree>
+  </p:cSld>
+  <p:clrMapOvr>
+    <a:masterClrMapping/>
+  </p:clrMapOvr>
+</p:notes>
 </file>
 
 <file path=ppt/slideLayouts/slideLayout1.xml><?xml version="1.0" encoding="utf-8"?>
@@ -3115,8 +4455,8 @@
         </p:blipFill>
         <p:spPr>
           <a:xfrm>
-            <a:off x="502920" y="310896"/>
-            <a:ext cx="1874519" cy="666496"/>
+            <a:off x="5184648" y="1005840"/>
+            <a:ext cx="1828800" cy="650240"/>
           </a:xfrm>
           <a:prstGeom prst="rect">
             <a:avLst/>
@@ -3131,8 +4471,8 @@
         </p:nvSpPr>
         <p:spPr>
           <a:xfrm>
-            <a:off x="502920" y="1207008"/>
-            <a:ext cx="11155680" cy="320040"/>
+            <a:off x="640080" y="2834640"/>
+            <a:ext cx="10881360" cy="1097280"/>
           </a:xfrm>
           <a:prstGeom prst="rect">
             <a:avLst/>
@@ -3140,15 +4480,229 @@
           <a:noFill/>
         </p:spPr>
         <p:txBody>
-          <a:bodyPr wrap="square" anchor="t" lIns="0" rIns="0" tIns="0" bIns="0">
+          <a:bodyPr wrap="square">
             <a:spAutoFit/>
           </a:bodyPr>
           <a:lstStyle/>
           <a:p>
+            <a:pPr algn="ctr">
+              <a:spcAft>
+                <a:spcPts val="600"/>
+              </a:spcAft>
+            </a:pPr>
+            <a:r>
+              <a:rPr sz="7200" b="1">
+                <a:solidFill>
+                  <a:srgbClr val="EDF2F7"/>
+                </a:solidFill>
+                <a:latin typeface="Space Grotesk"/>
+              </a:rPr>
+              <a:t>SABZ</a:t>
+            </a:r>
+          </a:p>
+        </p:txBody>
+      </p:sp>
+      <p:sp>
+        <p:nvSpPr>
+          <p:cNvPr id="4" name="TextBox 3"/>
+          <p:cNvSpPr txBox="1"/>
+          <p:nvPr/>
+        </p:nvSpPr>
+        <p:spPr>
+          <a:xfrm>
+            <a:off x="640080" y="3794760"/>
+            <a:ext cx="10881360" cy="548640"/>
+          </a:xfrm>
+          <a:prstGeom prst="rect">
+            <a:avLst/>
+          </a:prstGeom>
+          <a:noFill/>
+        </p:spPr>
+        <p:txBody>
+          <a:bodyPr wrap="square">
+            <a:spAutoFit/>
+          </a:bodyPr>
+          <a:lstStyle/>
+          <a:p>
+            <a:pPr algn="ctr">
+              <a:spcAft>
+                <a:spcPts val="600"/>
+              </a:spcAft>
+            </a:pPr>
+            <a:r>
+              <a:rPr sz="2000" b="1">
+                <a:solidFill>
+                  <a:srgbClr val="00E676"/>
+                </a:solidFill>
+                <a:latin typeface="Space Grotesk"/>
+              </a:rPr>
+              <a:t>AI-ADAPTIVE TRAFFIC SIGNALS</a:t>
+            </a:r>
+          </a:p>
+        </p:txBody>
+      </p:sp>
+      <p:sp>
+        <p:nvSpPr>
+          <p:cNvPr id="5" name="TextBox 4"/>
+          <p:cNvSpPr txBox="1"/>
+          <p:nvPr/>
+        </p:nvSpPr>
+        <p:spPr>
+          <a:xfrm>
+            <a:off x="640080" y="4480560"/>
+            <a:ext cx="10881360" cy="731520"/>
+          </a:xfrm>
+          <a:prstGeom prst="rect">
+            <a:avLst/>
+          </a:prstGeom>
+          <a:noFill/>
+        </p:spPr>
+        <p:txBody>
+          <a:bodyPr wrap="square">
+            <a:spAutoFit/>
+          </a:bodyPr>
+          <a:lstStyle/>
+          <a:p>
+            <a:pPr algn="ctr">
+              <a:spcAft>
+                <a:spcPts val="600"/>
+              </a:spcAft>
+            </a:pPr>
+            <a:r>
+              <a:rPr sz="1800" b="0">
+                <a:solidFill>
+                  <a:srgbClr val="93A1C0"/>
+                </a:solidFill>
+                <a:latin typeface="Inter"/>
+              </a:rPr>
+              <a:t>Green follows real demand.</a:t>
+            </a:r>
+          </a:p>
+        </p:txBody>
+      </p:sp>
+      <p:sp>
+        <p:nvSpPr>
+          <p:cNvPr id="6" name="TextBox 5"/>
+          <p:cNvSpPr txBox="1"/>
+          <p:nvPr/>
+        </p:nvSpPr>
+        <p:spPr>
+          <a:xfrm>
+            <a:off x="640080" y="5394960"/>
+            <a:ext cx="10881360" cy="914400"/>
+          </a:xfrm>
+          <a:prstGeom prst="rect">
+            <a:avLst/>
+          </a:prstGeom>
+          <a:noFill/>
+        </p:spPr>
+        <p:txBody>
+          <a:bodyPr wrap="square">
+            <a:spAutoFit/>
+          </a:bodyPr>
+          <a:lstStyle/>
+          <a:p>
+            <a:pPr algn="ctr">
+              <a:spcAft>
+                <a:spcPts val="600"/>
+              </a:spcAft>
+            </a:pPr>
+            <a:r>
+              <a:rPr sz="1600" b="0">
+                <a:solidFill>
+                  <a:srgbClr val="EDF2F7"/>
+                </a:solidFill>
+                <a:latin typeface="Inter"/>
+              </a:rPr>
+              <a:t>Abdur Rehman  |  M. Bilal  |  Awais  |  Dawood</a:t>
+            </a:r>
+          </a:p>
+          <a:p>
+            <a:pPr algn="ctr">
+              <a:spcAft>
+                <a:spcPts val="600"/>
+              </a:spcAft>
+            </a:pPr>
+            <a:r>
+              <a:rPr sz="1400" b="0">
+                <a:solidFill>
+                  <a:srgbClr val="93A1C0"/>
+                </a:solidFill>
+                <a:latin typeface="Inter"/>
+              </a:rPr>
+              <a:t>Lahore Garrison University, B.S. Computer Science</a:t>
+            </a:r>
+          </a:p>
+          <a:p>
+            <a:pPr algn="ctr">
+              <a:spcAft>
+                <a:spcPts val="600"/>
+              </a:spcAft>
+            </a:pPr>
+            <a:r>
+              <a:rPr sz="1400" b="0">
+                <a:solidFill>
+                  <a:srgbClr val="93A1C0"/>
+                </a:solidFill>
+                <a:latin typeface="Inter"/>
+              </a:rPr>
+              <a:t>Garrison 4th International AI Championship - AI in Urban Tech</a:t>
+            </a:r>
+          </a:p>
+        </p:txBody>
+      </p:sp>
+    </p:spTree>
+  </p:cSld>
+  <p:clrMapOvr>
+    <a:masterClrMapping/>
+  </p:clrMapOvr>
+</p:sld>
+</file>
+
+<file path=ppt/slides/slide10.xml><?xml version="1.0" encoding="utf-8"?>
+<p:sld xmlns:a="http://schemas.openxmlformats.org/drawingml/2006/main" xmlns:p="http://schemas.openxmlformats.org/presentationml/2006/main" xmlns:r="http://schemas.openxmlformats.org/officeDocument/2006/relationships">
+  <p:cSld>
+    <p:bg>
+      <p:bgPr>
+        <a:solidFill>
+          <a:srgbClr val="0B1220"/>
+        </a:solidFill>
+        <a:effectLst/>
+      </p:bgPr>
+    </p:bg>
+    <p:spTree>
+      <p:nvGrpSpPr>
+        <p:cNvPr id="1" name=""/>
+        <p:cNvGrpSpPr/>
+        <p:nvPr/>
+      </p:nvGrpSpPr>
+      <p:grpSpPr/>
+      <p:sp>
+        <p:nvSpPr>
+          <p:cNvPr id="2" name="TextBox 1"/>
+          <p:cNvSpPr txBox="1"/>
+          <p:nvPr/>
+        </p:nvSpPr>
+        <p:spPr>
+          <a:xfrm>
+            <a:off x="640080" y="320040"/>
+            <a:ext cx="10881360" cy="457200"/>
+          </a:xfrm>
+          <a:prstGeom prst="rect">
+            <a:avLst/>
+          </a:prstGeom>
+          <a:noFill/>
+        </p:spPr>
+        <p:txBody>
+          <a:bodyPr wrap="square">
+            <a:spAutoFit/>
+          </a:bodyPr>
+          <a:lstStyle/>
+          <a:p>
             <a:pPr algn="l">
-              <a:lnSpc>
-                <a:spcPct val="112000"/>
-              </a:lnSpc>
+              <a:spcAft>
+                <a:spcPts val="600"/>
+              </a:spcAft>
             </a:pPr>
             <a:r>
               <a:rPr sz="1300" b="1">
@@ -3157,21 +4711,21 @@
                 </a:solidFill>
                 <a:latin typeface="Space Grotesk"/>
               </a:rPr>
-              <a:t>THE PROBLEM</a:t>
-            </a:r>
-          </a:p>
-        </p:txBody>
-      </p:sp>
-      <p:sp>
-        <p:nvSpPr>
-          <p:cNvPr id="4" name="TextBox 3"/>
+              <a:t>09  BEYOND ONE JUNCTION</a:t>
+            </a:r>
+          </a:p>
+        </p:txBody>
+      </p:sp>
+      <p:sp>
+        <p:nvSpPr>
+          <p:cNvPr id="3" name="TextBox 2"/>
           <p:cNvSpPr txBox="1"/>
           <p:nvPr/>
         </p:nvSpPr>
         <p:spPr>
           <a:xfrm>
-            <a:off x="502920" y="1536192"/>
-            <a:ext cx="11201400" cy="868680"/>
+            <a:off x="640080" y="685800"/>
+            <a:ext cx="10881360" cy="1463040"/>
           </a:xfrm>
           <a:prstGeom prst="rect">
             <a:avLst/>
@@ -3179,15 +4733,15 @@
           <a:noFill/>
         </p:spPr>
         <p:txBody>
-          <a:bodyPr wrap="square" anchor="t" lIns="0" rIns="0" tIns="0" bIns="0">
+          <a:bodyPr wrap="square">
             <a:spAutoFit/>
           </a:bodyPr>
           <a:lstStyle/>
           <a:p>
             <a:pPr algn="l">
-              <a:lnSpc>
-                <a:spcPct val="112000"/>
-              </a:lnSpc>
+              <a:spcAft>
+                <a:spcPts val="600"/>
+              </a:spcAft>
             </a:pPr>
             <a:r>
               <a:rPr sz="4000" b="1">
@@ -3196,218 +4750,24 @@
                 </a:solidFill>
                 <a:latin typeface="Space Grotesk"/>
               </a:rPr>
-              <a:t>Traffic lights that cannot see</a:t>
-            </a:r>
-          </a:p>
-        </p:txBody>
-      </p:sp>
-      <p:sp>
-        <p:nvSpPr>
-          <p:cNvPr id="5" name="TextBox 4"/>
-          <p:cNvSpPr txBox="1"/>
-          <p:nvPr/>
-        </p:nvSpPr>
-        <p:spPr>
-          <a:xfrm>
-            <a:off x="502920" y="2606040"/>
-            <a:ext cx="6903720" cy="685800"/>
-          </a:xfrm>
-          <a:prstGeom prst="rect">
-            <a:avLst/>
-          </a:prstGeom>
-          <a:noFill/>
-        </p:spPr>
-        <p:txBody>
-          <a:bodyPr wrap="square" anchor="t" lIns="0" rIns="0" tIns="0" bIns="0">
-            <a:spAutoFit/>
-          </a:bodyPr>
-          <a:lstStyle/>
-          <a:p>
-            <a:pPr algn="l">
-              <a:lnSpc>
-                <a:spcPct val="118000"/>
-              </a:lnSpc>
-            </a:pPr>
-            <a:r>
-              <a:rPr sz="1550" b="1">
-                <a:solidFill>
-                  <a:srgbClr val="00E676"/>
-                </a:solidFill>
-                <a:latin typeface="Inter"/>
-              </a:rPr>
-              <a:t>•  </a:t>
-            </a:r>
-            <a:r>
-              <a:rPr sz="1550" b="0">
-                <a:solidFill>
-                  <a:srgbClr val="EDF2F7"/>
-                </a:solidFill>
-                <a:latin typeface="Inter"/>
-              </a:rPr>
-              <a:t>Lahore moves 4.1 million vehicles through signals that follow a clock, not the traffic.</a:t>
-            </a:r>
-          </a:p>
-        </p:txBody>
-      </p:sp>
-      <p:sp>
-        <p:nvSpPr>
-          <p:cNvPr id="6" name="TextBox 5"/>
-          <p:cNvSpPr txBox="1"/>
-          <p:nvPr/>
-        </p:nvSpPr>
-        <p:spPr>
-          <a:xfrm>
-            <a:off x="502920" y="3401568"/>
-            <a:ext cx="6903720" cy="685800"/>
-          </a:xfrm>
-          <a:prstGeom prst="rect">
-            <a:avLst/>
-          </a:prstGeom>
-          <a:noFill/>
-        </p:spPr>
-        <p:txBody>
-          <a:bodyPr wrap="square" anchor="t" lIns="0" rIns="0" tIns="0" bIns="0">
-            <a:spAutoFit/>
-          </a:bodyPr>
-          <a:lstStyle/>
-          <a:p>
-            <a:pPr algn="l">
-              <a:lnSpc>
-                <a:spcPct val="118000"/>
-              </a:lnSpc>
-            </a:pPr>
-            <a:r>
-              <a:rPr sz="1550" b="1">
-                <a:solidFill>
-                  <a:srgbClr val="00E676"/>
-                </a:solidFill>
-                <a:latin typeface="Inter"/>
-              </a:rPr>
-              <a:t>•  </a:t>
-            </a:r>
-            <a:r>
-              <a:rPr sz="1550" b="0">
-                <a:solidFill>
-                  <a:srgbClr val="EDF2F7"/>
-                </a:solidFill>
-                <a:latin typeface="Inter"/>
-              </a:rPr>
-              <a:t>The average commute takes 34.8 minutes, much of it spent idling at red lights.</a:t>
-            </a:r>
-          </a:p>
-        </p:txBody>
-      </p:sp>
-      <p:sp>
-        <p:nvSpPr>
-          <p:cNvPr id="7" name="TextBox 6"/>
-          <p:cNvSpPr txBox="1"/>
-          <p:nvPr/>
-        </p:nvSpPr>
-        <p:spPr>
-          <a:xfrm>
-            <a:off x="502920" y="4197096"/>
-            <a:ext cx="6903720" cy="914400"/>
-          </a:xfrm>
-          <a:prstGeom prst="rect">
-            <a:avLst/>
-          </a:prstGeom>
-          <a:noFill/>
-        </p:spPr>
-        <p:txBody>
-          <a:bodyPr wrap="square" anchor="t" lIns="0" rIns="0" tIns="0" bIns="0">
-            <a:spAutoFit/>
-          </a:bodyPr>
-          <a:lstStyle/>
-          <a:p>
-            <a:pPr algn="l">
-              <a:lnSpc>
-                <a:spcPct val="118000"/>
-              </a:lnSpc>
-            </a:pPr>
-            <a:r>
-              <a:rPr sz="1550" b="1">
-                <a:solidFill>
-                  <a:srgbClr val="00E676"/>
-                </a:solidFill>
-                <a:latin typeface="Inter"/>
-              </a:rPr>
-              <a:t>•  </a:t>
-            </a:r>
-            <a:r>
-              <a:rPr sz="1550" b="0">
-                <a:solidFill>
-                  <a:srgbClr val="EDF2F7"/>
-                </a:solidFill>
-                <a:latin typeface="Inter"/>
-              </a:rPr>
-              <a:t>Fixed timers run blind cycles: an empty road can hold green while a long queue burns time and fuel on the cross street.</a:t>
-            </a:r>
-          </a:p>
-        </p:txBody>
-      </p:sp>
-      <p:sp>
-        <p:nvSpPr>
-          <p:cNvPr id="8" name="TextBox 7"/>
-          <p:cNvSpPr txBox="1"/>
-          <p:nvPr/>
-        </p:nvSpPr>
-        <p:spPr>
-          <a:xfrm>
-            <a:off x="502920" y="5138928"/>
-            <a:ext cx="6903720" cy="566928"/>
-          </a:xfrm>
-          <a:prstGeom prst="rect">
-            <a:avLst/>
-          </a:prstGeom>
-          <a:noFill/>
-        </p:spPr>
-        <p:txBody>
-          <a:bodyPr wrap="square" anchor="t" lIns="0" rIns="0" tIns="0" bIns="0">
-            <a:spAutoFit/>
-          </a:bodyPr>
-          <a:lstStyle/>
-          <a:p>
-            <a:pPr algn="l">
-              <a:lnSpc>
-                <a:spcPct val="118000"/>
-              </a:lnSpc>
-            </a:pPr>
-            <a:r>
-              <a:rPr sz="1550" b="1">
-                <a:solidFill>
-                  <a:srgbClr val="00E676"/>
-                </a:solidFill>
-                <a:latin typeface="Inter"/>
-              </a:rPr>
-              <a:t>•  </a:t>
-            </a:r>
-            <a:r>
-              <a:rPr sz="1550" b="0">
-                <a:solidFill>
-                  <a:srgbClr val="EDF2F7"/>
-                </a:solidFill>
-                <a:latin typeface="Inter"/>
-              </a:rPr>
-              <a:t>The signal never sees which road actually needs the green.</a:t>
-            </a:r>
-          </a:p>
-        </p:txBody>
-      </p:sp>
-      <p:sp>
-        <p:nvSpPr>
-          <p:cNvPr id="9" name="Rounded Rectangle 8"/>
+              <a:t>Corridors that talk to each other.</a:t>
+            </a:r>
+          </a:p>
+        </p:txBody>
+      </p:sp>
+      <p:sp>
+        <p:nvSpPr>
+          <p:cNvPr id="4" name="Rounded Rectangle 3"/>
           <p:cNvSpPr/>
           <p:nvPr/>
         </p:nvSpPr>
         <p:spPr>
           <a:xfrm>
-            <a:off x="7772400" y="2560320"/>
-            <a:ext cx="3913632" cy="3127248"/>
+            <a:off x="640080" y="2194560"/>
+            <a:ext cx="5303520" cy="1737360"/>
           </a:xfrm>
           <a:prstGeom prst="roundRect">
-            <a:avLst>
-              <a:gd name="adj" fmla="val 5500"/>
-            </a:avLst>
+            <a:avLst/>
           </a:prstGeom>
           <a:solidFill>
             <a:srgbClr val="141D33"/>
@@ -3417,7 +4777,6 @@
               <a:srgbClr val="24304D"/>
             </a:solidFill>
           </a:ln>
-          <a:effectLst/>
         </p:spPr>
         <p:style>
           <a:lnRef idx="1">
@@ -3443,14 +4802,14 @@
       </p:sp>
       <p:sp>
         <p:nvSpPr>
-          <p:cNvPr id="10" name="TextBox 9"/>
+          <p:cNvPr id="5" name="TextBox 4"/>
           <p:cNvSpPr txBox="1"/>
           <p:nvPr/>
         </p:nvSpPr>
         <p:spPr>
           <a:xfrm>
-            <a:off x="8028431" y="2743200"/>
-            <a:ext cx="3429000" cy="274320"/>
+            <a:off x="868680" y="2377440"/>
+            <a:ext cx="4846320" cy="1371600"/>
           </a:xfrm>
           <a:prstGeom prst="rect">
             <a:avLst/>
@@ -3458,53 +4817,66 @@
           <a:noFill/>
         </p:spPr>
         <p:txBody>
-          <a:bodyPr wrap="square" anchor="t" lIns="0" rIns="0" tIns="0" bIns="0">
+          <a:bodyPr wrap="square">
             <a:spAutoFit/>
           </a:bodyPr>
           <a:lstStyle/>
           <a:p>
             <a:pPr algn="l">
-              <a:lnSpc>
-                <a:spcPct val="112000"/>
-              </a:lnSpc>
+              <a:spcAft>
+                <a:spcPts val="600"/>
+              </a:spcAft>
             </a:pPr>
             <a:r>
-              <a:rPr sz="1250" b="1">
+              <a:rPr sz="1400" b="1">
                 <a:solidFill>
                   <a:srgbClr val="00E676"/>
                 </a:solidFill>
                 <a:latin typeface="Space Grotesk"/>
               </a:rPr>
-              <a:t>THE BLIND CYCLE</a:t>
-            </a:r>
-          </a:p>
-        </p:txBody>
-      </p:sp>
-      <p:sp>
-        <p:nvSpPr>
-          <p:cNvPr id="11" name="Rounded Rectangle 10"/>
+              <a:t>GREEN WAVES, DECENTRALIZED</a:t>
+            </a:r>
+          </a:p>
+          <a:p>
+            <a:pPr algn="l">
+              <a:spcAft>
+                <a:spcPts val="600"/>
+              </a:spcAft>
+            </a:pPr>
+            <a:r>
+              <a:rPr sz="1500" b="0">
+                <a:solidFill>
+                  <a:srgbClr val="EDF2F7"/>
+                </a:solidFill>
+                <a:latin typeface="Inter"/>
+              </a:rPr>
+              <a:t>Neighbours exchange supply hints and platoon arrivals - no central master to fail. Corridor benchmark: 25.45 s vs 26.00 s coordinated vs independent.</a:t>
+            </a:r>
+          </a:p>
+        </p:txBody>
+      </p:sp>
+      <p:sp>
+        <p:nvSpPr>
+          <p:cNvPr id="6" name="Rounded Rectangle 5"/>
           <p:cNvSpPr/>
           <p:nvPr/>
         </p:nvSpPr>
         <p:spPr>
           <a:xfrm>
-            <a:off x="8028431" y="3182112"/>
-            <a:ext cx="1627632" cy="566928"/>
+            <a:off x="6217920" y="2194560"/>
+            <a:ext cx="5303520" cy="1737360"/>
           </a:xfrm>
           <a:prstGeom prst="roundRect">
-            <a:avLst>
-              <a:gd name="adj" fmla="val 5500"/>
-            </a:avLst>
+            <a:avLst/>
           </a:prstGeom>
           <a:solidFill>
-            <a:srgbClr val="10281C"/>
+            <a:srgbClr val="141D33"/>
           </a:solidFill>
-          <a:ln w="15240">
+          <a:ln w="12700">
             <a:solidFill>
-              <a:srgbClr val="00E676"/>
+              <a:srgbClr val="24304D"/>
             </a:solidFill>
           </a:ln>
-          <a:effectLst/>
         </p:spPr>
         <p:style>
           <a:lnRef idx="1">
@@ -3530,14 +4902,14 @@
       </p:sp>
       <p:sp>
         <p:nvSpPr>
-          <p:cNvPr id="12" name="TextBox 11"/>
+          <p:cNvPr id="7" name="TextBox 6"/>
           <p:cNvSpPr txBox="1"/>
           <p:nvPr/>
         </p:nvSpPr>
         <p:spPr>
           <a:xfrm>
-            <a:off x="8028431" y="3310128"/>
-            <a:ext cx="1627632" cy="320040"/>
+            <a:off x="6446520" y="2377440"/>
+            <a:ext cx="4846320" cy="1371600"/>
           </a:xfrm>
           <a:prstGeom prst="rect">
             <a:avLst/>
@@ -3545,53 +4917,66 @@
           <a:noFill/>
         </p:spPr>
         <p:txBody>
-          <a:bodyPr wrap="square" anchor="t" lIns="0" rIns="0" tIns="0" bIns="0">
+          <a:bodyPr wrap="square">
             <a:spAutoFit/>
           </a:bodyPr>
           <a:lstStyle/>
           <a:p>
-            <a:pPr algn="ctr">
-              <a:lnSpc>
-                <a:spcPct val="112000"/>
-              </a:lnSpc>
+            <a:pPr algn="l">
+              <a:spcAft>
+                <a:spcPts val="600"/>
+              </a:spcAft>
             </a:pPr>
             <a:r>
-              <a:rPr sz="1150" b="1">
+              <a:rPr sz="1400" b="1">
+                <a:solidFill>
+                  <a:srgbClr val="00E676"/>
+                </a:solidFill>
+                <a:latin typeface="Space Grotesk"/>
+              </a:rPr>
+              <a:t>SELF-TUNING OFFSETS</a:t>
+            </a:r>
+          </a:p>
+          <a:p>
+            <a:pPr algn="l">
+              <a:spcAft>
+                <a:spcPts val="600"/>
+              </a:spcAft>
+            </a:pPr>
+            <a:r>
+              <a:rPr sz="1500" b="0">
                 <a:solidFill>
                   <a:srgbClr val="EDF2F7"/>
                 </a:solidFill>
-                <a:latin typeface="Space Grotesk"/>
+                <a:latin typeface="Inter"/>
               </a:rPr>
-              <a:t>NS GREEN · 30s</a:t>
-            </a:r>
-          </a:p>
-        </p:txBody>
-      </p:sp>
-      <p:sp>
-        <p:nvSpPr>
-          <p:cNvPr id="13" name="Rounded Rectangle 12"/>
+              <a:t>SCOOT-style closed loop: observed link travel bends each offset - capped at 4 s per step, 40 s from plan. The plan can never run away.</a:t>
+            </a:r>
+          </a:p>
+        </p:txBody>
+      </p:sp>
+      <p:sp>
+        <p:nvSpPr>
+          <p:cNvPr id="8" name="Rounded Rectangle 7"/>
           <p:cNvSpPr/>
           <p:nvPr/>
         </p:nvSpPr>
         <p:spPr>
           <a:xfrm>
-            <a:off x="9802368" y="3182112"/>
-            <a:ext cx="1627632" cy="566928"/>
+            <a:off x="640080" y="4114800"/>
+            <a:ext cx="5303520" cy="1737360"/>
           </a:xfrm>
           <a:prstGeom prst="roundRect">
-            <a:avLst>
-              <a:gd name="adj" fmla="val 5500"/>
-            </a:avLst>
+            <a:avLst/>
           </a:prstGeom>
           <a:solidFill>
             <a:srgbClr val="141D33"/>
           </a:solidFill>
-          <a:ln w="15240">
+          <a:ln w="12700">
             <a:solidFill>
-              <a:srgbClr val="F87171"/>
+              <a:srgbClr val="24304D"/>
             </a:solidFill>
           </a:ln>
-          <a:effectLst/>
         </p:spPr>
         <p:style>
           <a:lnRef idx="1">
@@ -3617,14 +5002,14 @@
       </p:sp>
       <p:sp>
         <p:nvSpPr>
-          <p:cNvPr id="14" name="TextBox 13"/>
+          <p:cNvPr id="9" name="TextBox 8"/>
           <p:cNvSpPr txBox="1"/>
           <p:nvPr/>
         </p:nvSpPr>
         <p:spPr>
           <a:xfrm>
-            <a:off x="9802368" y="3310128"/>
-            <a:ext cx="1627632" cy="320040"/>
+            <a:off x="868680" y="4297680"/>
+            <a:ext cx="4846320" cy="1371600"/>
           </a:xfrm>
           <a:prstGeom prst="rect">
             <a:avLst/>
@@ -3632,88 +5017,66 @@
           <a:noFill/>
         </p:spPr>
         <p:txBody>
-          <a:bodyPr wrap="square" anchor="t" lIns="0" rIns="0" tIns="0" bIns="0">
+          <a:bodyPr wrap="square">
             <a:spAutoFit/>
           </a:bodyPr>
           <a:lstStyle/>
           <a:p>
-            <a:pPr algn="ctr">
-              <a:lnSpc>
-                <a:spcPct val="112000"/>
-              </a:lnSpc>
+            <a:pPr algn="l">
+              <a:spcAft>
+                <a:spcPts val="600"/>
+              </a:spcAft>
             </a:pPr>
             <a:r>
-              <a:rPr sz="1150" b="1">
+              <a:rPr sz="1400" b="1">
+                <a:solidFill>
+                  <a:srgbClr val="00E676"/>
+                </a:solidFill>
+                <a:latin typeface="Space Grotesk"/>
+              </a:rPr>
+              <a:t>BUS PRIORITY (TSP)</a:t>
+            </a:r>
+          </a:p>
+          <a:p>
+            <a:pPr algn="l">
+              <a:spcAft>
+                <a:spcPts val="600"/>
+              </a:spcAft>
+            </a:pPr>
+            <a:r>
+              <a:rPr sz="1500" b="0">
                 <a:solidFill>
                   <a:srgbClr val="EDF2F7"/>
                 </a:solidFill>
-                <a:latin typeface="Space Grotesk"/>
-              </a:rPr>
-              <a:t>EW GREEN · 30s</a:t>
-            </a:r>
-          </a:p>
-        </p:txBody>
-      </p:sp>
-      <p:sp>
-        <p:nvSpPr>
-          <p:cNvPr id="15" name="TextBox 14"/>
-          <p:cNvSpPr txBox="1"/>
-          <p:nvPr/>
-        </p:nvSpPr>
-        <p:spPr>
-          <a:xfrm>
-            <a:off x="8028431" y="3931920"/>
-            <a:ext cx="3401568" cy="594360"/>
-          </a:xfrm>
-          <a:prstGeom prst="rect">
-            <a:avLst/>
-          </a:prstGeom>
-          <a:noFill/>
-        </p:spPr>
-        <p:txBody>
-          <a:bodyPr wrap="square" anchor="t" lIns="0" rIns="0" tIns="0" bIns="0">
-            <a:spAutoFit/>
-          </a:bodyPr>
-          <a:lstStyle/>
-          <a:p>
-            <a:pPr algn="l">
-              <a:lnSpc>
-                <a:spcPct val="125000"/>
-              </a:lnSpc>
-            </a:pPr>
-            <a:r>
-              <a:rPr sz="1250" b="0">
-                <a:solidFill>
-                  <a:srgbClr val="93A1C0"/>
-                </a:solidFill>
                 <a:latin typeface="Inter"/>
               </a:rPr>
-              <a:t>Then repeat. The same split at rush hour and at 3 AM, whatever the road looks like.</a:t>
-            </a:r>
-          </a:p>
-        </p:txBody>
-      </p:sp>
-      <p:sp>
-        <p:nvSpPr>
-          <p:cNvPr id="16" name="Rectangle 15"/>
+              <a:t>A detected bus holds green up to 15 s past minimum - then safety limits, max green and emergency preemption still win, always.</a:t>
+            </a:r>
+          </a:p>
+        </p:txBody>
+      </p:sp>
+      <p:sp>
+        <p:nvSpPr>
+          <p:cNvPr id="10" name="Rounded Rectangle 9"/>
           <p:cNvSpPr/>
           <p:nvPr/>
         </p:nvSpPr>
         <p:spPr>
           <a:xfrm>
-            <a:off x="8028431" y="4681728"/>
-            <a:ext cx="3401568" cy="18288"/>
-          </a:xfrm>
-          <a:prstGeom prst="rect">
+            <a:off x="6217920" y="4114800"/>
+            <a:ext cx="5303520" cy="1737360"/>
+          </a:xfrm>
+          <a:prstGeom prst="roundRect">
             <a:avLst/>
           </a:prstGeom>
           <a:solidFill>
-            <a:srgbClr val="24304D"/>
+            <a:srgbClr val="141D33"/>
           </a:solidFill>
-          <a:ln>
-            <a:noFill/>
+          <a:ln w="12700">
+            <a:solidFill>
+              <a:srgbClr val="24304D"/>
+            </a:solidFill>
           </a:ln>
-          <a:effectLst/>
         </p:spPr>
         <p:style>
           <a:lnRef idx="1">
@@ -3739,14 +5102,14 @@
       </p:sp>
       <p:sp>
         <p:nvSpPr>
-          <p:cNvPr id="17" name="TextBox 16"/>
+          <p:cNvPr id="11" name="TextBox 10"/>
           <p:cNvSpPr txBox="1"/>
           <p:nvPr/>
         </p:nvSpPr>
         <p:spPr>
           <a:xfrm>
-            <a:off x="8028431" y="4828032"/>
-            <a:ext cx="1691640" cy="685800"/>
+            <a:off x="6446520" y="4297680"/>
+            <a:ext cx="4846320" cy="1371600"/>
           </a:xfrm>
           <a:prstGeom prst="rect">
             <a:avLst/>
@@ -3754,190 +5117,32 @@
           <a:noFill/>
         </p:spPr>
         <p:txBody>
-          <a:bodyPr wrap="square" anchor="t" lIns="0" rIns="0" tIns="0" bIns="0">
+          <a:bodyPr wrap="square">
             <a:spAutoFit/>
           </a:bodyPr>
           <a:lstStyle/>
           <a:p>
             <a:pPr algn="l">
-              <a:lnSpc>
-                <a:spcPct val="112000"/>
-              </a:lnSpc>
+              <a:spcAft>
+                <a:spcPts val="600"/>
+              </a:spcAft>
             </a:pPr>
             <a:r>
-              <a:rPr sz="2400" b="1">
+              <a:rPr sz="1400" b="1">
                 <a:solidFill>
                   <a:srgbClr val="00E676"/>
                 </a:solidFill>
                 <a:latin typeface="Space Grotesk"/>
               </a:rPr>
-              <a:t>4.1M</a:t>
-            </a:r>
-          </a:p>
-        </p:txBody>
-      </p:sp>
-      <p:sp>
-        <p:nvSpPr>
-          <p:cNvPr id="18" name="TextBox 17"/>
-          <p:cNvSpPr txBox="1"/>
-          <p:nvPr/>
-        </p:nvSpPr>
-        <p:spPr>
-          <a:xfrm>
-            <a:off x="9692640" y="4828032"/>
-            <a:ext cx="1737360" cy="685800"/>
-          </a:xfrm>
-          <a:prstGeom prst="rect">
-            <a:avLst/>
-          </a:prstGeom>
-          <a:noFill/>
-        </p:spPr>
-        <p:txBody>
-          <a:bodyPr wrap="square" anchor="t" lIns="0" rIns="0" tIns="0" bIns="0">
-            <a:spAutoFit/>
-          </a:bodyPr>
-          <a:lstStyle/>
+              <a:t>GRID-READY</a:t>
+            </a:r>
+          </a:p>
           <a:p>
             <a:pPr algn="l">
-              <a:lnSpc>
-                <a:spcPct val="112000"/>
-              </a:lnSpc>
+              <a:spcAft>
+                <a:spcPts val="600"/>
+              </a:spcAft>
             </a:pPr>
-            <a:r>
-              <a:rPr sz="2400" b="1">
-                <a:solidFill>
-                  <a:srgbClr val="00E676"/>
-                </a:solidFill>
-                <a:latin typeface="Space Grotesk"/>
-              </a:rPr>
-              <a:t>34.8</a:t>
-            </a:r>
-            <a:r>
-              <a:rPr sz="1200" b="0">
-                <a:solidFill>
-                  <a:srgbClr val="93A1C0"/>
-                </a:solidFill>
-                <a:latin typeface="Inter"/>
-              </a:rPr>
-              <a:t> min</a:t>
-            </a:r>
-          </a:p>
-        </p:txBody>
-      </p:sp>
-      <p:sp>
-        <p:nvSpPr>
-          <p:cNvPr id="19" name="TextBox 18"/>
-          <p:cNvSpPr txBox="1"/>
-          <p:nvPr/>
-        </p:nvSpPr>
-        <p:spPr>
-          <a:xfrm>
-            <a:off x="8028431" y="5358384"/>
-            <a:ext cx="1691640" cy="274320"/>
-          </a:xfrm>
-          <a:prstGeom prst="rect">
-            <a:avLst/>
-          </a:prstGeom>
-          <a:noFill/>
-        </p:spPr>
-        <p:txBody>
-          <a:bodyPr wrap="square" anchor="t" lIns="0" rIns="0" tIns="0" bIns="0">
-            <a:spAutoFit/>
-          </a:bodyPr>
-          <a:lstStyle/>
-          <a:p>
-            <a:pPr algn="l">
-              <a:lnSpc>
-                <a:spcPct val="112000"/>
-              </a:lnSpc>
-            </a:pPr>
-            <a:r>
-              <a:rPr sz="1050" b="0">
-                <a:solidFill>
-                  <a:srgbClr val="93A1C0"/>
-                </a:solidFill>
-                <a:latin typeface="Inter"/>
-              </a:rPr>
-              <a:t>vehicles in Lahore</a:t>
-            </a:r>
-          </a:p>
-        </p:txBody>
-      </p:sp>
-      <p:sp>
-        <p:nvSpPr>
-          <p:cNvPr id="20" name="TextBox 19"/>
-          <p:cNvSpPr txBox="1"/>
-          <p:nvPr/>
-        </p:nvSpPr>
-        <p:spPr>
-          <a:xfrm>
-            <a:off x="9692640" y="5358384"/>
-            <a:ext cx="1737360" cy="274320"/>
-          </a:xfrm>
-          <a:prstGeom prst="rect">
-            <a:avLst/>
-          </a:prstGeom>
-          <a:noFill/>
-        </p:spPr>
-        <p:txBody>
-          <a:bodyPr wrap="square" anchor="t" lIns="0" rIns="0" tIns="0" bIns="0">
-            <a:spAutoFit/>
-          </a:bodyPr>
-          <a:lstStyle/>
-          <a:p>
-            <a:pPr algn="l">
-              <a:lnSpc>
-                <a:spcPct val="112000"/>
-              </a:lnSpc>
-            </a:pPr>
-            <a:r>
-              <a:rPr sz="1050" b="0">
-                <a:solidFill>
-                  <a:srgbClr val="93A1C0"/>
-                </a:solidFill>
-                <a:latin typeface="Inter"/>
-              </a:rPr>
-              <a:t>average commute</a:t>
-            </a:r>
-          </a:p>
-        </p:txBody>
-      </p:sp>
-      <p:sp>
-        <p:nvSpPr>
-          <p:cNvPr id="21" name="TextBox 20"/>
-          <p:cNvSpPr txBox="1"/>
-          <p:nvPr/>
-        </p:nvSpPr>
-        <p:spPr>
-          <a:xfrm>
-            <a:off x="502920" y="5943600"/>
-            <a:ext cx="11155680" cy="365760"/>
-          </a:xfrm>
-          <a:prstGeom prst="rect">
-            <a:avLst/>
-          </a:prstGeom>
-          <a:noFill/>
-        </p:spPr>
-        <p:txBody>
-          <a:bodyPr wrap="square" anchor="t" lIns="0" rIns="0" tIns="0" bIns="0">
-            <a:spAutoFit/>
-          </a:bodyPr>
-          <a:lstStyle/>
-          <a:p>
-            <a:pPr algn="l">
-              <a:lnSpc>
-                <a:spcPct val="112000"/>
-              </a:lnSpc>
-            </a:pPr>
-            <a:r>
-              <a:rPr sz="1500" b="1">
-                <a:solidFill>
-                  <a:srgbClr val="00E676"/>
-                </a:solidFill>
-                <a:latin typeface="Inter"/>
-              </a:rPr>
-              <a:t>Result: </a:t>
-            </a:r>
             <a:r>
               <a:rPr sz="1500" b="0">
                 <a:solidFill>
@@ -3945,21 +5150,21 @@
                 </a:solidFill>
                 <a:latin typeface="Inter"/>
               </a:rPr>
-              <a:t>green time is wasted where nobody is waiting, and missing where queues are longest.</a:t>
-            </a:r>
-          </a:p>
-        </p:txBody>
-      </p:sp>
-      <p:sp>
-        <p:nvSpPr>
-          <p:cNvPr id="22" name="TextBox 21"/>
+              <a:t>The coordinator generalizes from a corridor to N x M grids - the step SCOOT/SCATS needed a regional master plan for.</a:t>
+            </a:r>
+          </a:p>
+        </p:txBody>
+      </p:sp>
+      <p:sp>
+        <p:nvSpPr>
+          <p:cNvPr id="12" name="TextBox 11"/>
           <p:cNvSpPr txBox="1"/>
           <p:nvPr/>
         </p:nvSpPr>
         <p:spPr>
           <a:xfrm>
-            <a:off x="502920" y="6528816"/>
-            <a:ext cx="5486400" cy="228600"/>
+            <a:off x="640080" y="6126480"/>
+            <a:ext cx="10881360" cy="548640"/>
           </a:xfrm>
           <a:prstGeom prst="rect">
             <a:avLst/>
@@ -3967,63 +5172,24 @@
           <a:noFill/>
         </p:spPr>
         <p:txBody>
-          <a:bodyPr wrap="square" anchor="t" lIns="0" rIns="0" tIns="0" bIns="0">
+          <a:bodyPr wrap="square">
             <a:spAutoFit/>
           </a:bodyPr>
           <a:lstStyle/>
           <a:p>
-            <a:pPr algn="l">
-              <a:lnSpc>
-                <a:spcPct val="112000"/>
-              </a:lnSpc>
+            <a:pPr algn="ctr">
+              <a:spcAft>
+                <a:spcPts val="600"/>
+              </a:spcAft>
             </a:pPr>
             <a:r>
-              <a:rPr sz="950" b="0">
+              <a:rPr sz="1500" b="0">
                 <a:solidFill>
                   <a:srgbClr val="93A1C0"/>
                 </a:solidFill>
                 <a:latin typeface="Inter"/>
               </a:rPr>
-              <a:t>SABZ · AI-ADAPTIVE TRAFFIC SIGNALS</a:t>
-            </a:r>
-          </a:p>
-        </p:txBody>
-      </p:sp>
-      <p:sp>
-        <p:nvSpPr>
-          <p:cNvPr id="23" name="TextBox 22"/>
-          <p:cNvSpPr txBox="1"/>
-          <p:nvPr/>
-        </p:nvSpPr>
-        <p:spPr>
-          <a:xfrm>
-            <a:off x="11292840" y="6528816"/>
-            <a:ext cx="411480" cy="228600"/>
-          </a:xfrm>
-          <a:prstGeom prst="rect">
-            <a:avLst/>
-          </a:prstGeom>
-          <a:noFill/>
-        </p:spPr>
-        <p:txBody>
-          <a:bodyPr wrap="square" anchor="t" lIns="0" rIns="0" tIns="0" bIns="0">
-            <a:spAutoFit/>
-          </a:bodyPr>
-          <a:lstStyle/>
-          <a:p>
-            <a:pPr algn="r">
-              <a:lnSpc>
-                <a:spcPct val="112000"/>
-              </a:lnSpc>
-            </a:pPr>
-            <a:r>
-              <a:rPr sz="950" b="0">
-                <a:solidFill>
-                  <a:srgbClr val="93A1C0"/>
-                </a:solidFill>
-                <a:latin typeface="Inter"/>
-              </a:rPr>
-              <a:t>1</a:t>
+              <a:t>368 automated tests, including 20,000 randomized controller steps and 50,000 guard proposals.</a:t>
             </a:r>
           </a:p>
         </p:txBody>
@@ -4036,7 +5202,703 @@
 </p:sld>
 </file>
 
-<file path=ppt/slides/slide2.xml><?xml version="1.0" encoding="utf-8"?>
+<file path=ppt/slides/slide11.xml><?xml version="1.0" encoding="utf-8"?>
+<p:sld xmlns:a="http://schemas.openxmlformats.org/drawingml/2006/main" xmlns:p="http://schemas.openxmlformats.org/presentationml/2006/main" xmlns:r="http://schemas.openxmlformats.org/officeDocument/2006/relationships">
+  <p:cSld>
+    <p:bg>
+      <p:bgPr>
+        <a:solidFill>
+          <a:srgbClr val="0B1220"/>
+        </a:solidFill>
+        <a:effectLst/>
+      </p:bgPr>
+    </p:bg>
+    <p:spTree>
+      <p:nvGrpSpPr>
+        <p:cNvPr id="1" name=""/>
+        <p:cNvGrpSpPr/>
+        <p:nvPr/>
+      </p:nvGrpSpPr>
+      <p:grpSpPr/>
+      <p:sp>
+        <p:nvSpPr>
+          <p:cNvPr id="2" name="TextBox 1"/>
+          <p:cNvSpPr txBox="1"/>
+          <p:nvPr/>
+        </p:nvSpPr>
+        <p:spPr>
+          <a:xfrm>
+            <a:off x="640080" y="2377440"/>
+            <a:ext cx="10881360" cy="1280160"/>
+          </a:xfrm>
+          <a:prstGeom prst="rect">
+            <a:avLst/>
+          </a:prstGeom>
+          <a:noFill/>
+        </p:spPr>
+        <p:txBody>
+          <a:bodyPr wrap="square">
+            <a:spAutoFit/>
+          </a:bodyPr>
+          <a:lstStyle/>
+          <a:p>
+            <a:pPr algn="ctr">
+              <a:spcAft>
+                <a:spcPts val="600"/>
+              </a:spcAft>
+            </a:pPr>
+            <a:r>
+              <a:rPr sz="4400" b="1">
+                <a:solidFill>
+                  <a:srgbClr val="EDF2F7"/>
+                </a:solidFill>
+                <a:latin typeface="Space Grotesk"/>
+              </a:rPr>
+              <a:t>Enough slides.</a:t>
+            </a:r>
+          </a:p>
+        </p:txBody>
+      </p:sp>
+      <p:sp>
+        <p:nvSpPr>
+          <p:cNvPr id="3" name="TextBox 2"/>
+          <p:cNvSpPr txBox="1"/>
+          <p:nvPr/>
+        </p:nvSpPr>
+        <p:spPr>
+          <a:xfrm>
+            <a:off x="640080" y="3566160"/>
+            <a:ext cx="10881360" cy="1097280"/>
+          </a:xfrm>
+          <a:prstGeom prst="rect">
+            <a:avLst/>
+          </a:prstGeom>
+          <a:noFill/>
+        </p:spPr>
+        <p:txBody>
+          <a:bodyPr wrap="square">
+            <a:spAutoFit/>
+          </a:bodyPr>
+          <a:lstStyle/>
+          <a:p>
+            <a:pPr algn="ctr">
+              <a:spcAft>
+                <a:spcPts val="600"/>
+              </a:spcAft>
+            </a:pPr>
+            <a:r>
+              <a:rPr sz="4400" b="1">
+                <a:solidFill>
+                  <a:srgbClr val="00E676"/>
+                </a:solidFill>
+                <a:latin typeface="Space Grotesk"/>
+              </a:rPr>
+              <a:t>Watch it think.</a:t>
+            </a:r>
+          </a:p>
+        </p:txBody>
+      </p:sp>
+      <p:sp>
+        <p:nvSpPr>
+          <p:cNvPr id="4" name="TextBox 3"/>
+          <p:cNvSpPr txBox="1"/>
+          <p:nvPr/>
+        </p:nvSpPr>
+        <p:spPr>
+          <a:xfrm>
+            <a:off x="640080" y="4846320"/>
+            <a:ext cx="10881360" cy="731520"/>
+          </a:xfrm>
+          <a:prstGeom prst="rect">
+            <a:avLst/>
+          </a:prstGeom>
+          <a:noFill/>
+        </p:spPr>
+        <p:txBody>
+          <a:bodyPr wrap="square">
+            <a:spAutoFit/>
+          </a:bodyPr>
+          <a:lstStyle/>
+          <a:p>
+            <a:pPr algn="ctr">
+              <a:spcAft>
+                <a:spcPts val="600"/>
+              </a:spcAft>
+            </a:pPr>
+            <a:r>
+              <a:rPr sz="2000" b="0">
+                <a:solidFill>
+                  <a:srgbClr val="93A1C0"/>
+                </a:solidFill>
+                <a:latin typeface="Inter"/>
+              </a:rPr>
+              <a:t>[ SWITCH TO LIVE DEMO ]</a:t>
+            </a:r>
+          </a:p>
+        </p:txBody>
+      </p:sp>
+    </p:spTree>
+  </p:cSld>
+  <p:clrMapOvr>
+    <a:masterClrMapping/>
+  </p:clrMapOvr>
+</p:sld>
+</file>
+
+<file path=ppt/slides/slide12.xml><?xml version="1.0" encoding="utf-8"?>
+<p:sld xmlns:a="http://schemas.openxmlformats.org/drawingml/2006/main" xmlns:p="http://schemas.openxmlformats.org/presentationml/2006/main" xmlns:r="http://schemas.openxmlformats.org/officeDocument/2006/relationships">
+  <p:cSld>
+    <p:bg>
+      <p:bgPr>
+        <a:solidFill>
+          <a:srgbClr val="0B1220"/>
+        </a:solidFill>
+        <a:effectLst/>
+      </p:bgPr>
+    </p:bg>
+    <p:spTree>
+      <p:nvGrpSpPr>
+        <p:cNvPr id="1" name=""/>
+        <p:cNvGrpSpPr/>
+        <p:nvPr/>
+      </p:nvGrpSpPr>
+      <p:grpSpPr/>
+      <p:sp>
+        <p:nvSpPr>
+          <p:cNvPr id="2" name="TextBox 1"/>
+          <p:cNvSpPr txBox="1"/>
+          <p:nvPr/>
+        </p:nvSpPr>
+        <p:spPr>
+          <a:xfrm>
+            <a:off x="640080" y="320040"/>
+            <a:ext cx="10881360" cy="457200"/>
+          </a:xfrm>
+          <a:prstGeom prst="rect">
+            <a:avLst/>
+          </a:prstGeom>
+          <a:noFill/>
+        </p:spPr>
+        <p:txBody>
+          <a:bodyPr wrap="square">
+            <a:spAutoFit/>
+          </a:bodyPr>
+          <a:lstStyle/>
+          <a:p>
+            <a:pPr algn="l">
+              <a:spcAft>
+                <a:spcPts val="600"/>
+              </a:spcAft>
+            </a:pPr>
+            <a:r>
+              <a:rPr sz="1300" b="1">
+                <a:solidFill>
+                  <a:srgbClr val="00E676"/>
+                </a:solidFill>
+                <a:latin typeface="Space Grotesk"/>
+              </a:rPr>
+              <a:t>10  DEPLOYMENT VISION</a:t>
+            </a:r>
+          </a:p>
+        </p:txBody>
+      </p:sp>
+      <p:sp>
+        <p:nvSpPr>
+          <p:cNvPr id="3" name="TextBox 2"/>
+          <p:cNvSpPr txBox="1"/>
+          <p:nvPr/>
+        </p:nvSpPr>
+        <p:spPr>
+          <a:xfrm>
+            <a:off x="640080" y="685800"/>
+            <a:ext cx="10881360" cy="1463040"/>
+          </a:xfrm>
+          <a:prstGeom prst="rect">
+            <a:avLst/>
+          </a:prstGeom>
+          <a:noFill/>
+        </p:spPr>
+        <p:txBody>
+          <a:bodyPr wrap="square">
+            <a:spAutoFit/>
+          </a:bodyPr>
+          <a:lstStyle/>
+          <a:p>
+            <a:pPr algn="l">
+              <a:spcAft>
+                <a:spcPts val="600"/>
+              </a:spcAft>
+            </a:pPr>
+            <a:r>
+              <a:rPr sz="4000" b="1">
+                <a:solidFill>
+                  <a:srgbClr val="EDF2F7"/>
+                </a:solidFill>
+                <a:latin typeface="Space Grotesk"/>
+              </a:rPr>
+              <a:t>One intersection in Lahore. Then every corridor.</a:t>
+            </a:r>
+          </a:p>
+        </p:txBody>
+      </p:sp>
+      <p:sp>
+        <p:nvSpPr>
+          <p:cNvPr id="4" name="Rounded Rectangle 3"/>
+          <p:cNvSpPr/>
+          <p:nvPr/>
+        </p:nvSpPr>
+        <p:spPr>
+          <a:xfrm>
+            <a:off x="640080" y="2651760"/>
+            <a:ext cx="3200400" cy="1828800"/>
+          </a:xfrm>
+          <a:prstGeom prst="roundRect">
+            <a:avLst/>
+          </a:prstGeom>
+          <a:solidFill>
+            <a:srgbClr val="141D33"/>
+          </a:solidFill>
+          <a:ln w="12700">
+            <a:solidFill>
+              <a:srgbClr val="24304D"/>
+            </a:solidFill>
+          </a:ln>
+        </p:spPr>
+        <p:style>
+          <a:lnRef idx="1">
+            <a:schemeClr val="accent1"/>
+          </a:lnRef>
+          <a:fillRef idx="3">
+            <a:schemeClr val="accent1"/>
+          </a:fillRef>
+          <a:effectRef idx="2">
+            <a:schemeClr val="accent1"/>
+          </a:effectRef>
+          <a:fontRef idx="minor">
+            <a:schemeClr val="lt1"/>
+          </a:fontRef>
+        </p:style>
+        <p:txBody>
+          <a:bodyPr rtlCol="0" anchor="ctr" wrap="square"/>
+          <a:lstStyle/>
+          <a:p>
+            <a:pPr algn="ctr"/>
+            <a:r>
+              <a:rPr sz="1500">
+                <a:solidFill>
+                  <a:srgbClr val="EDF2F7"/>
+                </a:solidFill>
+                <a:latin typeface="Inter"/>
+              </a:rPr>
+              <a:t>PHASE 1: SHADOW
+Brain decides, existing controller executes. Decisions logged.</a:t>
+            </a:r>
+          </a:p>
+        </p:txBody>
+      </p:sp>
+      <p:cxnSp>
+        <p:nvCxnSpPr>
+          <p:cNvPr id="5" name="Connector 4"/>
+          <p:cNvCxnSpPr/>
+          <p:nvPr/>
+        </p:nvCxnSpPr>
+        <p:spPr>
+          <a:xfrm>
+            <a:off x="3840480" y="3566160"/>
+            <a:ext cx="548640" cy="0"/>
+          </a:xfrm>
+          <a:prstGeom prst="line">
+            <a:avLst/>
+          </a:prstGeom>
+          <a:ln w="31750">
+            <a:solidFill>
+              <a:srgbClr val="00E676"/>
+            </a:solidFill>
+          </a:ln>
+        </p:spPr>
+        <p:style>
+          <a:lnRef idx="2">
+            <a:schemeClr val="accent1"/>
+          </a:lnRef>
+          <a:fillRef idx="0">
+            <a:schemeClr val="accent1"/>
+          </a:fillRef>
+          <a:effectRef idx="1">
+            <a:schemeClr val="accent1"/>
+          </a:effectRef>
+          <a:fontRef idx="minor">
+            <a:schemeClr val="tx1"/>
+          </a:fontRef>
+        </p:style>
+      </p:cxnSp>
+      <p:sp>
+        <p:nvSpPr>
+          <p:cNvPr id="6" name="Rounded Rectangle 5"/>
+          <p:cNvSpPr/>
+          <p:nvPr/>
+        </p:nvSpPr>
+        <p:spPr>
+          <a:xfrm>
+            <a:off x="4389120" y="2651760"/>
+            <a:ext cx="3200400" cy="1828800"/>
+          </a:xfrm>
+          <a:prstGeom prst="roundRect">
+            <a:avLst/>
+          </a:prstGeom>
+          <a:solidFill>
+            <a:srgbClr val="141D33"/>
+          </a:solidFill>
+          <a:ln w="12700">
+            <a:solidFill>
+              <a:srgbClr val="24304D"/>
+            </a:solidFill>
+          </a:ln>
+        </p:spPr>
+        <p:style>
+          <a:lnRef idx="1">
+            <a:schemeClr val="accent1"/>
+          </a:lnRef>
+          <a:fillRef idx="3">
+            <a:schemeClr val="accent1"/>
+          </a:fillRef>
+          <a:effectRef idx="2">
+            <a:schemeClr val="accent1"/>
+          </a:effectRef>
+          <a:fontRef idx="minor">
+            <a:schemeClr val="lt1"/>
+          </a:fontRef>
+        </p:style>
+        <p:txBody>
+          <a:bodyPr rtlCol="0" anchor="ctr" wrap="square"/>
+          <a:lstStyle/>
+          <a:p>
+            <a:pPr algn="ctr"/>
+            <a:r>
+              <a:rPr sz="1500">
+                <a:solidFill>
+                  <a:srgbClr val="EDF2F7"/>
+                </a:solidFill>
+                <a:latin typeface="Inter"/>
+              </a:rPr>
+              <a:t>PHASE 2: SUPERVISED
+Live control with instant fallback to actuated/fixed.</a:t>
+            </a:r>
+          </a:p>
+        </p:txBody>
+      </p:sp>
+      <p:cxnSp>
+        <p:nvCxnSpPr>
+          <p:cNvPr id="7" name="Connector 6"/>
+          <p:cNvCxnSpPr/>
+          <p:nvPr/>
+        </p:nvCxnSpPr>
+        <p:spPr>
+          <a:xfrm>
+            <a:off x="7589520" y="3566160"/>
+            <a:ext cx="548640" cy="0"/>
+          </a:xfrm>
+          <a:prstGeom prst="line">
+            <a:avLst/>
+          </a:prstGeom>
+          <a:ln w="31750">
+            <a:solidFill>
+              <a:srgbClr val="00E676"/>
+            </a:solidFill>
+          </a:ln>
+        </p:spPr>
+        <p:style>
+          <a:lnRef idx="2">
+            <a:schemeClr val="accent1"/>
+          </a:lnRef>
+          <a:fillRef idx="0">
+            <a:schemeClr val="accent1"/>
+          </a:fillRef>
+          <a:effectRef idx="1">
+            <a:schemeClr val="accent1"/>
+          </a:effectRef>
+          <a:fontRef idx="minor">
+            <a:schemeClr val="tx1"/>
+          </a:fontRef>
+        </p:style>
+      </p:cxnSp>
+      <p:sp>
+        <p:nvSpPr>
+          <p:cNvPr id="8" name="Rounded Rectangle 7"/>
+          <p:cNvSpPr/>
+          <p:nvPr/>
+        </p:nvSpPr>
+        <p:spPr>
+          <a:xfrm>
+            <a:off x="8138160" y="2651760"/>
+            <a:ext cx="3383280" cy="1828800"/>
+          </a:xfrm>
+          <a:prstGeom prst="roundRect">
+            <a:avLst/>
+          </a:prstGeom>
+          <a:solidFill>
+            <a:srgbClr val="141D33"/>
+          </a:solidFill>
+          <a:ln w="12700">
+            <a:solidFill>
+              <a:srgbClr val="24304D"/>
+            </a:solidFill>
+          </a:ln>
+        </p:spPr>
+        <p:style>
+          <a:lnRef idx="1">
+            <a:schemeClr val="accent1"/>
+          </a:lnRef>
+          <a:fillRef idx="3">
+            <a:schemeClr val="accent1"/>
+          </a:fillRef>
+          <a:effectRef idx="2">
+            <a:schemeClr val="accent1"/>
+          </a:effectRef>
+          <a:fontRef idx="minor">
+            <a:schemeClr val="lt1"/>
+          </a:fontRef>
+        </p:style>
+        <p:txBody>
+          <a:bodyPr rtlCol="0" anchor="ctr" wrap="square"/>
+          <a:lstStyle/>
+          <a:p>
+            <a:pPr algn="ctr"/>
+            <a:r>
+              <a:rPr sz="1500">
+                <a:solidFill>
+                  <a:srgbClr val="EDF2F7"/>
+                </a:solidFill>
+                <a:latin typeface="Inter"/>
+              </a:rPr>
+              <a:t>PHASE 3: AUTONOMOUS
+Full control, monitored, city can override anytime.</a:t>
+            </a:r>
+          </a:p>
+        </p:txBody>
+      </p:sp>
+      <p:sp>
+        <p:nvSpPr>
+          <p:cNvPr id="9" name="TextBox 8"/>
+          <p:cNvSpPr txBox="1"/>
+          <p:nvPr/>
+        </p:nvSpPr>
+        <p:spPr>
+          <a:xfrm>
+            <a:off x="640080" y="4937760"/>
+            <a:ext cx="10881360" cy="1097280"/>
+          </a:xfrm>
+          <a:prstGeom prst="rect">
+            <a:avLst/>
+          </a:prstGeom>
+          <a:noFill/>
+        </p:spPr>
+        <p:txBody>
+          <a:bodyPr wrap="square">
+            <a:spAutoFit/>
+          </a:bodyPr>
+          <a:lstStyle/>
+          <a:p>
+            <a:pPr algn="ctr">
+              <a:spcAft>
+                <a:spcPts val="600"/>
+              </a:spcAft>
+            </a:pPr>
+            <a:r>
+              <a:rPr sz="1800" b="0">
+                <a:solidFill>
+                  <a:srgbClr val="93A1C0"/>
+                </a:solidFill>
+                <a:latin typeface="Inter"/>
+              </a:rPr>
+              <a:t>Cameras on existing poles. One small computer in the signal cabinet. No road digging, no GPU, no cloud dependency.</a:t>
+            </a:r>
+          </a:p>
+        </p:txBody>
+      </p:sp>
+    </p:spTree>
+  </p:cSld>
+  <p:clrMapOvr>
+    <a:masterClrMapping/>
+  </p:clrMapOvr>
+</p:sld>
+</file>
+
+<file path=ppt/slides/slide13.xml><?xml version="1.0" encoding="utf-8"?>
+<p:sld xmlns:a="http://schemas.openxmlformats.org/drawingml/2006/main" xmlns:p="http://schemas.openxmlformats.org/presentationml/2006/main" xmlns:r="http://schemas.openxmlformats.org/officeDocument/2006/relationships">
+  <p:cSld>
+    <p:bg>
+      <p:bgPr>
+        <a:solidFill>
+          <a:srgbClr val="0B1220"/>
+        </a:solidFill>
+        <a:effectLst/>
+      </p:bgPr>
+    </p:bg>
+    <p:spTree>
+      <p:nvGrpSpPr>
+        <p:cNvPr id="1" name=""/>
+        <p:cNvGrpSpPr/>
+        <p:nvPr/>
+      </p:nvGrpSpPr>
+      <p:grpSpPr/>
+      <p:sp>
+        <p:nvSpPr>
+          <p:cNvPr id="2" name="TextBox 1"/>
+          <p:cNvSpPr txBox="1"/>
+          <p:nvPr/>
+        </p:nvSpPr>
+        <p:spPr>
+          <a:xfrm>
+            <a:off x="640080" y="320040"/>
+            <a:ext cx="10881360" cy="457200"/>
+          </a:xfrm>
+          <a:prstGeom prst="rect">
+            <a:avLst/>
+          </a:prstGeom>
+          <a:noFill/>
+        </p:spPr>
+        <p:txBody>
+          <a:bodyPr wrap="square">
+            <a:spAutoFit/>
+          </a:bodyPr>
+          <a:lstStyle/>
+          <a:p>
+            <a:pPr algn="l">
+              <a:spcAft>
+                <a:spcPts val="600"/>
+              </a:spcAft>
+            </a:pPr>
+            <a:r>
+              <a:rPr sz="1300" b="1">
+                <a:solidFill>
+                  <a:srgbClr val="00E676"/>
+                </a:solidFill>
+                <a:latin typeface="Space Grotesk"/>
+              </a:rPr>
+              <a:t>11  BUSINESS MODEL</a:t>
+            </a:r>
+          </a:p>
+        </p:txBody>
+      </p:sp>
+      <p:sp>
+        <p:nvSpPr>
+          <p:cNvPr id="3" name="TextBox 2"/>
+          <p:cNvSpPr txBox="1"/>
+          <p:nvPr/>
+        </p:nvSpPr>
+        <p:spPr>
+          <a:xfrm>
+            <a:off x="640080" y="685800"/>
+            <a:ext cx="10881360" cy="1463040"/>
+          </a:xfrm>
+          <a:prstGeom prst="rect">
+            <a:avLst/>
+          </a:prstGeom>
+          <a:noFill/>
+        </p:spPr>
+        <p:txBody>
+          <a:bodyPr wrap="square">
+            <a:spAutoFit/>
+          </a:bodyPr>
+          <a:lstStyle/>
+          <a:p>
+            <a:pPr algn="l">
+              <a:spcAft>
+                <a:spcPts val="600"/>
+              </a:spcAft>
+            </a:pPr>
+            <a:r>
+              <a:rPr sz="4000" b="1">
+                <a:solidFill>
+                  <a:srgbClr val="EDF2F7"/>
+                </a:solidFill>
+                <a:latin typeface="Space Grotesk"/>
+              </a:rPr>
+              <a:t>Land one pilot. Prove it. Scale corridor by corridor.</a:t>
+            </a:r>
+          </a:p>
+        </p:txBody>
+      </p:sp>
+      <p:sp>
+        <p:nvSpPr>
+          <p:cNvPr id="4" name="TextBox 3"/>
+          <p:cNvSpPr txBox="1"/>
+          <p:nvPr/>
+        </p:nvSpPr>
+        <p:spPr>
+          <a:xfrm>
+            <a:off x="640080" y="2377440"/>
+            <a:ext cx="10881360" cy="3657600"/>
+          </a:xfrm>
+          <a:prstGeom prst="rect">
+            <a:avLst/>
+          </a:prstGeom>
+          <a:noFill/>
+        </p:spPr>
+        <p:txBody>
+          <a:bodyPr wrap="square">
+            <a:spAutoFit/>
+          </a:bodyPr>
+          <a:lstStyle/>
+          <a:p>
+            <a:pPr algn="l">
+              <a:spcAft>
+                <a:spcPts val="600"/>
+              </a:spcAft>
+            </a:pPr>
+            <a:r>
+              <a:rPr sz="2000" b="0">
+                <a:solidFill>
+                  <a:srgbClr val="EDF2F7"/>
+                </a:solidFill>
+                <a:latin typeface="Inter"/>
+              </a:rPr>
+              <a:t>Customer: the city traffic authority, the same body that already buys signals. Private campuses and housing societies are a faster first door.</a:t>
+            </a:r>
+          </a:p>
+          <a:p>
+            <a:pPr algn="l">
+              <a:spcAft>
+                <a:spcPts val="600"/>
+              </a:spcAft>
+            </a:pPr>
+            <a:r>
+              <a:rPr sz="2000" b="0">
+                <a:solidFill>
+                  <a:srgbClr val="EDF2F7"/>
+                </a:solidFill>
+                <a:latin typeface="Inter"/>
+              </a:rPr>
+              <a:t>Model: per-intersection hardware plus software license, or a managed-service fee per corridor per year. Long term: performance contracts where the city pays against measured congestion reduction.</a:t>
+            </a:r>
+          </a:p>
+          <a:p>
+            <a:pPr algn="l">
+              <a:spcAft>
+                <a:spcPts val="600"/>
+              </a:spcAft>
+            </a:pPr>
+            <a:r>
+              <a:rPr sz="2000" b="0">
+                <a:solidFill>
+                  <a:srgbClr val="00E676"/>
+                </a:solidFill>
+                <a:latin typeface="Inter"/>
+              </a:rPr>
+              <a:t>Moat: the trained policy library per intersection type, the calibration process, and the first real deployment data from Pakistani intersections.</a:t>
+            </a:r>
+          </a:p>
+        </p:txBody>
+      </p:sp>
+    </p:spTree>
+  </p:cSld>
+  <p:clrMapOvr>
+    <a:masterClrMapping/>
+  </p:clrMapOvr>
+</p:sld>
+</file>
+
+<file path=ppt/slides/slide14.xml><?xml version="1.0" encoding="utf-8"?>
 <p:sld xmlns:a="http://schemas.openxmlformats.org/drawingml/2006/main" xmlns:p="http://schemas.openxmlformats.org/presentationml/2006/main" xmlns:r="http://schemas.openxmlformats.org/officeDocument/2006/relationships">
   <p:cSld>
     <p:bg>
@@ -4070,8 +5932,8 @@
         </p:blipFill>
         <p:spPr>
           <a:xfrm>
-            <a:off x="502920" y="310896"/>
-            <a:ext cx="1874519" cy="666496"/>
+            <a:off x="5413248" y="914400"/>
+            <a:ext cx="1371600" cy="487680"/>
           </a:xfrm>
           <a:prstGeom prst="rect">
             <a:avLst/>
@@ -4086,8 +5948,8 @@
         </p:nvSpPr>
         <p:spPr>
           <a:xfrm>
-            <a:off x="502920" y="1207008"/>
-            <a:ext cx="11155680" cy="320040"/>
+            <a:off x="640080" y="2468880"/>
+            <a:ext cx="10881360" cy="1097280"/>
           </a:xfrm>
           <a:prstGeom prst="rect">
             <a:avLst/>
@@ -4095,15 +5957,151 @@
           <a:noFill/>
         </p:spPr>
         <p:txBody>
-          <a:bodyPr wrap="square" anchor="t" lIns="0" rIns="0" tIns="0" bIns="0">
+          <a:bodyPr wrap="square">
             <a:spAutoFit/>
           </a:bodyPr>
           <a:lstStyle/>
           <a:p>
+            <a:pPr algn="ctr">
+              <a:spcAft>
+                <a:spcPts val="600"/>
+              </a:spcAft>
+            </a:pPr>
+            <a:r>
+              <a:rPr sz="5400" b="1">
+                <a:solidFill>
+                  <a:srgbClr val="EDF2F7"/>
+                </a:solidFill>
+                <a:latin typeface="Space Grotesk"/>
+              </a:rPr>
+              <a:t>Thank you.</a:t>
+            </a:r>
+          </a:p>
+        </p:txBody>
+      </p:sp>
+      <p:sp>
+        <p:nvSpPr>
+          <p:cNvPr id="4" name="TextBox 3"/>
+          <p:cNvSpPr txBox="1"/>
+          <p:nvPr/>
+        </p:nvSpPr>
+        <p:spPr>
+          <a:xfrm>
+            <a:off x="640080" y="3566160"/>
+            <a:ext cx="10881360" cy="1280160"/>
+          </a:xfrm>
+          <a:prstGeom prst="rect">
+            <a:avLst/>
+          </a:prstGeom>
+          <a:noFill/>
+        </p:spPr>
+        <p:txBody>
+          <a:bodyPr wrap="square">
+            <a:spAutoFit/>
+          </a:bodyPr>
+          <a:lstStyle/>
+          <a:p>
+            <a:pPr algn="ctr">
+              <a:spcAft>
+                <a:spcPts val="600"/>
+              </a:spcAft>
+            </a:pPr>
+            <a:r>
+              <a:rPr sz="2000" b="0">
+                <a:solidFill>
+                  <a:srgbClr val="00E676"/>
+                </a:solidFill>
+                <a:latin typeface="Inter"/>
+              </a:rPr>
+              <a:t>Abdur Rehman  |  M. Bilal  |  Awais  |  Dawood</a:t>
+            </a:r>
+          </a:p>
+          <a:p>
+            <a:pPr algn="ctr">
+              <a:spcAft>
+                <a:spcPts val="600"/>
+              </a:spcAft>
+            </a:pPr>
+            <a:r>
+              <a:rPr sz="1600" b="0">
+                <a:solidFill>
+                  <a:srgbClr val="93A1C0"/>
+                </a:solidFill>
+                <a:latin typeface="Inter"/>
+              </a:rPr>
+              <a:t>Lahore Garrison University</a:t>
+            </a:r>
+          </a:p>
+          <a:p>
+            <a:pPr algn="ctr">
+              <a:spcAft>
+                <a:spcPts val="600"/>
+              </a:spcAft>
+            </a:pPr>
+            <a:r>
+              <a:rPr sz="1800" b="0">
+                <a:solidFill>
+                  <a:srgbClr val="EDF2F7"/>
+                </a:solidFill>
+                <a:latin typeface="Space Grotesk"/>
+              </a:rPr>
+              <a:t>The people who sit in the traffic should be the people who build the fix.</a:t>
+            </a:r>
+          </a:p>
+        </p:txBody>
+      </p:sp>
+    </p:spTree>
+  </p:cSld>
+  <p:clrMapOvr>
+    <a:masterClrMapping/>
+  </p:clrMapOvr>
+</p:sld>
+</file>
+
+<file path=ppt/slides/slide2.xml><?xml version="1.0" encoding="utf-8"?>
+<p:sld xmlns:a="http://schemas.openxmlformats.org/drawingml/2006/main" xmlns:p="http://schemas.openxmlformats.org/presentationml/2006/main" xmlns:r="http://schemas.openxmlformats.org/officeDocument/2006/relationships">
+  <p:cSld>
+    <p:bg>
+      <p:bgPr>
+        <a:solidFill>
+          <a:srgbClr val="0B1220"/>
+        </a:solidFill>
+        <a:effectLst/>
+      </p:bgPr>
+    </p:bg>
+    <p:spTree>
+      <p:nvGrpSpPr>
+        <p:cNvPr id="1" name=""/>
+        <p:cNvGrpSpPr/>
+        <p:nvPr/>
+      </p:nvGrpSpPr>
+      <p:grpSpPr/>
+      <p:sp>
+        <p:nvSpPr>
+          <p:cNvPr id="2" name="TextBox 1"/>
+          <p:cNvSpPr txBox="1"/>
+          <p:nvPr/>
+        </p:nvSpPr>
+        <p:spPr>
+          <a:xfrm>
+            <a:off x="640080" y="320040"/>
+            <a:ext cx="10881360" cy="457200"/>
+          </a:xfrm>
+          <a:prstGeom prst="rect">
+            <a:avLst/>
+          </a:prstGeom>
+          <a:noFill/>
+        </p:spPr>
+        <p:txBody>
+          <a:bodyPr wrap="square">
+            <a:spAutoFit/>
+          </a:bodyPr>
+          <a:lstStyle/>
+          <a:p>
             <a:pPr algn="l">
-              <a:lnSpc>
-                <a:spcPct val="112000"/>
-              </a:lnSpc>
+              <a:spcAft>
+                <a:spcPts val="600"/>
+              </a:spcAft>
             </a:pPr>
             <a:r>
               <a:rPr sz="1300" b="1">
@@ -4112,21 +6110,21 @@
                 </a:solidFill>
                 <a:latin typeface="Space Grotesk"/>
               </a:rPr>
-              <a:t>THE SOLUTION</a:t>
-            </a:r>
-          </a:p>
-        </p:txBody>
-      </p:sp>
-      <p:sp>
-        <p:nvSpPr>
-          <p:cNvPr id="4" name="TextBox 3"/>
+              <a:t>01  THE PROBLEM</a:t>
+            </a:r>
+          </a:p>
+        </p:txBody>
+      </p:sp>
+      <p:sp>
+        <p:nvSpPr>
+          <p:cNvPr id="3" name="TextBox 2"/>
           <p:cNvSpPr txBox="1"/>
           <p:nvPr/>
         </p:nvSpPr>
         <p:spPr>
           <a:xfrm>
-            <a:off x="502920" y="1536192"/>
-            <a:ext cx="11201400" cy="868680"/>
+            <a:off x="640080" y="685800"/>
+            <a:ext cx="10881360" cy="1463040"/>
           </a:xfrm>
           <a:prstGeom prst="rect">
             <a:avLst/>
@@ -4134,86 +6132,39 @@
           <a:noFill/>
         </p:spPr>
         <p:txBody>
-          <a:bodyPr wrap="square" anchor="t" lIns="0" rIns="0" tIns="0" bIns="0">
+          <a:bodyPr wrap="square">
             <a:spAutoFit/>
           </a:bodyPr>
           <a:lstStyle/>
           <a:p>
             <a:pPr algn="l">
-              <a:lnSpc>
-                <a:spcPct val="112000"/>
-              </a:lnSpc>
+              <a:spcAft>
+                <a:spcPts val="600"/>
+              </a:spcAft>
             </a:pPr>
             <a:r>
-              <a:rPr sz="3500" b="1">
+              <a:rPr sz="4000" b="1">
                 <a:solidFill>
                   <a:srgbClr val="EDF2F7"/>
                 </a:solidFill>
                 <a:latin typeface="Space Grotesk"/>
               </a:rPr>
-              <a:t>SABZ: signals that see, think, and adapt</a:t>
-            </a:r>
-          </a:p>
-        </p:txBody>
-      </p:sp>
-      <p:sp>
-        <p:nvSpPr>
-          <p:cNvPr id="5" name="Rounded Rectangle 4"/>
-          <p:cNvSpPr/>
-          <p:nvPr/>
-        </p:nvSpPr>
-        <p:spPr>
-          <a:xfrm>
-            <a:off x="502920" y="2395728"/>
-            <a:ext cx="3630168" cy="1828800"/>
-          </a:xfrm>
-          <a:prstGeom prst="roundRect">
-            <a:avLst>
-              <a:gd name="adj" fmla="val 5500"/>
-            </a:avLst>
-          </a:prstGeom>
-          <a:solidFill>
-            <a:srgbClr val="141D33"/>
-          </a:solidFill>
-          <a:ln w="12700">
-            <a:solidFill>
-              <a:srgbClr val="24304D"/>
-            </a:solidFill>
-          </a:ln>
-          <a:effectLst/>
-        </p:spPr>
-        <p:style>
-          <a:lnRef idx="1">
-            <a:schemeClr val="accent1"/>
-          </a:lnRef>
-          <a:fillRef idx="3">
-            <a:schemeClr val="accent1"/>
-          </a:fillRef>
-          <a:effectRef idx="2">
-            <a:schemeClr val="accent1"/>
-          </a:effectRef>
-          <a:fontRef idx="minor">
-            <a:schemeClr val="lt1"/>
-          </a:fontRef>
-        </p:style>
-        <p:txBody>
-          <a:bodyPr rtlCol="0" anchor="ctr"/>
-          <a:lstStyle/>
-          <a:p>
-            <a:pPr algn="ctr"/>
-          </a:p>
-        </p:txBody>
-      </p:sp>
-      <p:sp>
-        <p:nvSpPr>
-          <p:cNvPr id="6" name="TextBox 5"/>
+              <a:t>Lahore added 3.7 million vehicles
+in a decade. Its signals never noticed.</a:t>
+            </a:r>
+          </a:p>
+        </p:txBody>
+      </p:sp>
+      <p:sp>
+        <p:nvSpPr>
+          <p:cNvPr id="4" name="TextBox 3"/>
           <p:cNvSpPr txBox="1"/>
           <p:nvPr/>
         </p:nvSpPr>
         <p:spPr>
           <a:xfrm>
-            <a:off x="740664" y="2596896"/>
-            <a:ext cx="3154680" cy="411480"/>
+            <a:off x="640080" y="2377440"/>
+            <a:ext cx="10881360" cy="4114800"/>
           </a:xfrm>
           <a:prstGeom prst="rect">
             <a:avLst/>
@@ -4221,1023 +6172,40 @@
           <a:noFill/>
         </p:spPr>
         <p:txBody>
-          <a:bodyPr wrap="square" anchor="t" lIns="0" rIns="0" tIns="0" bIns="0">
+          <a:bodyPr wrap="square">
             <a:spAutoFit/>
           </a:bodyPr>
           <a:lstStyle/>
           <a:p>
             <a:pPr algn="l">
-              <a:lnSpc>
-                <a:spcPct val="112000"/>
-              </a:lnSpc>
+              <a:spcAft>
+                <a:spcPts val="600"/>
+              </a:spcAft>
             </a:pPr>
             <a:r>
-              <a:rPr sz="1900" b="1">
-                <a:solidFill>
-                  <a:srgbClr val="00E676"/>
-                </a:solidFill>
-                <a:latin typeface="Space Grotesk"/>
-              </a:rPr>
-              <a:t>SEE</a:t>
-            </a:r>
-          </a:p>
-        </p:txBody>
-      </p:sp>
-      <p:sp>
-        <p:nvSpPr>
-          <p:cNvPr id="7" name="TextBox 6"/>
-          <p:cNvSpPr txBox="1"/>
-          <p:nvPr/>
-        </p:nvSpPr>
-        <p:spPr>
-          <a:xfrm>
-            <a:off x="740664" y="3035808"/>
-            <a:ext cx="3182112" cy="1097280"/>
-          </a:xfrm>
-          <a:prstGeom prst="rect">
-            <a:avLst/>
-          </a:prstGeom>
-          <a:noFill/>
-        </p:spPr>
-        <p:txBody>
-          <a:bodyPr wrap="square" anchor="t" lIns="0" rIns="0" tIns="0" bIns="0">
-            <a:spAutoFit/>
-          </a:bodyPr>
-          <a:lstStyle/>
-          <a:p>
-            <a:pPr algn="l">
-              <a:lnSpc>
-                <a:spcPct val="130000"/>
-              </a:lnSpc>
-            </a:pPr>
-            <a:r>
-              <a:rPr sz="1350" b="0">
-                <a:solidFill>
-                  <a:srgbClr val="C7D2E8"/>
-                </a:solidFill>
-                <a:latin typeface="Inter"/>
-              </a:rPr>
-              <a:t>Cameras count vehicles on every approach, in real time. No new roadworks: SABZ reads the cameras an intersection already has.</a:t>
-            </a:r>
-          </a:p>
-        </p:txBody>
-      </p:sp>
-      <p:sp>
-        <p:nvSpPr>
-          <p:cNvPr id="8" name="Rounded Rectangle 7"/>
-          <p:cNvSpPr/>
-          <p:nvPr/>
-        </p:nvSpPr>
-        <p:spPr>
-          <a:xfrm>
-            <a:off x="4288536" y="2395728"/>
-            <a:ext cx="3630168" cy="1828800"/>
-          </a:xfrm>
-          <a:prstGeom prst="roundRect">
-            <a:avLst>
-              <a:gd name="adj" fmla="val 5500"/>
-            </a:avLst>
-          </a:prstGeom>
-          <a:solidFill>
-            <a:srgbClr val="141D33"/>
-          </a:solidFill>
-          <a:ln w="12700">
-            <a:solidFill>
-              <a:srgbClr val="24304D"/>
-            </a:solidFill>
-          </a:ln>
-          <a:effectLst/>
-        </p:spPr>
-        <p:style>
-          <a:lnRef idx="1">
-            <a:schemeClr val="accent1"/>
-          </a:lnRef>
-          <a:fillRef idx="3">
-            <a:schemeClr val="accent1"/>
-          </a:fillRef>
-          <a:effectRef idx="2">
-            <a:schemeClr val="accent1"/>
-          </a:effectRef>
-          <a:fontRef idx="minor">
-            <a:schemeClr val="lt1"/>
-          </a:fontRef>
-        </p:style>
-        <p:txBody>
-          <a:bodyPr rtlCol="0" anchor="ctr"/>
-          <a:lstStyle/>
-          <a:p>
-            <a:pPr algn="ctr"/>
-          </a:p>
-        </p:txBody>
-      </p:sp>
-      <p:sp>
-        <p:nvSpPr>
-          <p:cNvPr id="9" name="TextBox 8"/>
-          <p:cNvSpPr txBox="1"/>
-          <p:nvPr/>
-        </p:nvSpPr>
-        <p:spPr>
-          <a:xfrm>
-            <a:off x="4526279" y="2596896"/>
-            <a:ext cx="3154680" cy="411480"/>
-          </a:xfrm>
-          <a:prstGeom prst="rect">
-            <a:avLst/>
-          </a:prstGeom>
-          <a:noFill/>
-        </p:spPr>
-        <p:txBody>
-          <a:bodyPr wrap="square" anchor="t" lIns="0" rIns="0" tIns="0" bIns="0">
-            <a:spAutoFit/>
-          </a:bodyPr>
-          <a:lstStyle/>
-          <a:p>
-            <a:pPr algn="l">
-              <a:lnSpc>
-                <a:spcPct val="112000"/>
-              </a:lnSpc>
-            </a:pPr>
-            <a:r>
-              <a:rPr sz="1900" b="1">
-                <a:solidFill>
-                  <a:srgbClr val="00E676"/>
-                </a:solidFill>
-                <a:latin typeface="Space Grotesk"/>
-              </a:rPr>
-              <a:t>THINK</a:t>
-            </a:r>
-          </a:p>
-        </p:txBody>
-      </p:sp>
-      <p:sp>
-        <p:nvSpPr>
-          <p:cNvPr id="10" name="TextBox 9"/>
-          <p:cNvSpPr txBox="1"/>
-          <p:nvPr/>
-        </p:nvSpPr>
-        <p:spPr>
-          <a:xfrm>
-            <a:off x="4526279" y="3035808"/>
-            <a:ext cx="3182112" cy="1097280"/>
-          </a:xfrm>
-          <a:prstGeom prst="rect">
-            <a:avLst/>
-          </a:prstGeom>
-          <a:noFill/>
-        </p:spPr>
-        <p:txBody>
-          <a:bodyPr wrap="square" anchor="t" lIns="0" rIns="0" tIns="0" bIns="0">
-            <a:spAutoFit/>
-          </a:bodyPr>
-          <a:lstStyle/>
-          <a:p>
-            <a:pPr algn="l">
-              <a:lnSpc>
-                <a:spcPct val="130000"/>
-              </a:lnSpc>
-            </a:pPr>
-            <a:r>
-              <a:rPr sz="1350" b="0">
-                <a:solidFill>
-                  <a:srgbClr val="C7D2E8"/>
-                </a:solidFill>
-                <a:latin typeface="Inter"/>
-              </a:rPr>
-              <a:t>A trained DQN brain reads an 18-feature state of the junction and decides, every second, which road gets green.</a:t>
-            </a:r>
-          </a:p>
-        </p:txBody>
-      </p:sp>
-      <p:sp>
-        <p:nvSpPr>
-          <p:cNvPr id="11" name="Rounded Rectangle 10"/>
-          <p:cNvSpPr/>
-          <p:nvPr/>
-        </p:nvSpPr>
-        <p:spPr>
-          <a:xfrm>
-            <a:off x="8074152" y="2395728"/>
-            <a:ext cx="3630168" cy="1828800"/>
-          </a:xfrm>
-          <a:prstGeom prst="roundRect">
-            <a:avLst>
-              <a:gd name="adj" fmla="val 5500"/>
-            </a:avLst>
-          </a:prstGeom>
-          <a:solidFill>
-            <a:srgbClr val="141D33"/>
-          </a:solidFill>
-          <a:ln w="12700">
-            <a:solidFill>
-              <a:srgbClr val="24304D"/>
-            </a:solidFill>
-          </a:ln>
-          <a:effectLst/>
-        </p:spPr>
-        <p:style>
-          <a:lnRef idx="1">
-            <a:schemeClr val="accent1"/>
-          </a:lnRef>
-          <a:fillRef idx="3">
-            <a:schemeClr val="accent1"/>
-          </a:fillRef>
-          <a:effectRef idx="2">
-            <a:schemeClr val="accent1"/>
-          </a:effectRef>
-          <a:fontRef idx="minor">
-            <a:schemeClr val="lt1"/>
-          </a:fontRef>
-        </p:style>
-        <p:txBody>
-          <a:bodyPr rtlCol="0" anchor="ctr"/>
-          <a:lstStyle/>
-          <a:p>
-            <a:pPr algn="ctr"/>
-          </a:p>
-        </p:txBody>
-      </p:sp>
-      <p:sp>
-        <p:nvSpPr>
-          <p:cNvPr id="12" name="TextBox 11"/>
-          <p:cNvSpPr txBox="1"/>
-          <p:nvPr/>
-        </p:nvSpPr>
-        <p:spPr>
-          <a:xfrm>
-            <a:off x="8311896" y="2596896"/>
-            <a:ext cx="3154680" cy="411480"/>
-          </a:xfrm>
-          <a:prstGeom prst="rect">
-            <a:avLst/>
-          </a:prstGeom>
-          <a:noFill/>
-        </p:spPr>
-        <p:txBody>
-          <a:bodyPr wrap="square" anchor="t" lIns="0" rIns="0" tIns="0" bIns="0">
-            <a:spAutoFit/>
-          </a:bodyPr>
-          <a:lstStyle/>
-          <a:p>
-            <a:pPr algn="l">
-              <a:lnSpc>
-                <a:spcPct val="112000"/>
-              </a:lnSpc>
-            </a:pPr>
-            <a:r>
-              <a:rPr sz="1900" b="1">
-                <a:solidFill>
-                  <a:srgbClr val="00E676"/>
-                </a:solidFill>
-                <a:latin typeface="Space Grotesk"/>
-              </a:rPr>
-              <a:t>ACT</a:t>
-            </a:r>
-          </a:p>
-        </p:txBody>
-      </p:sp>
-      <p:sp>
-        <p:nvSpPr>
-          <p:cNvPr id="13" name="TextBox 12"/>
-          <p:cNvSpPr txBox="1"/>
-          <p:nvPr/>
-        </p:nvSpPr>
-        <p:spPr>
-          <a:xfrm>
-            <a:off x="8311896" y="3035808"/>
-            <a:ext cx="3182112" cy="1097280"/>
-          </a:xfrm>
-          <a:prstGeom prst="rect">
-            <a:avLst/>
-          </a:prstGeom>
-          <a:noFill/>
-        </p:spPr>
-        <p:txBody>
-          <a:bodyPr wrap="square" anchor="t" lIns="0" rIns="0" tIns="0" bIns="0">
-            <a:spAutoFit/>
-          </a:bodyPr>
-          <a:lstStyle/>
-          <a:p>
-            <a:pPr algn="l">
-              <a:lnSpc>
-                <a:spcPct val="130000"/>
-              </a:lnSpc>
-            </a:pPr>
-            <a:r>
-              <a:rPr sz="1350" b="0">
-                <a:solidFill>
-                  <a:srgbClr val="C7D2E8"/>
-                </a:solidFill>
-                <a:latin typeface="Inter"/>
-              </a:rPr>
-              <a:t>Signals hand green to the road that needs it, then re-check a second later. One road open at a time.</a:t>
-            </a:r>
-          </a:p>
-        </p:txBody>
-      </p:sp>
-      <p:sp>
-        <p:nvSpPr>
-          <p:cNvPr id="14" name="Rounded Rectangle 13"/>
-          <p:cNvSpPr/>
-          <p:nvPr/>
-        </p:nvSpPr>
-        <p:spPr>
-          <a:xfrm>
-            <a:off x="502920" y="4407408"/>
-            <a:ext cx="11183112" cy="1005840"/>
-          </a:xfrm>
-          <a:prstGeom prst="roundRect">
-            <a:avLst>
-              <a:gd name="adj" fmla="val 5500"/>
-            </a:avLst>
-          </a:prstGeom>
-          <a:solidFill>
-            <a:srgbClr val="10281C"/>
-          </a:solidFill>
-          <a:ln w="15240">
-            <a:solidFill>
-              <a:srgbClr val="00E676"/>
-            </a:solidFill>
-          </a:ln>
-          <a:effectLst/>
-        </p:spPr>
-        <p:style>
-          <a:lnRef idx="1">
-            <a:schemeClr val="accent1"/>
-          </a:lnRef>
-          <a:fillRef idx="3">
-            <a:schemeClr val="accent1"/>
-          </a:fillRef>
-          <a:effectRef idx="2">
-            <a:schemeClr val="accent1"/>
-          </a:effectRef>
-          <a:fontRef idx="minor">
-            <a:schemeClr val="lt1"/>
-          </a:fontRef>
-        </p:style>
-        <p:txBody>
-          <a:bodyPr rtlCol="0" anchor="ctr"/>
-          <a:lstStyle/>
-          <a:p>
-            <a:pPr algn="ctr"/>
-          </a:p>
-        </p:txBody>
-      </p:sp>
-      <p:sp>
-        <p:nvSpPr>
-          <p:cNvPr id="15" name="TextBox 14"/>
-          <p:cNvSpPr txBox="1"/>
-          <p:nvPr/>
-        </p:nvSpPr>
-        <p:spPr>
-          <a:xfrm>
-            <a:off x="749808" y="4544568"/>
-            <a:ext cx="10698480" cy="274320"/>
-          </a:xfrm>
-          <a:prstGeom prst="rect">
-            <a:avLst/>
-          </a:prstGeom>
-          <a:noFill/>
-        </p:spPr>
-        <p:txBody>
-          <a:bodyPr wrap="square" anchor="t" lIns="0" rIns="0" tIns="0" bIns="0">
-            <a:spAutoFit/>
-          </a:bodyPr>
-          <a:lstStyle/>
-          <a:p>
-            <a:pPr algn="l">
-              <a:lnSpc>
-                <a:spcPct val="112000"/>
-              </a:lnSpc>
-            </a:pPr>
-            <a:r>
-              <a:rPr sz="1200" b="1">
-                <a:solidFill>
-                  <a:srgbClr val="00E676"/>
-                </a:solidFill>
-                <a:latin typeface="Space Grotesk"/>
-              </a:rPr>
-              <a:t>HARD-CODED SAFETY, NEVER LEARNED AWAY</a:t>
-            </a:r>
-          </a:p>
-        </p:txBody>
-      </p:sp>
-      <p:sp>
-        <p:nvSpPr>
-          <p:cNvPr id="16" name="TextBox 15"/>
-          <p:cNvSpPr txBox="1"/>
-          <p:nvPr/>
-        </p:nvSpPr>
-        <p:spPr>
-          <a:xfrm>
-            <a:off x="749808" y="4828032"/>
-            <a:ext cx="10698480" cy="457200"/>
-          </a:xfrm>
-          <a:prstGeom prst="rect">
-            <a:avLst/>
-          </a:prstGeom>
-          <a:noFill/>
-        </p:spPr>
-        <p:txBody>
-          <a:bodyPr wrap="square" anchor="t" lIns="0" rIns="0" tIns="0" bIns="0">
-            <a:spAutoFit/>
-          </a:bodyPr>
-          <a:lstStyle/>
-          <a:p>
-            <a:pPr algn="l">
-              <a:lnSpc>
-                <a:spcPct val="112000"/>
-              </a:lnSpc>
-            </a:pPr>
-            <a:r>
-              <a:rPr sz="1350" b="0">
+              <a:rPr sz="2000" b="0">
                 <a:solidFill>
                   <a:srgbClr val="EDF2F7"/>
                 </a:solidFill>
                 <a:latin typeface="Inter"/>
               </a:rPr>
-              <a:t>Green is never cut under a car inside the 70 m dilemma zone. A starvation guard means no road waits forever. Max-green keeps every split fair.</a:t>
-            </a:r>
-          </a:p>
-        </p:txBody>
-      </p:sp>
-      <p:sp>
-        <p:nvSpPr>
-          <p:cNvPr id="17" name="Rounded Rectangle 16"/>
-          <p:cNvSpPr/>
-          <p:nvPr/>
-        </p:nvSpPr>
-        <p:spPr>
-          <a:xfrm>
-            <a:off x="502920" y="5596128"/>
-            <a:ext cx="2688336" cy="822960"/>
-          </a:xfrm>
-          <a:prstGeom prst="roundRect">
-            <a:avLst>
-              <a:gd name="adj" fmla="val 5500"/>
-            </a:avLst>
-          </a:prstGeom>
-          <a:solidFill>
-            <a:srgbClr val="141D33"/>
-          </a:solidFill>
-          <a:ln w="12700">
-            <a:solidFill>
-              <a:srgbClr val="24304D"/>
-            </a:solidFill>
-          </a:ln>
-          <a:effectLst/>
-        </p:spPr>
-        <p:style>
-          <a:lnRef idx="1">
-            <a:schemeClr val="accent1"/>
-          </a:lnRef>
-          <a:fillRef idx="3">
-            <a:schemeClr val="accent1"/>
-          </a:fillRef>
-          <a:effectRef idx="2">
-            <a:schemeClr val="accent1"/>
-          </a:effectRef>
-          <a:fontRef idx="minor">
-            <a:schemeClr val="lt1"/>
-          </a:fontRef>
-        </p:style>
-        <p:txBody>
-          <a:bodyPr rtlCol="0" anchor="ctr"/>
-          <a:lstStyle/>
-          <a:p>
-            <a:pPr algn="ctr"/>
-          </a:p>
-        </p:txBody>
-      </p:sp>
-      <p:sp>
-        <p:nvSpPr>
-          <p:cNvPr id="18" name="TextBox 17"/>
-          <p:cNvSpPr txBox="1"/>
-          <p:nvPr/>
-        </p:nvSpPr>
-        <p:spPr>
-          <a:xfrm>
-            <a:off x="685800" y="5678424"/>
-            <a:ext cx="2377440" cy="411480"/>
-          </a:xfrm>
-          <a:prstGeom prst="rect">
-            <a:avLst/>
-          </a:prstGeom>
-          <a:noFill/>
-        </p:spPr>
-        <p:txBody>
-          <a:bodyPr wrap="square" anchor="t" lIns="0" rIns="0" tIns="0" bIns="0">
-            <a:spAutoFit/>
-          </a:bodyPr>
-          <a:lstStyle/>
+              <a:t>Registered vehicles in Lahore went from about 378,000 in 2014 to 4.1 million in 2024: an elevenfold rise (Excise and Taxation Department, Punjab). The average commute is now around 34.8 minutes (Numbeo 2026 Traffic Index, via Lahore Traffic Police). Congestion costs Lahore drivers up to PKR 1,136.88 per day each (Nawaz et al., SAGE Open, 2024).</a:t>
+            </a:r>
+          </a:p>
           <a:p>
             <a:pPr algn="l">
-              <a:lnSpc>
-                <a:spcPct val="112000"/>
-              </a:lnSpc>
+              <a:spcAft>
+                <a:spcPts val="600"/>
+              </a:spcAft>
             </a:pPr>
             <a:r>
-              <a:rPr sz="2000" b="1">
-                <a:solidFill>
-                  <a:srgbClr val="00E676"/>
-                </a:solidFill>
-                <a:latin typeface="Space Grotesk"/>
-              </a:rPr>
-              <a:t>5,506</a:t>
-            </a:r>
-          </a:p>
-        </p:txBody>
-      </p:sp>
-      <p:sp>
-        <p:nvSpPr>
-          <p:cNvPr id="19" name="TextBox 18"/>
-          <p:cNvSpPr txBox="1"/>
-          <p:nvPr/>
-        </p:nvSpPr>
-        <p:spPr>
-          <a:xfrm>
-            <a:off x="685800" y="6089904"/>
-            <a:ext cx="2377440" cy="274320"/>
-          </a:xfrm>
-          <a:prstGeom prst="rect">
-            <a:avLst/>
-          </a:prstGeom>
-          <a:noFill/>
-        </p:spPr>
-        <p:txBody>
-          <a:bodyPr wrap="square" anchor="t" lIns="0" rIns="0" tIns="0" bIns="0">
-            <a:spAutoFit/>
-          </a:bodyPr>
-          <a:lstStyle/>
-          <a:p>
-            <a:pPr algn="l">
-              <a:lnSpc>
-                <a:spcPct val="112000"/>
-              </a:lnSpc>
-            </a:pPr>
-            <a:r>
-              <a:rPr sz="1050" b="0">
+              <a:rPr sz="2000" b="0">
                 <a:solidFill>
                   <a:srgbClr val="93A1C0"/>
                 </a:solidFill>
                 <a:latin typeface="Inter"/>
               </a:rPr>
-              <a:t>model parameters</a:t>
-            </a:r>
-          </a:p>
-        </p:txBody>
-      </p:sp>
-      <p:sp>
-        <p:nvSpPr>
-          <p:cNvPr id="20" name="Rounded Rectangle 19"/>
-          <p:cNvSpPr/>
-          <p:nvPr/>
-        </p:nvSpPr>
-        <p:spPr>
-          <a:xfrm>
-            <a:off x="3346704" y="5596128"/>
-            <a:ext cx="2688336" cy="822960"/>
-          </a:xfrm>
-          <a:prstGeom prst="roundRect">
-            <a:avLst>
-              <a:gd name="adj" fmla="val 5500"/>
-            </a:avLst>
-          </a:prstGeom>
-          <a:solidFill>
-            <a:srgbClr val="141D33"/>
-          </a:solidFill>
-          <a:ln w="12700">
-            <a:solidFill>
-              <a:srgbClr val="24304D"/>
-            </a:solidFill>
-          </a:ln>
-          <a:effectLst/>
-        </p:spPr>
-        <p:style>
-          <a:lnRef idx="1">
-            <a:schemeClr val="accent1"/>
-          </a:lnRef>
-          <a:fillRef idx="3">
-            <a:schemeClr val="accent1"/>
-          </a:fillRef>
-          <a:effectRef idx="2">
-            <a:schemeClr val="accent1"/>
-          </a:effectRef>
-          <a:fontRef idx="minor">
-            <a:schemeClr val="lt1"/>
-          </a:fontRef>
-        </p:style>
-        <p:txBody>
-          <a:bodyPr rtlCol="0" anchor="ctr"/>
-          <a:lstStyle/>
-          <a:p>
-            <a:pPr algn="ctr"/>
-          </a:p>
-        </p:txBody>
-      </p:sp>
-      <p:sp>
-        <p:nvSpPr>
-          <p:cNvPr id="21" name="TextBox 20"/>
-          <p:cNvSpPr txBox="1"/>
-          <p:nvPr/>
-        </p:nvSpPr>
-        <p:spPr>
-          <a:xfrm>
-            <a:off x="3529584" y="5678424"/>
-            <a:ext cx="2377440" cy="411480"/>
-          </a:xfrm>
-          <a:prstGeom prst="rect">
-            <a:avLst/>
-          </a:prstGeom>
-          <a:noFill/>
-        </p:spPr>
-        <p:txBody>
-          <a:bodyPr wrap="square" anchor="t" lIns="0" rIns="0" tIns="0" bIns="0">
-            <a:spAutoFit/>
-          </a:bodyPr>
-          <a:lstStyle/>
-          <a:p>
-            <a:pPr algn="l">
-              <a:lnSpc>
-                <a:spcPct val="112000"/>
-              </a:lnSpc>
-            </a:pPr>
-            <a:r>
-              <a:rPr sz="2000" b="1">
-                <a:solidFill>
-                  <a:srgbClr val="00E676"/>
-                </a:solidFill>
-                <a:latin typeface="Space Grotesk"/>
-              </a:rPr>
-              <a:t>1 s</a:t>
-            </a:r>
-          </a:p>
-        </p:txBody>
-      </p:sp>
-      <p:sp>
-        <p:nvSpPr>
-          <p:cNvPr id="22" name="TextBox 21"/>
-          <p:cNvSpPr txBox="1"/>
-          <p:nvPr/>
-        </p:nvSpPr>
-        <p:spPr>
-          <a:xfrm>
-            <a:off x="3529584" y="6089904"/>
-            <a:ext cx="2377440" cy="274320"/>
-          </a:xfrm>
-          <a:prstGeom prst="rect">
-            <a:avLst/>
-          </a:prstGeom>
-          <a:noFill/>
-        </p:spPr>
-        <p:txBody>
-          <a:bodyPr wrap="square" anchor="t" lIns="0" rIns="0" tIns="0" bIns="0">
-            <a:spAutoFit/>
-          </a:bodyPr>
-          <a:lstStyle/>
-          <a:p>
-            <a:pPr algn="l">
-              <a:lnSpc>
-                <a:spcPct val="112000"/>
-              </a:lnSpc>
-            </a:pPr>
-            <a:r>
-              <a:rPr sz="1050" b="0">
-                <a:solidFill>
-                  <a:srgbClr val="93A1C0"/>
-                </a:solidFill>
-                <a:latin typeface="Inter"/>
-              </a:rPr>
-              <a:t>decision cycle</a:t>
-            </a:r>
-          </a:p>
-        </p:txBody>
-      </p:sp>
-      <p:sp>
-        <p:nvSpPr>
-          <p:cNvPr id="23" name="Rounded Rectangle 22"/>
-          <p:cNvSpPr/>
-          <p:nvPr/>
-        </p:nvSpPr>
-        <p:spPr>
-          <a:xfrm>
-            <a:off x="6190488" y="5596128"/>
-            <a:ext cx="2688336" cy="822960"/>
-          </a:xfrm>
-          <a:prstGeom prst="roundRect">
-            <a:avLst>
-              <a:gd name="adj" fmla="val 5500"/>
-            </a:avLst>
-          </a:prstGeom>
-          <a:solidFill>
-            <a:srgbClr val="141D33"/>
-          </a:solidFill>
-          <a:ln w="12700">
-            <a:solidFill>
-              <a:srgbClr val="24304D"/>
-            </a:solidFill>
-          </a:ln>
-          <a:effectLst/>
-        </p:spPr>
-        <p:style>
-          <a:lnRef idx="1">
-            <a:schemeClr val="accent1"/>
-          </a:lnRef>
-          <a:fillRef idx="3">
-            <a:schemeClr val="accent1"/>
-          </a:fillRef>
-          <a:effectRef idx="2">
-            <a:schemeClr val="accent1"/>
-          </a:effectRef>
-          <a:fontRef idx="minor">
-            <a:schemeClr val="lt1"/>
-          </a:fontRef>
-        </p:style>
-        <p:txBody>
-          <a:bodyPr rtlCol="0" anchor="ctr"/>
-          <a:lstStyle/>
-          <a:p>
-            <a:pPr algn="ctr"/>
-          </a:p>
-        </p:txBody>
-      </p:sp>
-      <p:sp>
-        <p:nvSpPr>
-          <p:cNvPr id="24" name="TextBox 23"/>
-          <p:cNvSpPr txBox="1"/>
-          <p:nvPr/>
-        </p:nvSpPr>
-        <p:spPr>
-          <a:xfrm>
-            <a:off x="6373368" y="5678424"/>
-            <a:ext cx="2377440" cy="411480"/>
-          </a:xfrm>
-          <a:prstGeom prst="rect">
-            <a:avLst/>
-          </a:prstGeom>
-          <a:noFill/>
-        </p:spPr>
-        <p:txBody>
-          <a:bodyPr wrap="square" anchor="t" lIns="0" rIns="0" tIns="0" bIns="0">
-            <a:spAutoFit/>
-          </a:bodyPr>
-          <a:lstStyle/>
-          <a:p>
-            <a:pPr algn="l">
-              <a:lnSpc>
-                <a:spcPct val="112000"/>
-              </a:lnSpc>
-            </a:pPr>
-            <a:r>
-              <a:rPr sz="2000" b="1">
-                <a:solidFill>
-                  <a:srgbClr val="00E676"/>
-                </a:solidFill>
-                <a:latin typeface="Space Grotesk"/>
-              </a:rPr>
-              <a:t>2 of 3</a:t>
-            </a:r>
-          </a:p>
-        </p:txBody>
-      </p:sp>
-      <p:sp>
-        <p:nvSpPr>
-          <p:cNvPr id="25" name="TextBox 24"/>
-          <p:cNvSpPr txBox="1"/>
-          <p:nvPr/>
-        </p:nvSpPr>
-        <p:spPr>
-          <a:xfrm>
-            <a:off x="6373368" y="6089904"/>
-            <a:ext cx="2377440" cy="274320"/>
-          </a:xfrm>
-          <a:prstGeom prst="rect">
-            <a:avLst/>
-          </a:prstGeom>
-          <a:noFill/>
-        </p:spPr>
-        <p:txBody>
-          <a:bodyPr wrap="square" anchor="t" lIns="0" rIns="0" tIns="0" bIns="0">
-            <a:spAutoFit/>
-          </a:bodyPr>
-          <a:lstStyle/>
-          <a:p>
-            <a:pPr algn="l">
-              <a:lnSpc>
-                <a:spcPct val="112000"/>
-              </a:lnSpc>
-            </a:pPr>
-            <a:r>
-              <a:rPr sz="1050" b="0">
-                <a:solidFill>
-                  <a:srgbClr val="93A1C0"/>
-                </a:solidFill>
-                <a:latin typeface="Inter"/>
-              </a:rPr>
-              <a:t>benchmark scenarios won</a:t>
-            </a:r>
-          </a:p>
-        </p:txBody>
-      </p:sp>
-      <p:sp>
-        <p:nvSpPr>
-          <p:cNvPr id="26" name="Rounded Rectangle 25"/>
-          <p:cNvSpPr/>
-          <p:nvPr/>
-        </p:nvSpPr>
-        <p:spPr>
-          <a:xfrm>
-            <a:off x="9034272" y="5596128"/>
-            <a:ext cx="2688336" cy="822960"/>
-          </a:xfrm>
-          <a:prstGeom prst="roundRect">
-            <a:avLst>
-              <a:gd name="adj" fmla="val 5500"/>
-            </a:avLst>
-          </a:prstGeom>
-          <a:solidFill>
-            <a:srgbClr val="141D33"/>
-          </a:solidFill>
-          <a:ln w="12700">
-            <a:solidFill>
-              <a:srgbClr val="24304D"/>
-            </a:solidFill>
-          </a:ln>
-          <a:effectLst/>
-        </p:spPr>
-        <p:style>
-          <a:lnRef idx="1">
-            <a:schemeClr val="accent1"/>
-          </a:lnRef>
-          <a:fillRef idx="3">
-            <a:schemeClr val="accent1"/>
-          </a:fillRef>
-          <a:effectRef idx="2">
-            <a:schemeClr val="accent1"/>
-          </a:effectRef>
-          <a:fontRef idx="minor">
-            <a:schemeClr val="lt1"/>
-          </a:fontRef>
-        </p:style>
-        <p:txBody>
-          <a:bodyPr rtlCol="0" anchor="ctr"/>
-          <a:lstStyle/>
-          <a:p>
-            <a:pPr algn="ctr"/>
-          </a:p>
-        </p:txBody>
-      </p:sp>
-      <p:sp>
-        <p:nvSpPr>
-          <p:cNvPr id="27" name="TextBox 26"/>
-          <p:cNvSpPr txBox="1"/>
-          <p:nvPr/>
-        </p:nvSpPr>
-        <p:spPr>
-          <a:xfrm>
-            <a:off x="9217152" y="5678424"/>
-            <a:ext cx="2377440" cy="411480"/>
-          </a:xfrm>
-          <a:prstGeom prst="rect">
-            <a:avLst/>
-          </a:prstGeom>
-          <a:noFill/>
-        </p:spPr>
-        <p:txBody>
-          <a:bodyPr wrap="square" anchor="t" lIns="0" rIns="0" tIns="0" bIns="0">
-            <a:spAutoFit/>
-          </a:bodyPr>
-          <a:lstStyle/>
-          <a:p>
-            <a:pPr algn="l">
-              <a:lnSpc>
-                <a:spcPct val="112000"/>
-              </a:lnSpc>
-            </a:pPr>
-            <a:r>
-              <a:rPr sz="2000" b="1">
-                <a:solidFill>
-                  <a:srgbClr val="00E676"/>
-                </a:solidFill>
-                <a:latin typeface="Space Grotesk"/>
-              </a:rPr>
-              <a:t>7.3 s</a:t>
-            </a:r>
-          </a:p>
-        </p:txBody>
-      </p:sp>
-      <p:sp>
-        <p:nvSpPr>
-          <p:cNvPr id="28" name="TextBox 27"/>
-          <p:cNvSpPr txBox="1"/>
-          <p:nvPr/>
-        </p:nvSpPr>
-        <p:spPr>
-          <a:xfrm>
-            <a:off x="9217152" y="6089904"/>
-            <a:ext cx="2377440" cy="274320"/>
-          </a:xfrm>
-          <a:prstGeom prst="rect">
-            <a:avLst/>
-          </a:prstGeom>
-          <a:noFill/>
-        </p:spPr>
-        <p:txBody>
-          <a:bodyPr wrap="square" anchor="t" lIns="0" rIns="0" tIns="0" bIns="0">
-            <a:spAutoFit/>
-          </a:bodyPr>
-          <a:lstStyle/>
-          <a:p>
-            <a:pPr algn="l">
-              <a:lnSpc>
-                <a:spcPct val="112000"/>
-              </a:lnSpc>
-            </a:pPr>
-            <a:r>
-              <a:rPr sz="1050" b="0">
-                <a:solidFill>
-                  <a:srgbClr val="93A1C0"/>
-                </a:solidFill>
-                <a:latin typeface="Inter"/>
-              </a:rPr>
-              <a:t>best average delay</a:t>
-            </a:r>
-          </a:p>
-        </p:txBody>
-      </p:sp>
-      <p:sp>
-        <p:nvSpPr>
-          <p:cNvPr id="29" name="TextBox 28"/>
-          <p:cNvSpPr txBox="1"/>
-          <p:nvPr/>
-        </p:nvSpPr>
-        <p:spPr>
-          <a:xfrm>
-            <a:off x="502920" y="6528816"/>
-            <a:ext cx="5486400" cy="228600"/>
-          </a:xfrm>
-          <a:prstGeom prst="rect">
-            <a:avLst/>
-          </a:prstGeom>
-          <a:noFill/>
-        </p:spPr>
-        <p:txBody>
-          <a:bodyPr wrap="square" anchor="t" lIns="0" rIns="0" tIns="0" bIns="0">
-            <a:spAutoFit/>
-          </a:bodyPr>
-          <a:lstStyle/>
-          <a:p>
-            <a:pPr algn="l">
-              <a:lnSpc>
-                <a:spcPct val="112000"/>
-              </a:lnSpc>
-            </a:pPr>
-            <a:r>
-              <a:rPr sz="950" b="0">
-                <a:solidFill>
-                  <a:srgbClr val="93A1C0"/>
-                </a:solidFill>
-                <a:latin typeface="Inter"/>
-              </a:rPr>
-              <a:t>SABZ · AI-ADAPTIVE TRAFFIC SIGNALS</a:t>
-            </a:r>
-          </a:p>
-        </p:txBody>
-      </p:sp>
-      <p:sp>
-        <p:nvSpPr>
-          <p:cNvPr id="30" name="TextBox 29"/>
-          <p:cNvSpPr txBox="1"/>
-          <p:nvPr/>
-        </p:nvSpPr>
-        <p:spPr>
-          <a:xfrm>
-            <a:off x="11292840" y="6528816"/>
-            <a:ext cx="411480" cy="228600"/>
-          </a:xfrm>
-          <a:prstGeom prst="rect">
-            <a:avLst/>
-          </a:prstGeom>
-          <a:noFill/>
-        </p:spPr>
-        <p:txBody>
-          <a:bodyPr wrap="square" anchor="t" lIns="0" rIns="0" tIns="0" bIns="0">
-            <a:spAutoFit/>
-          </a:bodyPr>
-          <a:lstStyle/>
-          <a:p>
-            <a:pPr algn="r">
-              <a:lnSpc>
-                <a:spcPct val="112000"/>
-              </a:lnSpc>
-            </a:pPr>
-            <a:r>
-              <a:rPr sz="950" b="0">
-                <a:solidFill>
-                  <a:srgbClr val="93A1C0"/>
-                </a:solidFill>
-                <a:latin typeface="Inter"/>
-              </a:rPr>
-              <a:t>2</a:t>
+              <a:t>Every red light burns fuel, pumps CO2, and steals time from millions of people. The signals controlling it all run on fixed timers from another era.</a:t>
             </a:r>
           </a:p>
         </p:txBody>
@@ -5268,40 +6236,16 @@
         <p:nvPr/>
       </p:nvGrpSpPr>
       <p:grpSpPr/>
-      <p:pic>
-        <p:nvPicPr>
-          <p:cNvPr id="2" name="Picture 1" descr="logo.png"/>
-          <p:cNvPicPr>
-            <a:picLocks noChangeAspect="1"/>
-          </p:cNvPicPr>
-          <p:nvPr/>
-        </p:nvPicPr>
-        <p:blipFill>
-          <a:blip r:embed="rId2"/>
-          <a:stretch>
-            <a:fillRect/>
-          </a:stretch>
-        </p:blipFill>
-        <p:spPr>
-          <a:xfrm>
-            <a:off x="502920" y="237744"/>
-            <a:ext cx="1691640" cy="601472"/>
-          </a:xfrm>
-          <a:prstGeom prst="rect">
-            <a:avLst/>
-          </a:prstGeom>
-        </p:spPr>
-      </p:pic>
-      <p:sp>
-        <p:nvSpPr>
-          <p:cNvPr id="3" name="TextBox 2"/>
+      <p:sp>
+        <p:nvSpPr>
+          <p:cNvPr id="2" name="TextBox 1"/>
           <p:cNvSpPr txBox="1"/>
           <p:nvPr/>
         </p:nvSpPr>
         <p:spPr>
           <a:xfrm>
-            <a:off x="502920" y="1024128"/>
-            <a:ext cx="11155680" cy="457200"/>
+            <a:off x="640080" y="320040"/>
+            <a:ext cx="10881360" cy="457200"/>
           </a:xfrm>
           <a:prstGeom prst="rect">
             <a:avLst/>
@@ -5309,52 +6253,112 @@
           <a:noFill/>
         </p:spPr>
         <p:txBody>
-          <a:bodyPr wrap="square" anchor="t" lIns="0" rIns="0" tIns="0" bIns="0">
+          <a:bodyPr wrap="square">
             <a:spAutoFit/>
           </a:bodyPr>
           <a:lstStyle/>
           <a:p>
             <a:pPr algn="l">
-              <a:lnSpc>
-                <a:spcPct val="112000"/>
-              </a:lnSpc>
+              <a:spcAft>
+                <a:spcPts val="600"/>
+              </a:spcAft>
             </a:pPr>
             <a:r>
-              <a:rPr sz="2700" b="1">
+              <a:rPr sz="1300" b="1">
+                <a:solidFill>
+                  <a:srgbClr val="00E676"/>
+                </a:solidFill>
+                <a:latin typeface="Space Grotesk"/>
+              </a:rPr>
+              <a:t>02  WHY CURRENT SIGNALS FAIL</a:t>
+            </a:r>
+          </a:p>
+        </p:txBody>
+      </p:sp>
+      <p:sp>
+        <p:nvSpPr>
+          <p:cNvPr id="3" name="TextBox 2"/>
+          <p:cNvSpPr txBox="1"/>
+          <p:nvPr/>
+        </p:nvSpPr>
+        <p:spPr>
+          <a:xfrm>
+            <a:off x="640080" y="685800"/>
+            <a:ext cx="10881360" cy="1463040"/>
+          </a:xfrm>
+          <a:prstGeom prst="rect">
+            <a:avLst/>
+          </a:prstGeom>
+          <a:noFill/>
+        </p:spPr>
+        <p:txBody>
+          <a:bodyPr wrap="square">
+            <a:spAutoFit/>
+          </a:bodyPr>
+          <a:lstStyle/>
+          <a:p>
+            <a:pPr algn="l">
+              <a:spcAft>
+                <a:spcPts val="600"/>
+              </a:spcAft>
+            </a:pPr>
+            <a:r>
+              <a:rPr sz="4000" b="1">
                 <a:solidFill>
                   <a:srgbClr val="EDF2F7"/>
                 </a:solidFill>
                 <a:latin typeface="Space Grotesk"/>
               </a:rPr>
-              <a:t>System Architecture</a:t>
-            </a:r>
-          </a:p>
-        </p:txBody>
-      </p:sp>
-      <p:pic>
-        <p:nvPicPr>
-          <p:cNvPr id="4" name="Picture 3" descr="architecture.png"/>
-          <p:cNvPicPr>
-            <a:picLocks noChangeAspect="1"/>
-          </p:cNvPicPr>
+              <a:t>A timer cannot see.</a:t>
+            </a:r>
+          </a:p>
+        </p:txBody>
+      </p:sp>
+      <p:sp>
+        <p:nvSpPr>
+          <p:cNvPr id="4" name="Rounded Rectangle 3"/>
+          <p:cNvSpPr/>
           <p:nvPr/>
-        </p:nvPicPr>
-        <p:blipFill>
-          <a:blip r:embed="rId3"/>
-          <a:stretch>
-            <a:fillRect/>
-          </a:stretch>
-        </p:blipFill>
-        <p:spPr>
-          <a:xfrm>
-            <a:off x="978408" y="1536192"/>
-            <a:ext cx="10241280" cy="5120640"/>
-          </a:xfrm>
-          <a:prstGeom prst="rect">
+        </p:nvSpPr>
+        <p:spPr>
+          <a:xfrm>
+            <a:off x="640080" y="2194560"/>
+            <a:ext cx="3291840" cy="3840480"/>
+          </a:xfrm>
+          <a:prstGeom prst="roundRect">
             <a:avLst/>
           </a:prstGeom>
-        </p:spPr>
-      </p:pic>
+          <a:solidFill>
+            <a:srgbClr val="141D33"/>
+          </a:solidFill>
+          <a:ln w="12700">
+            <a:solidFill>
+              <a:srgbClr val="24304D"/>
+            </a:solidFill>
+          </a:ln>
+        </p:spPr>
+        <p:style>
+          <a:lnRef idx="1">
+            <a:schemeClr val="accent1"/>
+          </a:lnRef>
+          <a:fillRef idx="3">
+            <a:schemeClr val="accent1"/>
+          </a:fillRef>
+          <a:effectRef idx="2">
+            <a:schemeClr val="accent1"/>
+          </a:effectRef>
+          <a:fontRef idx="minor">
+            <a:schemeClr val="lt1"/>
+          </a:fontRef>
+        </p:style>
+        <p:txBody>
+          <a:bodyPr rtlCol="0" anchor="ctr"/>
+          <a:lstStyle/>
+          <a:p>
+            <a:pPr algn="ctr"/>
+          </a:p>
+        </p:txBody>
+      </p:sp>
       <p:sp>
         <p:nvSpPr>
           <p:cNvPr id="5" name="TextBox 4"/>
@@ -5363,8 +6367,8 @@
         </p:nvSpPr>
         <p:spPr>
           <a:xfrm>
-            <a:off x="502920" y="6528816"/>
-            <a:ext cx="5486400" cy="228600"/>
+            <a:off x="868680" y="2468880"/>
+            <a:ext cx="2834640" cy="3291840"/>
           </a:xfrm>
           <a:prstGeom prst="rect">
             <a:avLst/>
@@ -5372,38 +6376,99 @@
           <a:noFill/>
         </p:spPr>
         <p:txBody>
-          <a:bodyPr wrap="square" anchor="t" lIns="0" rIns="0" tIns="0" bIns="0">
+          <a:bodyPr wrap="square">
             <a:spAutoFit/>
           </a:bodyPr>
           <a:lstStyle/>
           <a:p>
             <a:pPr algn="l">
-              <a:lnSpc>
-                <a:spcPct val="112000"/>
-              </a:lnSpc>
+              <a:spcAft>
+                <a:spcPts val="600"/>
+              </a:spcAft>
             </a:pPr>
             <a:r>
-              <a:rPr sz="950" b="0">
+              <a:rPr sz="1500" b="1">
                 <a:solidFill>
-                  <a:srgbClr val="93A1C0"/>
+                  <a:srgbClr val="F87171"/>
+                </a:solidFill>
+                <a:latin typeface="Space Grotesk"/>
+              </a:rPr>
+              <a:t>FIXED TIMER</a:t>
+            </a:r>
+          </a:p>
+          <a:p>
+            <a:pPr algn="l">
+              <a:spcAft>
+                <a:spcPts val="600"/>
+              </a:spcAft>
+            </a:pPr>
+            <a:r>
+              <a:rPr sz="1700" b="0">
+                <a:solidFill>
+                  <a:srgbClr val="EDF2F7"/>
                 </a:solidFill>
                 <a:latin typeface="Inter"/>
               </a:rPr>
-              <a:t>SABZ · AI-ADAPTIVE TRAFFIC SIGNALS</a:t>
-            </a:r>
-          </a:p>
-        </p:txBody>
-      </p:sp>
-      <p:sp>
-        <p:nvSpPr>
-          <p:cNvPr id="6" name="TextBox 5"/>
+              <a:t>25 seconds of green for every road, at 3 AM and at 6 PM. Empty road gets the same green as 20 waiting cars.</a:t>
+            </a:r>
+          </a:p>
+        </p:txBody>
+      </p:sp>
+      <p:sp>
+        <p:nvSpPr>
+          <p:cNvPr id="6" name="Rounded Rectangle 5"/>
+          <p:cNvSpPr/>
+          <p:nvPr/>
+        </p:nvSpPr>
+        <p:spPr>
+          <a:xfrm>
+            <a:off x="4480560" y="2194560"/>
+            <a:ext cx="3291840" cy="3840480"/>
+          </a:xfrm>
+          <a:prstGeom prst="roundRect">
+            <a:avLst/>
+          </a:prstGeom>
+          <a:solidFill>
+            <a:srgbClr val="141D33"/>
+          </a:solidFill>
+          <a:ln w="12700">
+            <a:solidFill>
+              <a:srgbClr val="24304D"/>
+            </a:solidFill>
+          </a:ln>
+        </p:spPr>
+        <p:style>
+          <a:lnRef idx="1">
+            <a:schemeClr val="accent1"/>
+          </a:lnRef>
+          <a:fillRef idx="3">
+            <a:schemeClr val="accent1"/>
+          </a:fillRef>
+          <a:effectRef idx="2">
+            <a:schemeClr val="accent1"/>
+          </a:effectRef>
+          <a:fontRef idx="minor">
+            <a:schemeClr val="lt1"/>
+          </a:fontRef>
+        </p:style>
+        <p:txBody>
+          <a:bodyPr rtlCol="0" anchor="ctr"/>
+          <a:lstStyle/>
+          <a:p>
+            <a:pPr algn="ctr"/>
+          </a:p>
+        </p:txBody>
+      </p:sp>
+      <p:sp>
+        <p:nvSpPr>
+          <p:cNvPr id="7" name="TextBox 6"/>
           <p:cNvSpPr txBox="1"/>
           <p:nvPr/>
         </p:nvSpPr>
         <p:spPr>
           <a:xfrm>
-            <a:off x="11292840" y="6528816"/>
-            <a:ext cx="411480" cy="228600"/>
+            <a:off x="4709160" y="2468880"/>
+            <a:ext cx="2834640" cy="3291840"/>
           </a:xfrm>
           <a:prstGeom prst="rect">
             <a:avLst/>
@@ -5411,24 +6476,140 @@
           <a:noFill/>
         </p:spPr>
         <p:txBody>
-          <a:bodyPr wrap="square" anchor="t" lIns="0" rIns="0" tIns="0" bIns="0">
+          <a:bodyPr wrap="square">
             <a:spAutoFit/>
           </a:bodyPr>
           <a:lstStyle/>
           <a:p>
-            <a:pPr algn="r">
-              <a:lnSpc>
-                <a:spcPct val="112000"/>
-              </a:lnSpc>
+            <a:pPr algn="l">
+              <a:spcAft>
+                <a:spcPts val="600"/>
+              </a:spcAft>
             </a:pPr>
             <a:r>
-              <a:rPr sz="950" b="0">
+              <a:rPr sz="1500" b="1">
                 <a:solidFill>
-                  <a:srgbClr val="93A1C0"/>
+                  <a:srgbClr val="FBBF24"/>
+                </a:solidFill>
+                <a:latin typeface="Space Grotesk"/>
+              </a:rPr>
+              <a:t>ACTUATED RULES</a:t>
+            </a:r>
+          </a:p>
+          <a:p>
+            <a:pPr algn="l">
+              <a:spcAft>
+                <a:spcPts val="600"/>
+              </a:spcAft>
+            </a:pPr>
+            <a:r>
+              <a:rPr sz="1700" b="0">
+                <a:solidFill>
+                  <a:srgbClr val="EDF2F7"/>
                 </a:solidFill>
                 <a:latin typeface="Inter"/>
               </a:rPr>
-              <a:t>3</a:t>
+              <a:t>Simple if-then logic: if my queue is empty and someone waits, switch. It reacts. It never learns, never anticipates, never adapts to a school rush or a Friday surge.</a:t>
+            </a:r>
+          </a:p>
+        </p:txBody>
+      </p:sp>
+      <p:sp>
+        <p:nvSpPr>
+          <p:cNvPr id="8" name="Rounded Rectangle 7"/>
+          <p:cNvSpPr/>
+          <p:nvPr/>
+        </p:nvSpPr>
+        <p:spPr>
+          <a:xfrm>
+            <a:off x="8321040" y="2194560"/>
+            <a:ext cx="3200400" cy="3840480"/>
+          </a:xfrm>
+          <a:prstGeom prst="roundRect">
+            <a:avLst/>
+          </a:prstGeom>
+          <a:solidFill>
+            <a:srgbClr val="141D33"/>
+          </a:solidFill>
+          <a:ln w="12700">
+            <a:solidFill>
+              <a:srgbClr val="00E676"/>
+            </a:solidFill>
+          </a:ln>
+        </p:spPr>
+        <p:style>
+          <a:lnRef idx="1">
+            <a:schemeClr val="accent1"/>
+          </a:lnRef>
+          <a:fillRef idx="3">
+            <a:schemeClr val="accent1"/>
+          </a:fillRef>
+          <a:effectRef idx="2">
+            <a:schemeClr val="accent1"/>
+          </a:effectRef>
+          <a:fontRef idx="minor">
+            <a:schemeClr val="lt1"/>
+          </a:fontRef>
+        </p:style>
+        <p:txBody>
+          <a:bodyPr rtlCol="0" anchor="ctr"/>
+          <a:lstStyle/>
+          <a:p>
+            <a:pPr algn="ctr"/>
+          </a:p>
+        </p:txBody>
+      </p:sp>
+      <p:sp>
+        <p:nvSpPr>
+          <p:cNvPr id="9" name="TextBox 8"/>
+          <p:cNvSpPr txBox="1"/>
+          <p:nvPr/>
+        </p:nvSpPr>
+        <p:spPr>
+          <a:xfrm>
+            <a:off x="8549640" y="2468880"/>
+            <a:ext cx="2743200" cy="3291840"/>
+          </a:xfrm>
+          <a:prstGeom prst="rect">
+            <a:avLst/>
+          </a:prstGeom>
+          <a:noFill/>
+        </p:spPr>
+        <p:txBody>
+          <a:bodyPr wrap="square">
+            <a:spAutoFit/>
+          </a:bodyPr>
+          <a:lstStyle/>
+          <a:p>
+            <a:pPr algn="l">
+              <a:spcAft>
+                <a:spcPts val="600"/>
+              </a:spcAft>
+            </a:pPr>
+            <a:r>
+              <a:rPr sz="1500" b="1">
+                <a:solidFill>
+                  <a:srgbClr val="00E676"/>
+                </a:solidFill>
+                <a:latin typeface="Space Grotesk"/>
+              </a:rPr>
+              <a:t>WHAT WE NEED</a:t>
+            </a:r>
+          </a:p>
+          <a:p>
+            <a:pPr algn="l">
+              <a:spcAft>
+                <a:spcPts val="600"/>
+              </a:spcAft>
+            </a:pPr>
+            <a:r>
+              <a:rPr sz="1700" b="0">
+                <a:solidFill>
+                  <a:srgbClr val="EDF2F7"/>
+                </a:solidFill>
+                <a:latin typeface="Inter"/>
+              </a:rPr>
+              <a:t>A signal that watches traffic, learns each intersection's rhythm, and gives green to the road that actually needs it. That is SABZ.</a:t>
             </a:r>
           </a:p>
         </p:txBody>
@@ -5459,40 +6640,16 @@
         <p:nvPr/>
       </p:nvGrpSpPr>
       <p:grpSpPr/>
-      <p:pic>
-        <p:nvPicPr>
-          <p:cNvPr id="2" name="Picture 1" descr="logo.png"/>
-          <p:cNvPicPr>
-            <a:picLocks noChangeAspect="1"/>
-          </p:cNvPicPr>
-          <p:nvPr/>
-        </p:nvPicPr>
-        <p:blipFill>
-          <a:blip r:embed="rId2"/>
-          <a:stretch>
-            <a:fillRect/>
-          </a:stretch>
-        </p:blipFill>
-        <p:spPr>
-          <a:xfrm>
-            <a:off x="502920" y="310896"/>
-            <a:ext cx="1874519" cy="666496"/>
-          </a:xfrm>
-          <a:prstGeom prst="rect">
-            <a:avLst/>
-          </a:prstGeom>
-        </p:spPr>
-      </p:pic>
-      <p:sp>
-        <p:nvSpPr>
-          <p:cNvPr id="3" name="TextBox 2"/>
+      <p:sp>
+        <p:nvSpPr>
+          <p:cNvPr id="2" name="TextBox 1"/>
           <p:cNvSpPr txBox="1"/>
           <p:nvPr/>
         </p:nvSpPr>
         <p:spPr>
           <a:xfrm>
-            <a:off x="502920" y="1207008"/>
-            <a:ext cx="11155680" cy="320040"/>
+            <a:off x="640080" y="320040"/>
+            <a:ext cx="10881360" cy="457200"/>
           </a:xfrm>
           <a:prstGeom prst="rect">
             <a:avLst/>
@@ -5500,15 +6657,15 @@
           <a:noFill/>
         </p:spPr>
         <p:txBody>
-          <a:bodyPr wrap="square" anchor="t" lIns="0" rIns="0" tIns="0" bIns="0">
+          <a:bodyPr wrap="square">
             <a:spAutoFit/>
           </a:bodyPr>
           <a:lstStyle/>
           <a:p>
             <a:pPr algn="l">
-              <a:lnSpc>
-                <a:spcPct val="112000"/>
-              </a:lnSpc>
+              <a:spcAft>
+                <a:spcPts val="600"/>
+              </a:spcAft>
             </a:pPr>
             <a:r>
               <a:rPr sz="1300" b="1">
@@ -5517,21 +6674,21 @@
                 </a:solidFill>
                 <a:latin typeface="Space Grotesk"/>
               </a:rPr>
-              <a:t>LIVE DEMO · RESULTS</a:t>
-            </a:r>
-          </a:p>
-        </p:txBody>
-      </p:sp>
-      <p:sp>
-        <p:nvSpPr>
-          <p:cNvPr id="4" name="TextBox 3"/>
+              <a:t>03  WHAT IS SABZ</a:t>
+            </a:r>
+          </a:p>
+        </p:txBody>
+      </p:sp>
+      <p:sp>
+        <p:nvSpPr>
+          <p:cNvPr id="3" name="TextBox 2"/>
           <p:cNvSpPr txBox="1"/>
           <p:nvPr/>
         </p:nvSpPr>
         <p:spPr>
           <a:xfrm>
-            <a:off x="502920" y="1536192"/>
-            <a:ext cx="11201400" cy="868680"/>
+            <a:off x="640080" y="685800"/>
+            <a:ext cx="10881360" cy="1463040"/>
           </a:xfrm>
           <a:prstGeom prst="rect">
             <a:avLst/>
@@ -5539,226 +6696,41 @@
           <a:noFill/>
         </p:spPr>
         <p:txBody>
-          <a:bodyPr wrap="square" anchor="t" lIns="0" rIns="0" tIns="0" bIns="0">
+          <a:bodyPr wrap="square">
             <a:spAutoFit/>
           </a:bodyPr>
           <a:lstStyle/>
           <a:p>
             <a:pPr algn="l">
-              <a:lnSpc>
-                <a:spcPct val="112000"/>
-              </a:lnSpc>
+              <a:spcAft>
+                <a:spcPts val="600"/>
+              </a:spcAft>
             </a:pPr>
             <a:r>
-              <a:rPr sz="3600" b="1">
+              <a:rPr sz="4000" b="1">
                 <a:solidFill>
                   <a:srgbClr val="EDF2F7"/>
                 </a:solidFill>
                 <a:latin typeface="Space Grotesk"/>
               </a:rPr>
-              <a:t>Watch it beat the fixed timer, live</a:t>
-            </a:r>
-          </a:p>
-        </p:txBody>
-      </p:sp>
-      <p:sp>
-        <p:nvSpPr>
-          <p:cNvPr id="5" name="TextBox 4"/>
-          <p:cNvSpPr txBox="1"/>
-          <p:nvPr/>
-        </p:nvSpPr>
-        <p:spPr>
-          <a:xfrm>
-            <a:off x="502920" y="2395728"/>
-            <a:ext cx="7223760" cy="960120"/>
-          </a:xfrm>
-          <a:prstGeom prst="rect">
-            <a:avLst/>
-          </a:prstGeom>
-          <a:noFill/>
-        </p:spPr>
-        <p:txBody>
-          <a:bodyPr wrap="square" anchor="t" lIns="0" rIns="0" tIns="0" bIns="0">
-            <a:spAutoFit/>
-          </a:bodyPr>
-          <a:lstStyle/>
-          <a:p>
-            <a:pPr algn="l">
-              <a:lnSpc>
-                <a:spcPct val="130000"/>
-              </a:lnSpc>
-            </a:pPr>
-            <a:r>
-              <a:rPr sz="1500" b="0">
-                <a:solidFill>
-                  <a:srgbClr val="C7D2E8"/>
-                </a:solidFill>
-                <a:latin typeface="Inter"/>
-              </a:rPr>
-              <a:t>Two identical intersections. Same rush-hour traffic, same start. One runs a blind 30-second fixed timer. The other runs the real trained SABZ brain, deciding every second, one road open at a time.</a:t>
-            </a:r>
-          </a:p>
-        </p:txBody>
-      </p:sp>
-      <p:sp>
-        <p:nvSpPr>
-          <p:cNvPr id="6" name="TextBox 5"/>
-          <p:cNvSpPr txBox="1"/>
-          <p:nvPr/>
-        </p:nvSpPr>
-        <p:spPr>
-          <a:xfrm>
-            <a:off x="502920" y="3611880"/>
-            <a:ext cx="7223760" cy="365760"/>
-          </a:xfrm>
-          <a:prstGeom prst="rect">
-            <a:avLst/>
-          </a:prstGeom>
-          <a:noFill/>
-        </p:spPr>
-        <p:txBody>
-          <a:bodyPr wrap="square" anchor="t" lIns="0" rIns="0" tIns="0" bIns="0">
-            <a:spAutoFit/>
-          </a:bodyPr>
-          <a:lstStyle/>
-          <a:p>
-            <a:pPr algn="l">
-              <a:lnSpc>
-                <a:spcPct val="118000"/>
-              </a:lnSpc>
-            </a:pPr>
-            <a:r>
-              <a:rPr sz="1450" b="1">
-                <a:solidFill>
-                  <a:srgbClr val="00E676"/>
-                </a:solidFill>
-                <a:latin typeface="Inter"/>
-              </a:rPr>
-              <a:t>•  </a:t>
-            </a:r>
-            <a:r>
-              <a:rPr sz="1450" b="0">
-                <a:solidFill>
-                  <a:srgbClr val="EDF2F7"/>
-                </a:solidFill>
-                <a:latin typeface="Inter"/>
-              </a:rPr>
-              <a:t>Identical traffic generated live on both sides</a:t>
-            </a:r>
-          </a:p>
-        </p:txBody>
-      </p:sp>
-      <p:sp>
-        <p:nvSpPr>
-          <p:cNvPr id="7" name="TextBox 6"/>
-          <p:cNvSpPr txBox="1"/>
-          <p:nvPr/>
-        </p:nvSpPr>
-        <p:spPr>
-          <a:xfrm>
-            <a:off x="502920" y="4041648"/>
-            <a:ext cx="7223760" cy="365760"/>
-          </a:xfrm>
-          <a:prstGeom prst="rect">
-            <a:avLst/>
-          </a:prstGeom>
-          <a:noFill/>
-        </p:spPr>
-        <p:txBody>
-          <a:bodyPr wrap="square" anchor="t" lIns="0" rIns="0" tIns="0" bIns="0">
-            <a:spAutoFit/>
-          </a:bodyPr>
-          <a:lstStyle/>
-          <a:p>
-            <a:pPr algn="l">
-              <a:lnSpc>
-                <a:spcPct val="118000"/>
-              </a:lnSpc>
-            </a:pPr>
-            <a:r>
-              <a:rPr sz="1450" b="1">
-                <a:solidFill>
-                  <a:srgbClr val="00E676"/>
-                </a:solidFill>
-                <a:latin typeface="Inter"/>
-              </a:rPr>
-              <a:t>•  </a:t>
-            </a:r>
-            <a:r>
-              <a:rPr sz="1450" b="0">
-                <a:solidFill>
-                  <a:srgbClr val="EDF2F7"/>
-                </a:solidFill>
-                <a:latin typeface="Inter"/>
-              </a:rPr>
-              <a:t>Real trained weights: the same 5,506-parameter brain from our benchmarks</a:t>
-            </a:r>
-          </a:p>
-        </p:txBody>
-      </p:sp>
-      <p:sp>
-        <p:nvSpPr>
-          <p:cNvPr id="8" name="TextBox 7"/>
-          <p:cNvSpPr txBox="1"/>
-          <p:nvPr/>
-        </p:nvSpPr>
-        <p:spPr>
-          <a:xfrm>
-            <a:off x="502920" y="4471416"/>
-            <a:ext cx="7223760" cy="365760"/>
-          </a:xfrm>
-          <a:prstGeom prst="rect">
-            <a:avLst/>
-          </a:prstGeom>
-          <a:noFill/>
-        </p:spPr>
-        <p:txBody>
-          <a:bodyPr wrap="square" anchor="t" lIns="0" rIns="0" tIns="0" bIns="0">
-            <a:spAutoFit/>
-          </a:bodyPr>
-          <a:lstStyle/>
-          <a:p>
-            <a:pPr algn="l">
-              <a:lnSpc>
-                <a:spcPct val="118000"/>
-              </a:lnSpc>
-            </a:pPr>
-            <a:r>
-              <a:rPr sz="1450" b="1">
-                <a:solidFill>
-                  <a:srgbClr val="00E676"/>
-                </a:solidFill>
-                <a:latin typeface="Inter"/>
-              </a:rPr>
-              <a:t>•  </a:t>
-            </a:r>
-            <a:r>
-              <a:rPr sz="1450" b="0">
-                <a:solidFill>
-                  <a:srgbClr val="EDF2F7"/>
-                </a:solidFill>
-                <a:latin typeface="Inter"/>
-              </a:rPr>
-              <a:t>Every decision explained on screen, in English and Urdu</a:t>
-            </a:r>
-          </a:p>
-        </p:txBody>
-      </p:sp>
-      <p:sp>
-        <p:nvSpPr>
-          <p:cNvPr id="9" name="Rounded Rectangle 8"/>
+              <a:t>A closed loop: see, think, check, act.</a:t>
+            </a:r>
+          </a:p>
+        </p:txBody>
+      </p:sp>
+      <p:sp>
+        <p:nvSpPr>
+          <p:cNvPr id="4" name="Rounded Rectangle 3"/>
           <p:cNvSpPr/>
           <p:nvPr/>
         </p:nvSpPr>
         <p:spPr>
           <a:xfrm>
-            <a:off x="502920" y="5029200"/>
-            <a:ext cx="2313432" cy="1170432"/>
+            <a:off x="640080" y="2743200"/>
+            <a:ext cx="2194560" cy="1645920"/>
           </a:xfrm>
           <a:prstGeom prst="roundRect">
-            <a:avLst>
-              <a:gd name="adj" fmla="val 5500"/>
-            </a:avLst>
+            <a:avLst/>
           </a:prstGeom>
           <a:solidFill>
             <a:srgbClr val="141D33"/>
@@ -5768,7 +6740,6 @@
               <a:srgbClr val="24304D"/>
             </a:solidFill>
           </a:ln>
-          <a:effectLst/>
         </p:spPr>
         <p:style>
           <a:lnRef idx="1">
@@ -5785,106 +6756,71 @@
           </a:fontRef>
         </p:style>
         <p:txBody>
-          <a:bodyPr rtlCol="0" anchor="ctr"/>
+          <a:bodyPr rtlCol="0" anchor="ctr" wrap="square"/>
           <a:lstStyle/>
           <a:p>
             <a:pPr algn="ctr"/>
-          </a:p>
-        </p:txBody>
-      </p:sp>
-      <p:sp>
-        <p:nvSpPr>
-          <p:cNvPr id="10" name="TextBox 9"/>
-          <p:cNvSpPr txBox="1"/>
-          <p:nvPr/>
-        </p:nvSpPr>
-        <p:spPr>
-          <a:xfrm>
-            <a:off x="685800" y="5157216"/>
-            <a:ext cx="1965960" cy="457200"/>
-          </a:xfrm>
-          <a:prstGeom prst="rect">
-            <a:avLst/>
-          </a:prstGeom>
-          <a:noFill/>
-        </p:spPr>
-        <p:txBody>
-          <a:bodyPr wrap="square" anchor="t" lIns="0" rIns="0" tIns="0" bIns="0">
-            <a:spAutoFit/>
-          </a:bodyPr>
-          <a:lstStyle/>
-          <a:p>
-            <a:pPr algn="l">
-              <a:lnSpc>
-                <a:spcPct val="112000"/>
-              </a:lnSpc>
-            </a:pPr>
-            <a:r>
-              <a:rPr sz="2300" b="1">
+            <a:r>
+              <a:rPr sz="1500">
                 <a:solidFill>
-                  <a:srgbClr val="00E676"/>
-                </a:solidFill>
-                <a:latin typeface="Space Grotesk"/>
-              </a:rPr>
-              <a:t>2/3</a:t>
-            </a:r>
-          </a:p>
-        </p:txBody>
-      </p:sp>
-      <p:sp>
-        <p:nvSpPr>
-          <p:cNvPr id="11" name="TextBox 10"/>
-          <p:cNvSpPr txBox="1"/>
-          <p:nvPr/>
-        </p:nvSpPr>
-        <p:spPr>
-          <a:xfrm>
-            <a:off x="685800" y="5650992"/>
-            <a:ext cx="1965960" cy="502920"/>
-          </a:xfrm>
-          <a:prstGeom prst="rect">
-            <a:avLst/>
-          </a:prstGeom>
-          <a:noFill/>
-        </p:spPr>
-        <p:txBody>
-          <a:bodyPr wrap="square" anchor="t" lIns="0" rIns="0" tIns="0" bIns="0">
-            <a:spAutoFit/>
-          </a:bodyPr>
-          <a:lstStyle/>
-          <a:p>
-            <a:pPr algn="l">
-              <a:lnSpc>
-                <a:spcPct val="115000"/>
-              </a:lnSpc>
-            </a:pPr>
-            <a:r>
-              <a:rPr sz="1050" b="0">
-                <a:solidFill>
-                  <a:srgbClr val="93A1C0"/>
+                  <a:srgbClr val="EDF2F7"/>
                 </a:solidFill>
                 <a:latin typeface="Inter"/>
               </a:rPr>
-              <a:t>scenarios won against actuated control</a:t>
-            </a:r>
-          </a:p>
-        </p:txBody>
-      </p:sp>
-      <p:sp>
-        <p:nvSpPr>
-          <p:cNvPr id="12" name="Rounded Rectangle 11"/>
+              <a:t>1. SEE
+Cameras count cars per approach (120 m)</a:t>
+            </a:r>
+          </a:p>
+        </p:txBody>
+      </p:sp>
+      <p:cxnSp>
+        <p:nvCxnSpPr>
+          <p:cNvPr id="5" name="Connector 4"/>
+          <p:cNvCxnSpPr/>
+          <p:nvPr/>
+        </p:nvCxnSpPr>
+        <p:spPr>
+          <a:xfrm>
+            <a:off x="2834640" y="3566160"/>
+            <a:ext cx="548640" cy="0"/>
+          </a:xfrm>
+          <a:prstGeom prst="line">
+            <a:avLst/>
+          </a:prstGeom>
+          <a:ln w="31750">
+            <a:solidFill>
+              <a:srgbClr val="00E676"/>
+            </a:solidFill>
+          </a:ln>
+        </p:spPr>
+        <p:style>
+          <a:lnRef idx="2">
+            <a:schemeClr val="accent1"/>
+          </a:lnRef>
+          <a:fillRef idx="0">
+            <a:schemeClr val="accent1"/>
+          </a:fillRef>
+          <a:effectRef idx="1">
+            <a:schemeClr val="accent1"/>
+          </a:effectRef>
+          <a:fontRef idx="minor">
+            <a:schemeClr val="tx1"/>
+          </a:fontRef>
+        </p:style>
+      </p:cxnSp>
+      <p:sp>
+        <p:nvSpPr>
+          <p:cNvPr id="6" name="Rounded Rectangle 5"/>
           <p:cNvSpPr/>
           <p:nvPr/>
         </p:nvSpPr>
         <p:spPr>
           <a:xfrm>
-            <a:off x="2971800" y="5029200"/>
-            <a:ext cx="2313432" cy="1170432"/>
+            <a:off x="3383280" y="2743200"/>
+            <a:ext cx="2194560" cy="1645920"/>
           </a:xfrm>
           <a:prstGeom prst="roundRect">
-            <a:avLst>
-              <a:gd name="adj" fmla="val 5500"/>
-            </a:avLst>
+            <a:avLst/>
           </a:prstGeom>
           <a:solidFill>
             <a:srgbClr val="141D33"/>
@@ -5894,7 +6830,6 @@
               <a:srgbClr val="24304D"/>
             </a:solidFill>
           </a:ln>
-          <a:effectLst/>
         </p:spPr>
         <p:style>
           <a:lnRef idx="1">
@@ -5911,106 +6846,71 @@
           </a:fontRef>
         </p:style>
         <p:txBody>
-          <a:bodyPr rtlCol="0" anchor="ctr"/>
+          <a:bodyPr rtlCol="0" anchor="ctr" wrap="square"/>
           <a:lstStyle/>
           <a:p>
             <a:pPr algn="ctr"/>
-          </a:p>
-        </p:txBody>
-      </p:sp>
-      <p:sp>
-        <p:nvSpPr>
-          <p:cNvPr id="13" name="TextBox 12"/>
-          <p:cNvSpPr txBox="1"/>
-          <p:nvPr/>
-        </p:nvSpPr>
-        <p:spPr>
-          <a:xfrm>
-            <a:off x="3154680" y="5157216"/>
-            <a:ext cx="1965960" cy="457200"/>
-          </a:xfrm>
-          <a:prstGeom prst="rect">
-            <a:avLst/>
-          </a:prstGeom>
-          <a:noFill/>
-        </p:spPr>
-        <p:txBody>
-          <a:bodyPr wrap="square" anchor="t" lIns="0" rIns="0" tIns="0" bIns="0">
-            <a:spAutoFit/>
-          </a:bodyPr>
-          <a:lstStyle/>
-          <a:p>
-            <a:pPr algn="l">
-              <a:lnSpc>
-                <a:spcPct val="112000"/>
-              </a:lnSpc>
-            </a:pPr>
-            <a:r>
-              <a:rPr sz="2300" b="1">
+            <a:r>
+              <a:rPr sz="1500">
                 <a:solidFill>
-                  <a:srgbClr val="00E676"/>
-                </a:solidFill>
-                <a:latin typeface="Space Grotesk"/>
-              </a:rPr>
-              <a:t>7.3 s</a:t>
-            </a:r>
-          </a:p>
-        </p:txBody>
-      </p:sp>
-      <p:sp>
-        <p:nvSpPr>
-          <p:cNvPr id="14" name="TextBox 13"/>
-          <p:cNvSpPr txBox="1"/>
-          <p:nvPr/>
-        </p:nvSpPr>
-        <p:spPr>
-          <a:xfrm>
-            <a:off x="3154680" y="5650992"/>
-            <a:ext cx="1965960" cy="502920"/>
-          </a:xfrm>
-          <a:prstGeom prst="rect">
-            <a:avLst/>
-          </a:prstGeom>
-          <a:noFill/>
-        </p:spPr>
-        <p:txBody>
-          <a:bodyPr wrap="square" anchor="t" lIns="0" rIns="0" tIns="0" bIns="0">
-            <a:spAutoFit/>
-          </a:bodyPr>
-          <a:lstStyle/>
-          <a:p>
-            <a:pPr algn="l">
-              <a:lnSpc>
-                <a:spcPct val="115000"/>
-              </a:lnSpc>
-            </a:pPr>
-            <a:r>
-              <a:rPr sz="1050" b="0">
-                <a:solidFill>
-                  <a:srgbClr val="93A1C0"/>
+                  <a:srgbClr val="EDF2F7"/>
                 </a:solidFill>
                 <a:latin typeface="Inter"/>
               </a:rPr>
-              <a:t>best average delay per vehicle</a:t>
-            </a:r>
-          </a:p>
-        </p:txBody>
-      </p:sp>
-      <p:sp>
-        <p:nvSpPr>
-          <p:cNvPr id="15" name="Rounded Rectangle 14"/>
+              <a:t>2. THINK
+DQN brain picks: hold or switch</a:t>
+            </a:r>
+          </a:p>
+        </p:txBody>
+      </p:sp>
+      <p:cxnSp>
+        <p:nvCxnSpPr>
+          <p:cNvPr id="7" name="Connector 6"/>
+          <p:cNvCxnSpPr/>
+          <p:nvPr/>
+        </p:nvCxnSpPr>
+        <p:spPr>
+          <a:xfrm>
+            <a:off x="5577840" y="3566160"/>
+            <a:ext cx="548640" cy="0"/>
+          </a:xfrm>
+          <a:prstGeom prst="line">
+            <a:avLst/>
+          </a:prstGeom>
+          <a:ln w="31750">
+            <a:solidFill>
+              <a:srgbClr val="00E676"/>
+            </a:solidFill>
+          </a:ln>
+        </p:spPr>
+        <p:style>
+          <a:lnRef idx="2">
+            <a:schemeClr val="accent1"/>
+          </a:lnRef>
+          <a:fillRef idx="0">
+            <a:schemeClr val="accent1"/>
+          </a:fillRef>
+          <a:effectRef idx="1">
+            <a:schemeClr val="accent1"/>
+          </a:effectRef>
+          <a:fontRef idx="minor">
+            <a:schemeClr val="tx1"/>
+          </a:fontRef>
+        </p:style>
+      </p:cxnSp>
+      <p:sp>
+        <p:nvSpPr>
+          <p:cNvPr id="8" name="Rounded Rectangle 7"/>
           <p:cNvSpPr/>
           <p:nvPr/>
         </p:nvSpPr>
         <p:spPr>
           <a:xfrm>
-            <a:off x="5440680" y="5029200"/>
-            <a:ext cx="2313432" cy="1170432"/>
+            <a:off x="6126480" y="2743200"/>
+            <a:ext cx="2194560" cy="1645920"/>
           </a:xfrm>
           <a:prstGeom prst="roundRect">
-            <a:avLst>
-              <a:gd name="adj" fmla="val 5500"/>
-            </a:avLst>
+            <a:avLst/>
           </a:prstGeom>
           <a:solidFill>
             <a:srgbClr val="141D33"/>
@@ -6020,7 +6920,6 @@
               <a:srgbClr val="24304D"/>
             </a:solidFill>
           </a:ln>
-          <a:effectLst/>
         </p:spPr>
         <p:style>
           <a:lnRef idx="1">
@@ -6037,106 +6936,71 @@
           </a:fontRef>
         </p:style>
         <p:txBody>
-          <a:bodyPr rtlCol="0" anchor="ctr"/>
+          <a:bodyPr rtlCol="0" anchor="ctr" wrap="square"/>
           <a:lstStyle/>
           <a:p>
             <a:pPr algn="ctr"/>
-          </a:p>
-        </p:txBody>
-      </p:sp>
-      <p:sp>
-        <p:nvSpPr>
-          <p:cNvPr id="16" name="TextBox 15"/>
-          <p:cNvSpPr txBox="1"/>
-          <p:nvPr/>
-        </p:nvSpPr>
-        <p:spPr>
-          <a:xfrm>
-            <a:off x="5623560" y="5157216"/>
-            <a:ext cx="1965960" cy="457200"/>
-          </a:xfrm>
-          <a:prstGeom prst="rect">
-            <a:avLst/>
-          </a:prstGeom>
-          <a:noFill/>
-        </p:spPr>
-        <p:txBody>
-          <a:bodyPr wrap="square" anchor="t" lIns="0" rIns="0" tIns="0" bIns="0">
-            <a:spAutoFit/>
-          </a:bodyPr>
-          <a:lstStyle/>
-          <a:p>
-            <a:pPr algn="l">
-              <a:lnSpc>
-                <a:spcPct val="112000"/>
-              </a:lnSpc>
-            </a:pPr>
-            <a:r>
-              <a:rPr sz="2300" b="1">
+            <a:r>
+              <a:rPr sz="1500">
                 <a:solidFill>
-                  <a:srgbClr val="00E676"/>
-                </a:solidFill>
-                <a:latin typeface="Space Grotesk"/>
-              </a:rPr>
-              <a:t>47%</a:t>
-            </a:r>
-          </a:p>
-        </p:txBody>
-      </p:sp>
-      <p:sp>
-        <p:nvSpPr>
-          <p:cNvPr id="17" name="TextBox 16"/>
-          <p:cNvSpPr txBox="1"/>
-          <p:nvPr/>
-        </p:nvSpPr>
-        <p:spPr>
-          <a:xfrm>
-            <a:off x="5623560" y="5650992"/>
-            <a:ext cx="1965960" cy="502920"/>
-          </a:xfrm>
-          <a:prstGeom prst="rect">
-            <a:avLst/>
-          </a:prstGeom>
-          <a:noFill/>
-        </p:spPr>
-        <p:txBody>
-          <a:bodyPr wrap="square" anchor="t" lIns="0" rIns="0" tIns="0" bIns="0">
-            <a:spAutoFit/>
-          </a:bodyPr>
-          <a:lstStyle/>
-          <a:p>
-            <a:pPr algn="l">
-              <a:lnSpc>
-                <a:spcPct val="115000"/>
-              </a:lnSpc>
-            </a:pPr>
-            <a:r>
-              <a:rPr sz="1050" b="0">
-                <a:solidFill>
-                  <a:srgbClr val="93A1C0"/>
+                  <a:srgbClr val="EDF2F7"/>
                 </a:solidFill>
                 <a:latin typeface="Inter"/>
               </a:rPr>
-              <a:t>less delay in the best live battle</a:t>
-            </a:r>
-          </a:p>
-        </p:txBody>
-      </p:sp>
-      <p:sp>
-        <p:nvSpPr>
-          <p:cNvPr id="18" name="Rounded Rectangle 17"/>
+              <a:t>3. CHECK
+Safety veto: 70 m dilemma zone</a:t>
+            </a:r>
+          </a:p>
+        </p:txBody>
+      </p:sp>
+      <p:cxnSp>
+        <p:nvCxnSpPr>
+          <p:cNvPr id="9" name="Connector 8"/>
+          <p:cNvCxnSpPr/>
+          <p:nvPr/>
+        </p:nvCxnSpPr>
+        <p:spPr>
+          <a:xfrm>
+            <a:off x="8321040" y="3566160"/>
+            <a:ext cx="548640" cy="0"/>
+          </a:xfrm>
+          <a:prstGeom prst="line">
+            <a:avLst/>
+          </a:prstGeom>
+          <a:ln w="31750">
+            <a:solidFill>
+              <a:srgbClr val="00E676"/>
+            </a:solidFill>
+          </a:ln>
+        </p:spPr>
+        <p:style>
+          <a:lnRef idx="2">
+            <a:schemeClr val="accent1"/>
+          </a:lnRef>
+          <a:fillRef idx="0">
+            <a:schemeClr val="accent1"/>
+          </a:fillRef>
+          <a:effectRef idx="1">
+            <a:schemeClr val="accent1"/>
+          </a:effectRef>
+          <a:fontRef idx="minor">
+            <a:schemeClr val="tx1"/>
+          </a:fontRef>
+        </p:style>
+      </p:cxnSp>
+      <p:sp>
+        <p:nvSpPr>
+          <p:cNvPr id="10" name="Rounded Rectangle 9"/>
           <p:cNvSpPr/>
           <p:nvPr/>
         </p:nvSpPr>
         <p:spPr>
           <a:xfrm>
-            <a:off x="8092440" y="2395728"/>
-            <a:ext cx="3593592" cy="3803904"/>
+            <a:off x="8869680" y="2743200"/>
+            <a:ext cx="2651760" cy="1645920"/>
           </a:xfrm>
           <a:prstGeom prst="roundRect">
-            <a:avLst>
-              <a:gd name="adj" fmla="val 5500"/>
-            </a:avLst>
+            <a:avLst/>
           </a:prstGeom>
           <a:solidFill>
             <a:srgbClr val="141D33"/>
@@ -6146,7 +7010,6 @@
               <a:srgbClr val="24304D"/>
             </a:solidFill>
           </a:ln>
-          <a:effectLst/>
         </p:spPr>
         <p:style>
           <a:lnRef idx="1">
@@ -6163,36 +7026,188 @@
           </a:fontRef>
         </p:style>
         <p:txBody>
-          <a:bodyPr rtlCol="0" anchor="ctr"/>
+          <a:bodyPr rtlCol="0" anchor="ctr" wrap="square"/>
           <a:lstStyle/>
           <a:p>
             <a:pPr algn="ctr"/>
-          </a:p>
-        </p:txBody>
-      </p:sp>
-      <p:sp>
-        <p:nvSpPr>
-          <p:cNvPr id="19" name="Rounded Rectangle 18"/>
+            <a:r>
+              <a:rPr sz="1500">
+                <a:solidFill>
+                  <a:srgbClr val="EDF2F7"/>
+                </a:solidFill>
+                <a:latin typeface="Inter"/>
+              </a:rPr>
+              <a:t>4. ACT
+Signal switches or holds</a:t>
+            </a:r>
+          </a:p>
+        </p:txBody>
+      </p:sp>
+      <p:sp>
+        <p:nvSpPr>
+          <p:cNvPr id="11" name="TextBox 10"/>
+          <p:cNvSpPr txBox="1"/>
+          <p:nvPr/>
+        </p:nvSpPr>
+        <p:spPr>
+          <a:xfrm>
+            <a:off x="640080" y="4937760"/>
+            <a:ext cx="10881360" cy="1097280"/>
+          </a:xfrm>
+          <a:prstGeom prst="rect">
+            <a:avLst/>
+          </a:prstGeom>
+          <a:noFill/>
+        </p:spPr>
+        <p:txBody>
+          <a:bodyPr wrap="square">
+            <a:spAutoFit/>
+          </a:bodyPr>
+          <a:lstStyle/>
+          <a:p>
+            <a:pPr algn="ctr">
+              <a:spcAft>
+                <a:spcPts val="600"/>
+              </a:spcAft>
+            </a:pPr>
+            <a:r>
+              <a:rPr sz="1800" b="0">
+                <a:solidFill>
+                  <a:srgbClr val="93A1C0"/>
+                </a:solidFill>
+                <a:latin typeface="Inter"/>
+              </a:rPr>
+              <a:t>The loop repeats every second. The brain is 5,506 parameters, decides in 0.02 ms on CPU, and the safety check sits outside the network where no training can touch it.</a:t>
+            </a:r>
+          </a:p>
+        </p:txBody>
+      </p:sp>
+    </p:spTree>
+  </p:cSld>
+  <p:clrMapOvr>
+    <a:masterClrMapping/>
+  </p:clrMapOvr>
+</p:sld>
+</file>
+
+<file path=ppt/slides/slide5.xml><?xml version="1.0" encoding="utf-8"?>
+<p:sld xmlns:a="http://schemas.openxmlformats.org/drawingml/2006/main" xmlns:p="http://schemas.openxmlformats.org/presentationml/2006/main" xmlns:r="http://schemas.openxmlformats.org/officeDocument/2006/relationships">
+  <p:cSld>
+    <p:bg>
+      <p:bgPr>
+        <a:solidFill>
+          <a:srgbClr val="0B1220"/>
+        </a:solidFill>
+        <a:effectLst/>
+      </p:bgPr>
+    </p:bg>
+    <p:spTree>
+      <p:nvGrpSpPr>
+        <p:cNvPr id="1" name=""/>
+        <p:cNvGrpSpPr/>
+        <p:nvPr/>
+      </p:nvGrpSpPr>
+      <p:grpSpPr/>
+      <p:sp>
+        <p:nvSpPr>
+          <p:cNvPr id="2" name="TextBox 1"/>
+          <p:cNvSpPr txBox="1"/>
+          <p:nvPr/>
+        </p:nvSpPr>
+        <p:spPr>
+          <a:xfrm>
+            <a:off x="640080" y="320040"/>
+            <a:ext cx="10881360" cy="457200"/>
+          </a:xfrm>
+          <a:prstGeom prst="rect">
+            <a:avLst/>
+          </a:prstGeom>
+          <a:noFill/>
+        </p:spPr>
+        <p:txBody>
+          <a:bodyPr wrap="square">
+            <a:spAutoFit/>
+          </a:bodyPr>
+          <a:lstStyle/>
+          <a:p>
+            <a:pPr algn="l">
+              <a:spcAft>
+                <a:spcPts val="600"/>
+              </a:spcAft>
+            </a:pPr>
+            <a:r>
+              <a:rPr sz="1300" b="1">
+                <a:solidFill>
+                  <a:srgbClr val="00E676"/>
+                </a:solidFill>
+                <a:latin typeface="Space Grotesk"/>
+              </a:rPr>
+              <a:t>04  THE AI BRAIN</a:t>
+            </a:r>
+          </a:p>
+        </p:txBody>
+      </p:sp>
+      <p:sp>
+        <p:nvSpPr>
+          <p:cNvPr id="3" name="TextBox 2"/>
+          <p:cNvSpPr txBox="1"/>
+          <p:nvPr/>
+        </p:nvSpPr>
+        <p:spPr>
+          <a:xfrm>
+            <a:off x="640080" y="685800"/>
+            <a:ext cx="10881360" cy="1463040"/>
+          </a:xfrm>
+          <a:prstGeom prst="rect">
+            <a:avLst/>
+          </a:prstGeom>
+          <a:noFill/>
+        </p:spPr>
+        <p:txBody>
+          <a:bodyPr wrap="square">
+            <a:spAutoFit/>
+          </a:bodyPr>
+          <a:lstStyle/>
+          <a:p>
+            <a:pPr algn="l">
+              <a:spcAft>
+                <a:spcPts val="600"/>
+              </a:spcAft>
+            </a:pPr>
+            <a:r>
+              <a:rPr sz="4000" b="1">
+                <a:solidFill>
+                  <a:srgbClr val="EDF2F7"/>
+                </a:solidFill>
+                <a:latin typeface="Space Grotesk"/>
+              </a:rPr>
+              <a:t>A Deep Q-Network, written from scratch.</a:t>
+            </a:r>
+          </a:p>
+        </p:txBody>
+      </p:sp>
+      <p:sp>
+        <p:nvSpPr>
+          <p:cNvPr id="4" name="Rounded Rectangle 3"/>
           <p:cNvSpPr/>
           <p:nvPr/>
         </p:nvSpPr>
         <p:spPr>
           <a:xfrm>
-            <a:off x="8796528" y="2615184"/>
-            <a:ext cx="2194560" cy="2194560"/>
+            <a:off x="640080" y="2560320"/>
+            <a:ext cx="2743200" cy="2011680"/>
           </a:xfrm>
           <a:prstGeom prst="roundRect">
-            <a:avLst>
-              <a:gd name="adj" fmla="val 4500"/>
-            </a:avLst>
+            <a:avLst/>
           </a:prstGeom>
           <a:solidFill>
-            <a:srgbClr val="FFFFFF"/>
+            <a:srgbClr val="141D33"/>
           </a:solidFill>
-          <a:ln>
-            <a:noFill/>
+          <a:ln w="12700">
+            <a:solidFill>
+              <a:srgbClr val="24304D"/>
+            </a:solidFill>
           </a:ln>
-          <a:effectLst/>
         </p:spPr>
         <p:style>
           <a:lnRef idx="1">
@@ -6209,47 +7224,302 @@
           </a:fontRef>
         </p:style>
         <p:txBody>
-          <a:bodyPr rtlCol="0" anchor="ctr"/>
+          <a:bodyPr rtlCol="0" anchor="ctr" wrap="square"/>
           <a:lstStyle/>
           <a:p>
             <a:pPr algn="ctr"/>
-          </a:p>
-        </p:txBody>
-      </p:sp>
-      <p:pic>
-        <p:nvPicPr>
-          <p:cNvPr id="20" name="Picture 19" descr="demo_qr.png"/>
-          <p:cNvPicPr>
-            <a:picLocks noChangeAspect="1"/>
-          </p:cNvPicPr>
+            <a:r>
+              <a:rPr sz="1500">
+                <a:solidFill>
+                  <a:srgbClr val="EDF2F7"/>
+                </a:solidFill>
+                <a:latin typeface="Inter"/>
+              </a:rPr>
+              <a:t>STATE (18)
+queues, approaching cars, phase, green time, location, starvation</a:t>
+            </a:r>
+          </a:p>
+        </p:txBody>
+      </p:sp>
+      <p:cxnSp>
+        <p:nvCxnSpPr>
+          <p:cNvPr id="5" name="Connector 4"/>
+          <p:cNvCxnSpPr/>
           <p:nvPr/>
-        </p:nvPicPr>
-        <p:blipFill>
-          <a:blip r:embed="rId3"/>
-          <a:stretch>
-            <a:fillRect/>
-          </a:stretch>
-        </p:blipFill>
-        <p:spPr>
-          <a:xfrm>
-            <a:off x="8887968" y="2706624"/>
-            <a:ext cx="2011680" cy="2011680"/>
-          </a:xfrm>
-          <a:prstGeom prst="rect">
+        </p:nvCxnSpPr>
+        <p:spPr>
+          <a:xfrm>
+            <a:off x="3383280" y="3566160"/>
+            <a:ext cx="548640" cy="0"/>
+          </a:xfrm>
+          <a:prstGeom prst="line">
             <a:avLst/>
           </a:prstGeom>
-        </p:spPr>
-      </p:pic>
-      <p:sp>
-        <p:nvSpPr>
-          <p:cNvPr id="21" name="TextBox 20"/>
+          <a:ln w="31750">
+            <a:solidFill>
+              <a:srgbClr val="00E676"/>
+            </a:solidFill>
+          </a:ln>
+        </p:spPr>
+        <p:style>
+          <a:lnRef idx="2">
+            <a:schemeClr val="accent1"/>
+          </a:lnRef>
+          <a:fillRef idx="0">
+            <a:schemeClr val="accent1"/>
+          </a:fillRef>
+          <a:effectRef idx="1">
+            <a:schemeClr val="accent1"/>
+          </a:effectRef>
+          <a:fontRef idx="minor">
+            <a:schemeClr val="tx1"/>
+          </a:fontRef>
+        </p:style>
+      </p:cxnSp>
+      <p:sp>
+        <p:nvSpPr>
+          <p:cNvPr id="6" name="Rounded Rectangle 5"/>
+          <p:cNvSpPr/>
+          <p:nvPr/>
+        </p:nvSpPr>
+        <p:spPr>
+          <a:xfrm>
+            <a:off x="3931920" y="2560320"/>
+            <a:ext cx="2011680" cy="2011680"/>
+          </a:xfrm>
+          <a:prstGeom prst="roundRect">
+            <a:avLst/>
+          </a:prstGeom>
+          <a:solidFill>
+            <a:srgbClr val="141D33"/>
+          </a:solidFill>
+          <a:ln w="12700">
+            <a:solidFill>
+              <a:srgbClr val="24304D"/>
+            </a:solidFill>
+          </a:ln>
+        </p:spPr>
+        <p:style>
+          <a:lnRef idx="1">
+            <a:schemeClr val="accent1"/>
+          </a:lnRef>
+          <a:fillRef idx="3">
+            <a:schemeClr val="accent1"/>
+          </a:fillRef>
+          <a:effectRef idx="2">
+            <a:schemeClr val="accent1"/>
+          </a:effectRef>
+          <a:fontRef idx="minor">
+            <a:schemeClr val="lt1"/>
+          </a:fontRef>
+        </p:style>
+        <p:txBody>
+          <a:bodyPr rtlCol="0" anchor="ctr" wrap="square"/>
+          <a:lstStyle/>
+          <a:p>
+            <a:pPr algn="ctr"/>
+            <a:r>
+              <a:rPr sz="1500">
+                <a:solidFill>
+                  <a:srgbClr val="EDF2F7"/>
+                </a:solidFill>
+                <a:latin typeface="Inter"/>
+              </a:rPr>
+              <a:t>64 ReLU</a:t>
+            </a:r>
+          </a:p>
+        </p:txBody>
+      </p:sp>
+      <p:cxnSp>
+        <p:nvCxnSpPr>
+          <p:cNvPr id="7" name="Connector 6"/>
+          <p:cNvCxnSpPr/>
+          <p:nvPr/>
+        </p:nvCxnSpPr>
+        <p:spPr>
+          <a:xfrm>
+            <a:off x="5943600" y="3566160"/>
+            <a:ext cx="548640" cy="0"/>
+          </a:xfrm>
+          <a:prstGeom prst="line">
+            <a:avLst/>
+          </a:prstGeom>
+          <a:ln w="31750">
+            <a:solidFill>
+              <a:srgbClr val="00E676"/>
+            </a:solidFill>
+          </a:ln>
+        </p:spPr>
+        <p:style>
+          <a:lnRef idx="2">
+            <a:schemeClr val="accent1"/>
+          </a:lnRef>
+          <a:fillRef idx="0">
+            <a:schemeClr val="accent1"/>
+          </a:fillRef>
+          <a:effectRef idx="1">
+            <a:schemeClr val="accent1"/>
+          </a:effectRef>
+          <a:fontRef idx="minor">
+            <a:schemeClr val="tx1"/>
+          </a:fontRef>
+        </p:style>
+      </p:cxnSp>
+      <p:sp>
+        <p:nvSpPr>
+          <p:cNvPr id="8" name="Rounded Rectangle 7"/>
+          <p:cNvSpPr/>
+          <p:nvPr/>
+        </p:nvSpPr>
+        <p:spPr>
+          <a:xfrm>
+            <a:off x="6492240" y="2560320"/>
+            <a:ext cx="2011680" cy="2011680"/>
+          </a:xfrm>
+          <a:prstGeom prst="roundRect">
+            <a:avLst/>
+          </a:prstGeom>
+          <a:solidFill>
+            <a:srgbClr val="141D33"/>
+          </a:solidFill>
+          <a:ln w="12700">
+            <a:solidFill>
+              <a:srgbClr val="24304D"/>
+            </a:solidFill>
+          </a:ln>
+        </p:spPr>
+        <p:style>
+          <a:lnRef idx="1">
+            <a:schemeClr val="accent1"/>
+          </a:lnRef>
+          <a:fillRef idx="3">
+            <a:schemeClr val="accent1"/>
+          </a:fillRef>
+          <a:effectRef idx="2">
+            <a:schemeClr val="accent1"/>
+          </a:effectRef>
+          <a:fontRef idx="minor">
+            <a:schemeClr val="lt1"/>
+          </a:fontRef>
+        </p:style>
+        <p:txBody>
+          <a:bodyPr rtlCol="0" anchor="ctr" wrap="square"/>
+          <a:lstStyle/>
+          <a:p>
+            <a:pPr algn="ctr"/>
+            <a:r>
+              <a:rPr sz="1500">
+                <a:solidFill>
+                  <a:srgbClr val="EDF2F7"/>
+                </a:solidFill>
+                <a:latin typeface="Inter"/>
+              </a:rPr>
+              <a:t>64 ReLU</a:t>
+            </a:r>
+          </a:p>
+        </p:txBody>
+      </p:sp>
+      <p:cxnSp>
+        <p:nvCxnSpPr>
+          <p:cNvPr id="9" name="Connector 8"/>
+          <p:cNvCxnSpPr/>
+          <p:nvPr/>
+        </p:nvCxnSpPr>
+        <p:spPr>
+          <a:xfrm>
+            <a:off x="8503920" y="3566160"/>
+            <a:ext cx="548640" cy="0"/>
+          </a:xfrm>
+          <a:prstGeom prst="line">
+            <a:avLst/>
+          </a:prstGeom>
+          <a:ln w="31750">
+            <a:solidFill>
+              <a:srgbClr val="00E676"/>
+            </a:solidFill>
+          </a:ln>
+        </p:spPr>
+        <p:style>
+          <a:lnRef idx="2">
+            <a:schemeClr val="accent1"/>
+          </a:lnRef>
+          <a:fillRef idx="0">
+            <a:schemeClr val="accent1"/>
+          </a:fillRef>
+          <a:effectRef idx="1">
+            <a:schemeClr val="accent1"/>
+          </a:effectRef>
+          <a:fontRef idx="minor">
+            <a:schemeClr val="tx1"/>
+          </a:fontRef>
+        </p:style>
+      </p:cxnSp>
+      <p:sp>
+        <p:nvSpPr>
+          <p:cNvPr id="10" name="Rounded Rectangle 9"/>
+          <p:cNvSpPr/>
+          <p:nvPr/>
+        </p:nvSpPr>
+        <p:spPr>
+          <a:xfrm>
+            <a:off x="9052560" y="2560320"/>
+            <a:ext cx="2468880" cy="2011680"/>
+          </a:xfrm>
+          <a:prstGeom prst="roundRect">
+            <a:avLst/>
+          </a:prstGeom>
+          <a:solidFill>
+            <a:srgbClr val="141D33"/>
+          </a:solidFill>
+          <a:ln w="12700">
+            <a:solidFill>
+              <a:srgbClr val="24304D"/>
+            </a:solidFill>
+          </a:ln>
+        </p:spPr>
+        <p:style>
+          <a:lnRef idx="1">
+            <a:schemeClr val="accent1"/>
+          </a:lnRef>
+          <a:fillRef idx="3">
+            <a:schemeClr val="accent1"/>
+          </a:fillRef>
+          <a:effectRef idx="2">
+            <a:schemeClr val="accent1"/>
+          </a:effectRef>
+          <a:fontRef idx="minor">
+            <a:schemeClr val="lt1"/>
+          </a:fontRef>
+        </p:style>
+        <p:txBody>
+          <a:bodyPr rtlCol="0" anchor="ctr" wrap="square"/>
+          <a:lstStyle/>
+          <a:p>
+            <a:pPr algn="ctr"/>
+            <a:r>
+              <a:rPr sz="1500">
+                <a:solidFill>
+                  <a:srgbClr val="EDF2F7"/>
+                </a:solidFill>
+                <a:latin typeface="Inter"/>
+              </a:rPr>
+              <a:t>ACTION (2)
+Q(hold) vs Q(switch)
+pick the better one</a:t>
+            </a:r>
+          </a:p>
+        </p:txBody>
+      </p:sp>
+      <p:sp>
+        <p:nvSpPr>
+          <p:cNvPr id="11" name="TextBox 10"/>
           <p:cNvSpPr txBox="1"/>
           <p:nvPr/>
         </p:nvSpPr>
         <p:spPr>
           <a:xfrm>
-            <a:off x="8092440" y="4956048"/>
-            <a:ext cx="3593592" cy="320040"/>
+            <a:off x="640080" y="5029200"/>
+            <a:ext cx="10881360" cy="1371600"/>
           </a:xfrm>
           <a:prstGeom prst="rect">
             <a:avLst/>
@@ -6257,38 +7527,103 @@
           <a:noFill/>
         </p:spPr>
         <p:txBody>
-          <a:bodyPr wrap="square" anchor="t" lIns="0" rIns="0" tIns="0" bIns="0">
+          <a:bodyPr wrap="square">
             <a:spAutoFit/>
           </a:bodyPr>
           <a:lstStyle/>
           <a:p>
             <a:pPr algn="ctr">
-              <a:lnSpc>
-                <a:spcPct val="112000"/>
-              </a:lnSpc>
+              <a:spcAft>
+                <a:spcPts val="600"/>
+              </a:spcAft>
             </a:pPr>
             <a:r>
-              <a:rPr sz="1350" b="1">
+              <a:rPr sz="1800" b="0">
+                <a:solidFill>
+                  <a:srgbClr val="93A1C0"/>
+                </a:solidFill>
+                <a:latin typeface="Inter"/>
+              </a:rPr>
+              <a:t>Reward = negative total queue every second. Every car-second of waiting is felt, so the brain learns to minimize delay directly. Custom NumPy, Double DQN, prioritized replay. No PyTorch, no borrowed model.</a:t>
+            </a:r>
+          </a:p>
+        </p:txBody>
+      </p:sp>
+    </p:spTree>
+  </p:cSld>
+  <p:clrMapOvr>
+    <a:masterClrMapping/>
+  </p:clrMapOvr>
+</p:sld>
+</file>
+
+<file path=ppt/slides/slide6.xml><?xml version="1.0" encoding="utf-8"?>
+<p:sld xmlns:a="http://schemas.openxmlformats.org/drawingml/2006/main" xmlns:p="http://schemas.openxmlformats.org/presentationml/2006/main" xmlns:r="http://schemas.openxmlformats.org/officeDocument/2006/relationships">
+  <p:cSld>
+    <p:bg>
+      <p:bgPr>
+        <a:solidFill>
+          <a:srgbClr val="0B1220"/>
+        </a:solidFill>
+        <a:effectLst/>
+      </p:bgPr>
+    </p:bg>
+    <p:spTree>
+      <p:nvGrpSpPr>
+        <p:cNvPr id="1" name=""/>
+        <p:cNvGrpSpPr/>
+        <p:nvPr/>
+      </p:nvGrpSpPr>
+      <p:grpSpPr/>
+      <p:sp>
+        <p:nvSpPr>
+          <p:cNvPr id="2" name="TextBox 1"/>
+          <p:cNvSpPr txBox="1"/>
+          <p:nvPr/>
+        </p:nvSpPr>
+        <p:spPr>
+          <a:xfrm>
+            <a:off x="640080" y="320040"/>
+            <a:ext cx="10881360" cy="457200"/>
+          </a:xfrm>
+          <a:prstGeom prst="rect">
+            <a:avLst/>
+          </a:prstGeom>
+          <a:noFill/>
+        </p:spPr>
+        <p:txBody>
+          <a:bodyPr wrap="square">
+            <a:spAutoFit/>
+          </a:bodyPr>
+          <a:lstStyle/>
+          <a:p>
+            <a:pPr algn="l">
+              <a:spcAft>
+                <a:spcPts val="600"/>
+              </a:spcAft>
+            </a:pPr>
+            <a:r>
+              <a:rPr sz="1300" b="1">
                 <a:solidFill>
                   <a:srgbClr val="00E676"/>
                 </a:solidFill>
                 <a:latin typeface="Space Grotesk"/>
               </a:rPr>
-              <a:t>SCAN FOR THE LIVE DEMO</a:t>
-            </a:r>
-          </a:p>
-        </p:txBody>
-      </p:sp>
-      <p:sp>
-        <p:nvSpPr>
-          <p:cNvPr id="22" name="TextBox 21"/>
+              <a:t>05  SAFETY</a:t>
+            </a:r>
+          </a:p>
+        </p:txBody>
+      </p:sp>
+      <p:sp>
+        <p:nvSpPr>
+          <p:cNvPr id="3" name="TextBox 2"/>
           <p:cNvSpPr txBox="1"/>
           <p:nvPr/>
         </p:nvSpPr>
         <p:spPr>
           <a:xfrm>
-            <a:off x="8275320" y="5303520"/>
-            <a:ext cx="3227832" cy="548640"/>
+            <a:off x="640080" y="685800"/>
+            <a:ext cx="10881360" cy="1463040"/>
           </a:xfrm>
           <a:prstGeom prst="rect">
             <a:avLst/>
@@ -6296,38 +7631,295 @@
           <a:noFill/>
         </p:spPr>
         <p:txBody>
-          <a:bodyPr wrap="square" anchor="t" lIns="0" rIns="0" tIns="0" bIns="0">
+          <a:bodyPr wrap="square">
             <a:spAutoFit/>
           </a:bodyPr>
           <a:lstStyle/>
           <a:p>
-            <a:pPr algn="ctr">
-              <a:lnSpc>
-                <a:spcPct val="125000"/>
-              </a:lnSpc>
+            <a:pPr algn="l">
+              <a:spcAft>
+                <a:spcPts val="600"/>
+              </a:spcAft>
             </a:pPr>
             <a:r>
-              <a:rPr sz="1150" b="0">
+              <a:rPr sz="4000" b="1">
+                <a:solidFill>
+                  <a:srgbClr val="EDF2F7"/>
+                </a:solidFill>
+                <a:latin typeface="Space Grotesk"/>
+              </a:rPr>
+              <a:t>The brain proposes. Physics disposes.</a:t>
+            </a:r>
+          </a:p>
+        </p:txBody>
+      </p:sp>
+      <p:sp>
+        <p:nvSpPr>
+          <p:cNvPr id="4" name="TextBox 3"/>
+          <p:cNvSpPr txBox="1"/>
+          <p:nvPr/>
+        </p:nvSpPr>
+        <p:spPr>
+          <a:xfrm>
+            <a:off x="640080" y="2194560"/>
+            <a:ext cx="10881360" cy="4206240"/>
+          </a:xfrm>
+          <a:prstGeom prst="rect">
+            <a:avLst/>
+          </a:prstGeom>
+          <a:noFill/>
+        </p:spPr>
+        <p:txBody>
+          <a:bodyPr wrap="square">
+            <a:spAutoFit/>
+          </a:bodyPr>
+          <a:lstStyle/>
+          <a:p>
+            <a:pPr algn="l">
+              <a:spcAft>
+                <a:spcPts val="600"/>
+              </a:spcAft>
+            </a:pPr>
+            <a:r>
+              <a:rPr sz="2000" b="1">
+                <a:solidFill>
+                  <a:srgbClr val="EDF2F7"/>
+                </a:solidFill>
+                <a:latin typeface="Inter"/>
+              </a:rPr>
+              <a:t>Hard rule, outside the neural network, unchangeable by training:</a:t>
+            </a:r>
+          </a:p>
+          <a:p>
+            <a:pPr algn="l">
+              <a:spcAft>
+                <a:spcPts val="600"/>
+              </a:spcAft>
+            </a:pPr>
+            <a:r>
+              <a:rPr sz="2000" b="0">
+                <a:solidFill>
+                  <a:srgbClr val="EDF2F7"/>
+                </a:solidFill>
+                <a:latin typeface="Inter"/>
+              </a:rPr>
+              <a:t>Every second, before any switch executes, the system scans the 70-metre dilemma zone on the green approaches. If any car is inside it, the switch is vetoed and green extends (up to 60 s max). Then 3 s yellow + 2 s all-red clearance.</a:t>
+            </a:r>
+          </a:p>
+          <a:p>
+            <a:pPr algn="l">
+              <a:spcAft>
+                <a:spcPts val="600"/>
+              </a:spcAft>
+            </a:pPr>
+            <a:r>
+              <a:rPr sz="2000" b="0">
+                <a:solidFill>
+                  <a:srgbClr val="00E676"/>
+                </a:solidFill>
+                <a:latin typeface="Inter"/>
+              </a:rPr>
+              <a:t>With safety on, executed violations are zero by construction, and every attempted unsafe switch is logged. The AI can never learn an unsafe cutoff, because the cutoff is not its decision to make.</a:t>
+            </a:r>
+          </a:p>
+        </p:txBody>
+      </p:sp>
+    </p:spTree>
+  </p:cSld>
+  <p:clrMapOvr>
+    <a:masterClrMapping/>
+  </p:clrMapOvr>
+</p:sld>
+</file>
+
+<file path=ppt/slides/slide7.xml><?xml version="1.0" encoding="utf-8"?>
+<p:sld xmlns:a="http://schemas.openxmlformats.org/drawingml/2006/main" xmlns:p="http://schemas.openxmlformats.org/presentationml/2006/main" xmlns:r="http://schemas.openxmlformats.org/officeDocument/2006/relationships">
+  <p:cSld>
+    <p:bg>
+      <p:bgPr>
+        <a:solidFill>
+          <a:srgbClr val="0B1220"/>
+        </a:solidFill>
+        <a:effectLst/>
+      </p:bgPr>
+    </p:bg>
+    <p:spTree>
+      <p:nvGrpSpPr>
+        <p:cNvPr id="1" name=""/>
+        <p:cNvGrpSpPr/>
+        <p:nvPr/>
+      </p:nvGrpSpPr>
+      <p:grpSpPr/>
+      <p:sp>
+        <p:nvSpPr>
+          <p:cNvPr id="2" name="TextBox 1"/>
+          <p:cNvSpPr txBox="1"/>
+          <p:nvPr/>
+        </p:nvSpPr>
+        <p:spPr>
+          <a:xfrm>
+            <a:off x="640080" y="320040"/>
+            <a:ext cx="10881360" cy="457200"/>
+          </a:xfrm>
+          <a:prstGeom prst="rect">
+            <a:avLst/>
+          </a:prstGeom>
+          <a:noFill/>
+        </p:spPr>
+        <p:txBody>
+          <a:bodyPr wrap="square">
+            <a:spAutoFit/>
+          </a:bodyPr>
+          <a:lstStyle/>
+          <a:p>
+            <a:pPr algn="l">
+              <a:spcAft>
+                <a:spcPts val="600"/>
+              </a:spcAft>
+            </a:pPr>
+            <a:r>
+              <a:rPr sz="1300" b="1">
+                <a:solidFill>
+                  <a:srgbClr val="00E676"/>
+                </a:solidFill>
+                <a:latin typeface="Space Grotesk"/>
+              </a:rPr>
+              <a:t>06  REAL DATA, HONESTLY STATED</a:t>
+            </a:r>
+          </a:p>
+        </p:txBody>
+      </p:sp>
+      <p:sp>
+        <p:nvSpPr>
+          <p:cNvPr id="3" name="TextBox 2"/>
+          <p:cNvSpPr txBox="1"/>
+          <p:nvPr/>
+        </p:nvSpPr>
+        <p:spPr>
+          <a:xfrm>
+            <a:off x="640080" y="685800"/>
+            <a:ext cx="10881360" cy="1463040"/>
+          </a:xfrm>
+          <a:prstGeom prst="rect">
+            <a:avLst/>
+          </a:prstGeom>
+          <a:noFill/>
+        </p:spPr>
+        <p:txBody>
+          <a:bodyPr wrap="square">
+            <a:spAutoFit/>
+          </a:bodyPr>
+          <a:lstStyle/>
+          <a:p>
+            <a:pPr algn="l">
+              <a:spcAft>
+                <a:spcPts val="600"/>
+              </a:spcAft>
+            </a:pPr>
+            <a:r>
+              <a:rPr sz="4000" b="1">
+                <a:solidFill>
+                  <a:srgbClr val="EDF2F7"/>
+                </a:solidFill>
+                <a:latin typeface="Space Grotesk"/>
+              </a:rPr>
+              <a:t>Calibrated on real measurements.
+Not oversold.</a:t>
+            </a:r>
+          </a:p>
+        </p:txBody>
+      </p:sp>
+      <p:sp>
+        <p:nvSpPr>
+          <p:cNvPr id="4" name="TextBox 3"/>
+          <p:cNvSpPr txBox="1"/>
+          <p:nvPr/>
+        </p:nvSpPr>
+        <p:spPr>
+          <a:xfrm>
+            <a:off x="640080" y="2651760"/>
+            <a:ext cx="10881360" cy="3657600"/>
+          </a:xfrm>
+          <a:prstGeom prst="rect">
+            <a:avLst/>
+          </a:prstGeom>
+          <a:noFill/>
+        </p:spPr>
+        <p:txBody>
+          <a:bodyPr wrap="square">
+            <a:spAutoFit/>
+          </a:bodyPr>
+          <a:lstStyle/>
+          <a:p>
+            <a:pPr algn="l">
+              <a:spcAft>
+                <a:spcPts val="600"/>
+              </a:spcAft>
+            </a:pPr>
+            <a:r>
+              <a:rPr sz="1900" b="0">
+                <a:solidFill>
+                  <a:srgbClr val="EDF2F7"/>
+                </a:solidFill>
+                <a:latin typeface="Inter"/>
+              </a:rPr>
+              <a:t>NGSIM: 1,039,689 real vehicle records (3,209 vehicles, US-101). The simulator samples arrival gaps from the measured per-lane headway distribution, rescaled to each scenario's demand, so traffic has real burstiness instead of synthetic smoothness.</a:t>
+            </a:r>
+          </a:p>
+          <a:p>
+            <a:pPr algn="l">
+              <a:spcAft>
+                <a:spcPts val="600"/>
+              </a:spcAft>
+            </a:pPr>
+            <a:r>
+              <a:rPr sz="1900" b="0">
                 <a:solidFill>
                   <a:srgbClr val="93A1C0"/>
                 </a:solidFill>
                 <a:latin typeface="Inter"/>
               </a:rPr>
-              <a:t>Run the battle on your phone: fixed timer vs the SABZ brain.</a:t>
-            </a:r>
-          </a:p>
-        </p:txBody>
-      </p:sp>
-      <p:sp>
-        <p:nvSpPr>
-          <p:cNvPr id="23" name="TextBox 22"/>
+              <a:t>What it is: calibration data for arrival realism. What it is not: raw-trajectory training data, and not Lahore data. The camera pipeline is proven on real footage with YOLOv8 detection. The Lahore pilot is how real local data enters the system.</a:t>
+            </a:r>
+          </a:p>
+        </p:txBody>
+      </p:sp>
+    </p:spTree>
+  </p:cSld>
+  <p:clrMapOvr>
+    <a:masterClrMapping/>
+  </p:clrMapOvr>
+</p:sld>
+</file>
+
+<file path=ppt/slides/slide8.xml><?xml version="1.0" encoding="utf-8"?>
+<p:sld xmlns:a="http://schemas.openxmlformats.org/drawingml/2006/main" xmlns:p="http://schemas.openxmlformats.org/presentationml/2006/main" xmlns:r="http://schemas.openxmlformats.org/officeDocument/2006/relationships">
+  <p:cSld>
+    <p:bg>
+      <p:bgPr>
+        <a:solidFill>
+          <a:srgbClr val="0B1220"/>
+        </a:solidFill>
+        <a:effectLst/>
+      </p:bgPr>
+    </p:bg>
+    <p:spTree>
+      <p:nvGrpSpPr>
+        <p:cNvPr id="1" name=""/>
+        <p:cNvGrpSpPr/>
+        <p:nvPr/>
+      </p:nvGrpSpPr>
+      <p:grpSpPr/>
+      <p:sp>
+        <p:nvSpPr>
+          <p:cNvPr id="2" name="TextBox 1"/>
           <p:cNvSpPr txBox="1"/>
           <p:nvPr/>
         </p:nvSpPr>
         <p:spPr>
           <a:xfrm>
-            <a:off x="8092440" y="5870448"/>
-            <a:ext cx="3593592" cy="228600"/>
+            <a:off x="640080" y="320040"/>
+            <a:ext cx="10881360" cy="457200"/>
           </a:xfrm>
           <a:prstGeom prst="rect">
             <a:avLst/>
@@ -6335,38 +7927,504 @@
           <a:noFill/>
         </p:spPr>
         <p:txBody>
-          <a:bodyPr wrap="square" anchor="t" lIns="0" rIns="0" tIns="0" bIns="0">
+          <a:bodyPr wrap="square">
             <a:spAutoFit/>
           </a:bodyPr>
           <a:lstStyle/>
           <a:p>
-            <a:pPr algn="ctr">
-              <a:lnSpc>
-                <a:spcPct val="112000"/>
-              </a:lnSpc>
+            <a:pPr algn="l">
+              <a:spcAft>
+                <a:spcPts val="600"/>
+              </a:spcAft>
             </a:pPr>
             <a:r>
-              <a:rPr sz="1000" b="0">
+              <a:rPr sz="1300" b="1">
+                <a:solidFill>
+                  <a:srgbClr val="00E676"/>
+                </a:solidFill>
+                <a:latin typeface="Space Grotesk"/>
+              </a:rPr>
+              <a:t>07  RESULTS</a:t>
+            </a:r>
+          </a:p>
+        </p:txBody>
+      </p:sp>
+      <p:sp>
+        <p:nvSpPr>
+          <p:cNvPr id="3" name="TextBox 2"/>
+          <p:cNvSpPr txBox="1"/>
+          <p:nvPr/>
+        </p:nvSpPr>
+        <p:spPr>
+          <a:xfrm>
+            <a:off x="640080" y="685800"/>
+            <a:ext cx="10881360" cy="1463040"/>
+          </a:xfrm>
+          <a:prstGeom prst="rect">
+            <a:avLst/>
+          </a:prstGeom>
+          <a:noFill/>
+        </p:spPr>
+        <p:txBody>
+          <a:bodyPr wrap="square">
+            <a:spAutoFit/>
+          </a:bodyPr>
+          <a:lstStyle/>
+          <a:p>
+            <a:pPr algn="l">
+              <a:spcAft>
+                <a:spcPts val="600"/>
+              </a:spcAft>
+            </a:pPr>
+            <a:r>
+              <a:rPr sz="4000" b="1">
+                <a:solidFill>
+                  <a:srgbClr val="EDF2F7"/>
+                </a:solidFill>
+                <a:latin typeface="Space Grotesk"/>
+              </a:rPr>
+              <a:t>Benchmarked against the best hand-tuned controller.</a:t>
+            </a:r>
+          </a:p>
+        </p:txBody>
+      </p:sp>
+      <p:sp>
+        <p:nvSpPr>
+          <p:cNvPr id="4" name="TextBox 3"/>
+          <p:cNvSpPr txBox="1"/>
+          <p:nvPr/>
+        </p:nvSpPr>
+        <p:spPr>
+          <a:xfrm>
+            <a:off x="640080" y="2286000"/>
+            <a:ext cx="10881360" cy="548640"/>
+          </a:xfrm>
+          <a:prstGeom prst="rect">
+            <a:avLst/>
+          </a:prstGeom>
+          <a:noFill/>
+        </p:spPr>
+        <p:txBody>
+          <a:bodyPr wrap="square">
+            <a:spAutoFit/>
+          </a:bodyPr>
+          <a:lstStyle/>
+          <a:p>
+            <a:pPr algn="l">
+              <a:spcAft>
+                <a:spcPts val="600"/>
+              </a:spcAft>
+            </a:pPr>
+            <a:r>
+              <a:rPr sz="1700" b="0">
                 <a:solidFill>
                   <a:srgbClr val="93A1C0"/>
                 </a:solidFill>
                 <a:latin typeface="Inter"/>
               </a:rPr>
-              <a:t>github.com/pakmultilinks-dot/sabz</a:t>
-            </a:r>
-          </a:p>
-        </p:txBody>
-      </p:sp>
-      <p:sp>
-        <p:nvSpPr>
-          <p:cNvPr id="24" name="TextBox 23"/>
+              <a:t>3 scenarios x 3 seeds x 3,600 sim-seconds, safety on. Average delay per vehicle:</a:t>
+            </a:r>
+          </a:p>
+        </p:txBody>
+      </p:sp>
+      <p:graphicFrame>
+        <p:nvGraphicFramePr>
+          <p:cNvPr id="5" name="Table 4"/>
+          <p:cNvGraphicFramePr>
+            <a:graphicFrameLocks noGrp="1"/>
+          </p:cNvGraphicFramePr>
+          <p:nvPr/>
+        </p:nvGraphicFramePr>
+        <p:xfrm>
+          <a:off x="640080" y="2926080"/>
+          <a:ext cx="10881360" cy="2194560"/>
+        </p:xfrm>
+        <a:graphic>
+          <a:graphicData uri="http://schemas.openxmlformats.org/drawingml/2006/table">
+            <a:tbl>
+              <a:tblPr firstRow="1" bandRow="1">
+                <a:tableStyleId>{5C22544A-7EE6-4342-B048-85BDC9FD1C3A}</a:tableStyleId>
+              </a:tblPr>
+              <a:tblGrid>
+                <a:gridCol w="2720340"/>
+                <a:gridCol w="2720340"/>
+                <a:gridCol w="2720340"/>
+                <a:gridCol w="2720340"/>
+              </a:tblGrid>
+              <a:tr h="548640">
+                <a:tc>
+                  <a:txBody>
+                    <a:bodyPr/>
+                    <a:lstStyle/>
+                    <a:p>
+                      <a:r>
+                        <a:rPr sz="1600" b="1">
+                          <a:solidFill>
+                            <a:srgbClr val="00E676"/>
+                          </a:solidFill>
+                          <a:latin typeface="Space Grotesk"/>
+                        </a:rPr>
+                        <a:t>Scenario</a:t>
+                      </a:r>
+                    </a:p>
+                  </a:txBody>
+                  <a:tcPr>
+                    <a:solidFill>
+                      <a:srgbClr val="0B1220"/>
+                    </a:solidFill>
+                  </a:tcPr>
+                </a:tc>
+                <a:tc>
+                  <a:txBody>
+                    <a:bodyPr/>
+                    <a:lstStyle/>
+                    <a:p>
+                      <a:r>
+                        <a:rPr sz="1600" b="1">
+                          <a:solidFill>
+                            <a:srgbClr val="00E676"/>
+                          </a:solidFill>
+                          <a:latin typeface="Space Grotesk"/>
+                        </a:rPr>
+                        <a:t>Actuated</a:t>
+                      </a:r>
+                    </a:p>
+                  </a:txBody>
+                  <a:tcPr>
+                    <a:solidFill>
+                      <a:srgbClr val="0B1220"/>
+                    </a:solidFill>
+                  </a:tcPr>
+                </a:tc>
+                <a:tc>
+                  <a:txBody>
+                    <a:bodyPr/>
+                    <a:lstStyle/>
+                    <a:p>
+                      <a:r>
+                        <a:rPr sz="1600" b="1">
+                          <a:solidFill>
+                            <a:srgbClr val="00E676"/>
+                          </a:solidFill>
+                          <a:latin typeface="Space Grotesk"/>
+                        </a:rPr>
+                        <a:t>SABZ DQN</a:t>
+                      </a:r>
+                    </a:p>
+                  </a:txBody>
+                  <a:tcPr>
+                    <a:solidFill>
+                      <a:srgbClr val="0B1220"/>
+                    </a:solidFill>
+                  </a:tcPr>
+                </a:tc>
+                <a:tc>
+                  <a:txBody>
+                    <a:bodyPr/>
+                    <a:lstStyle/>
+                    <a:p>
+                      <a:r>
+                        <a:rPr sz="1600" b="1">
+                          <a:solidFill>
+                            <a:srgbClr val="00E676"/>
+                          </a:solidFill>
+                          <a:latin typeface="Space Grotesk"/>
+                        </a:rPr>
+                        <a:t>Result</a:t>
+                      </a:r>
+                    </a:p>
+                  </a:txBody>
+                  <a:tcPr>
+                    <a:solidFill>
+                      <a:srgbClr val="0B1220"/>
+                    </a:solidFill>
+                  </a:tcPr>
+                </a:tc>
+              </a:tr>
+              <a:tr h="548640">
+                <a:tc>
+                  <a:txBody>
+                    <a:bodyPr/>
+                    <a:lstStyle/>
+                    <a:p>
+                      <a:r>
+                        <a:rPr sz="1800">
+                          <a:solidFill>
+                            <a:srgbClr val="EDF2F7"/>
+                          </a:solidFill>
+                          <a:latin typeface="Inter"/>
+                        </a:rPr>
+                        <a:t>Asymmetric</a:t>
+                      </a:r>
+                    </a:p>
+                  </a:txBody>
+                  <a:tcPr>
+                    <a:solidFill>
+                      <a:srgbClr val="141D33"/>
+                    </a:solidFill>
+                  </a:tcPr>
+                </a:tc>
+                <a:tc>
+                  <a:txBody>
+                    <a:bodyPr/>
+                    <a:lstStyle/>
+                    <a:p>
+                      <a:r>
+                        <a:rPr sz="1800">
+                          <a:solidFill>
+                            <a:srgbClr val="EDF2F7"/>
+                          </a:solidFill>
+                          <a:latin typeface="Inter"/>
+                        </a:rPr>
+                        <a:t>5.0 s</a:t>
+                      </a:r>
+                    </a:p>
+                  </a:txBody>
+                  <a:tcPr>
+                    <a:solidFill>
+                      <a:srgbClr val="141D33"/>
+                    </a:solidFill>
+                  </a:tcPr>
+                </a:tc>
+                <a:tc>
+                  <a:txBody>
+                    <a:bodyPr/>
+                    <a:lstStyle/>
+                    <a:p>
+                      <a:r>
+                        <a:rPr sz="1800">
+                          <a:solidFill>
+                            <a:srgbClr val="EDF2F7"/>
+                          </a:solidFill>
+                          <a:latin typeface="Inter"/>
+                        </a:rPr>
+                        <a:t>5.0 s</a:t>
+                      </a:r>
+                    </a:p>
+                  </a:txBody>
+                  <a:tcPr>
+                    <a:solidFill>
+                      <a:srgbClr val="141D33"/>
+                    </a:solidFill>
+                  </a:tcPr>
+                </a:tc>
+                <a:tc>
+                  <a:txBody>
+                    <a:bodyPr/>
+                    <a:lstStyle/>
+                    <a:p>
+                      <a:r>
+                        <a:rPr sz="1800" b="1">
+                          <a:solidFill>
+                            <a:srgbClr val="00E676"/>
+                          </a:solidFill>
+                          <a:latin typeface="Inter"/>
+                        </a:rPr>
+                        <a:t>WIN</a:t>
+                      </a:r>
+                    </a:p>
+                  </a:txBody>
+                  <a:tcPr>
+                    <a:solidFill>
+                      <a:srgbClr val="141D33"/>
+                    </a:solidFill>
+                  </a:tcPr>
+                </a:tc>
+              </a:tr>
+              <a:tr h="548640">
+                <a:tc>
+                  <a:txBody>
+                    <a:bodyPr/>
+                    <a:lstStyle/>
+                    <a:p>
+                      <a:r>
+                        <a:rPr sz="1800">
+                          <a:solidFill>
+                            <a:srgbClr val="EDF2F7"/>
+                          </a:solidFill>
+                          <a:latin typeface="Inter"/>
+                        </a:rPr>
+                        <a:t>Balanced</a:t>
+                      </a:r>
+                    </a:p>
+                  </a:txBody>
+                  <a:tcPr>
+                    <a:solidFill>
+                      <a:srgbClr val="141D33"/>
+                    </a:solidFill>
+                  </a:tcPr>
+                </a:tc>
+                <a:tc>
+                  <a:txBody>
+                    <a:bodyPr/>
+                    <a:lstStyle/>
+                    <a:p>
+                      <a:r>
+                        <a:rPr sz="1800">
+                          <a:solidFill>
+                            <a:srgbClr val="EDF2F7"/>
+                          </a:solidFill>
+                          <a:latin typeface="Inter"/>
+                        </a:rPr>
+                        <a:t>11.9 s</a:t>
+                      </a:r>
+                    </a:p>
+                  </a:txBody>
+                  <a:tcPr>
+                    <a:solidFill>
+                      <a:srgbClr val="141D33"/>
+                    </a:solidFill>
+                  </a:tcPr>
+                </a:tc>
+                <a:tc>
+                  <a:txBody>
+                    <a:bodyPr/>
+                    <a:lstStyle/>
+                    <a:p>
+                      <a:r>
+                        <a:rPr sz="1800">
+                          <a:solidFill>
+                            <a:srgbClr val="EDF2F7"/>
+                          </a:solidFill>
+                          <a:latin typeface="Inter"/>
+                        </a:rPr>
+                        <a:t>11.9 s</a:t>
+                      </a:r>
+                    </a:p>
+                  </a:txBody>
+                  <a:tcPr>
+                    <a:solidFill>
+                      <a:srgbClr val="141D33"/>
+                    </a:solidFill>
+                  </a:tcPr>
+                </a:tc>
+                <a:tc>
+                  <a:txBody>
+                    <a:bodyPr/>
+                    <a:lstStyle/>
+                    <a:p>
+                      <a:r>
+                        <a:rPr sz="1800" b="1">
+                          <a:solidFill>
+                            <a:srgbClr val="FBBF24"/>
+                          </a:solidFill>
+                          <a:latin typeface="Inter"/>
+                        </a:rPr>
+                        <a:t>TIE (scored as loss)</a:t>
+                      </a:r>
+                    </a:p>
+                  </a:txBody>
+                  <a:tcPr>
+                    <a:solidFill>
+                      <a:srgbClr val="141D33"/>
+                    </a:solidFill>
+                  </a:tcPr>
+                </a:tc>
+              </a:tr>
+              <a:tr h="548640">
+                <a:tc>
+                  <a:txBody>
+                    <a:bodyPr/>
+                    <a:lstStyle/>
+                    <a:p>
+                      <a:r>
+                        <a:rPr sz="1800">
+                          <a:solidFill>
+                            <a:srgbClr val="EDF2F7"/>
+                          </a:solidFill>
+                          <a:latin typeface="Inter"/>
+                        </a:rPr>
+                        <a:t>School zone</a:t>
+                      </a:r>
+                    </a:p>
+                  </a:txBody>
+                  <a:tcPr>
+                    <a:solidFill>
+                      <a:srgbClr val="141D33"/>
+                    </a:solidFill>
+                  </a:tcPr>
+                </a:tc>
+                <a:tc>
+                  <a:txBody>
+                    <a:bodyPr/>
+                    <a:lstStyle/>
+                    <a:p>
+                      <a:r>
+                        <a:rPr sz="1800">
+                          <a:solidFill>
+                            <a:srgbClr val="EDF2F7"/>
+                          </a:solidFill>
+                          <a:latin typeface="Inter"/>
+                        </a:rPr>
+                        <a:t>5.3 s</a:t>
+                      </a:r>
+                    </a:p>
+                  </a:txBody>
+                  <a:tcPr>
+                    <a:solidFill>
+                      <a:srgbClr val="141D33"/>
+                    </a:solidFill>
+                  </a:tcPr>
+                </a:tc>
+                <a:tc>
+                  <a:txBody>
+                    <a:bodyPr/>
+                    <a:lstStyle/>
+                    <a:p>
+                      <a:r>
+                        <a:rPr sz="1800">
+                          <a:solidFill>
+                            <a:srgbClr val="EDF2F7"/>
+                          </a:solidFill>
+                          <a:latin typeface="Inter"/>
+                        </a:rPr>
+                        <a:t>5.0 s</a:t>
+                      </a:r>
+                    </a:p>
+                  </a:txBody>
+                  <a:tcPr>
+                    <a:solidFill>
+                      <a:srgbClr val="141D33"/>
+                    </a:solidFill>
+                  </a:tcPr>
+                </a:tc>
+                <a:tc>
+                  <a:txBody>
+                    <a:bodyPr/>
+                    <a:lstStyle/>
+                    <a:p>
+                      <a:r>
+                        <a:rPr sz="1800" b="1">
+                          <a:solidFill>
+                            <a:srgbClr val="00E676"/>
+                          </a:solidFill>
+                          <a:latin typeface="Inter"/>
+                        </a:rPr>
+                        <a:t>WIN</a:t>
+                      </a:r>
+                    </a:p>
+                  </a:txBody>
+                  <a:tcPr>
+                    <a:solidFill>
+                      <a:srgbClr val="141D33"/>
+                    </a:solidFill>
+                  </a:tcPr>
+                </a:tc>
+              </a:tr>
+            </a:tbl>
+          </a:graphicData>
+        </a:graphic>
+      </p:graphicFrame>
+      <p:sp>
+        <p:nvSpPr>
+          <p:cNvPr id="6" name="TextBox 5"/>
           <p:cNvSpPr txBox="1"/>
           <p:nvPr/>
         </p:nvSpPr>
         <p:spPr>
           <a:xfrm>
-            <a:off x="502920" y="6528816"/>
-            <a:ext cx="5486400" cy="228600"/>
+            <a:off x="640080" y="5486400"/>
+            <a:ext cx="10881360" cy="914400"/>
           </a:xfrm>
           <a:prstGeom prst="rect">
             <a:avLst/>
@@ -6374,38 +8432,64 @@
           <a:noFill/>
         </p:spPr>
         <p:txBody>
-          <a:bodyPr wrap="square" anchor="t" lIns="0" rIns="0" tIns="0" bIns="0">
+          <a:bodyPr wrap="square">
             <a:spAutoFit/>
           </a:bodyPr>
           <a:lstStyle/>
           <a:p>
-            <a:pPr algn="l">
-              <a:lnSpc>
-                <a:spcPct val="112000"/>
-              </a:lnSpc>
+            <a:pPr algn="ctr">
+              <a:spcAft>
+                <a:spcPts val="600"/>
+              </a:spcAft>
             </a:pPr>
             <a:r>
-              <a:rPr sz="950" b="0">
+              <a:rPr sz="1700" b="0">
                 <a:solidFill>
                   <a:srgbClr val="93A1C0"/>
                 </a:solidFill>
                 <a:latin typeface="Inter"/>
               </a:rPr>
-              <a:t>SABZ · AI-ADAPTIVE TRAFFIC SIGNALS</a:t>
-            </a:r>
-          </a:p>
-        </p:txBody>
-      </p:sp>
-      <p:sp>
-        <p:nvSpPr>
-          <p:cNvPr id="25" name="TextBox 24"/>
+              <a:t>Best mean benchmark delay: 7.3 s. The balanced tie is disclosed, not hidden: training continues specifically to break it.</a:t>
+            </a:r>
+          </a:p>
+        </p:txBody>
+      </p:sp>
+    </p:spTree>
+  </p:cSld>
+  <p:clrMapOvr>
+    <a:masterClrMapping/>
+  </p:clrMapOvr>
+</p:sld>
+</file>
+
+<file path=ppt/slides/slide9.xml><?xml version="1.0" encoding="utf-8"?>
+<p:sld xmlns:a="http://schemas.openxmlformats.org/drawingml/2006/main" xmlns:p="http://schemas.openxmlformats.org/presentationml/2006/main" xmlns:r="http://schemas.openxmlformats.org/officeDocument/2006/relationships">
+  <p:cSld>
+    <p:bg>
+      <p:bgPr>
+        <a:solidFill>
+          <a:srgbClr val="0B1220"/>
+        </a:solidFill>
+        <a:effectLst/>
+      </p:bgPr>
+    </p:bg>
+    <p:spTree>
+      <p:nvGrpSpPr>
+        <p:cNvPr id="1" name=""/>
+        <p:cNvGrpSpPr/>
+        <p:nvPr/>
+      </p:nvGrpSpPr>
+      <p:grpSpPr/>
+      <p:sp>
+        <p:nvSpPr>
+          <p:cNvPr id="2" name="TextBox 1"/>
           <p:cNvSpPr txBox="1"/>
           <p:nvPr/>
         </p:nvSpPr>
         <p:spPr>
           <a:xfrm>
-            <a:off x="11292840" y="6528816"/>
-            <a:ext cx="411480" cy="228600"/>
+            <a:off x="640080" y="320040"/>
+            <a:ext cx="10881360" cy="457200"/>
           </a:xfrm>
           <a:prstGeom prst="rect">
             <a:avLst/>
@@ -6413,24 +8497,1066 @@
           <a:noFill/>
         </p:spPr>
         <p:txBody>
-          <a:bodyPr wrap="square" anchor="t" lIns="0" rIns="0" tIns="0" bIns="0">
+          <a:bodyPr wrap="square">
             <a:spAutoFit/>
           </a:bodyPr>
           <a:lstStyle/>
           <a:p>
-            <a:pPr algn="r">
-              <a:lnSpc>
-                <a:spcPct val="112000"/>
-              </a:lnSpc>
+            <a:pPr algn="l">
+              <a:spcAft>
+                <a:spcPts val="600"/>
+              </a:spcAft>
             </a:pPr>
             <a:r>
-              <a:rPr sz="950" b="0">
+              <a:rPr sz="1300" b="1">
+                <a:solidFill>
+                  <a:srgbClr val="00E676"/>
+                </a:solidFill>
+                <a:latin typeface="Space Grotesk"/>
+              </a:rPr>
+              <a:t>08  CONTROLLER BENCHMARK</a:t>
+            </a:r>
+          </a:p>
+        </p:txBody>
+      </p:sp>
+      <p:sp>
+        <p:nvSpPr>
+          <p:cNvPr id="3" name="TextBox 2"/>
+          <p:cNvSpPr txBox="1"/>
+          <p:nvPr/>
+        </p:nvSpPr>
+        <p:spPr>
+          <a:xfrm>
+            <a:off x="640080" y="685800"/>
+            <a:ext cx="10881360" cy="1463040"/>
+          </a:xfrm>
+          <a:prstGeom prst="rect">
+            <a:avLst/>
+          </a:prstGeom>
+          <a:noFill/>
+        </p:spPr>
+        <p:txBody>
+          <a:bodyPr wrap="square">
+            <a:spAutoFit/>
+          </a:bodyPr>
+          <a:lstStyle/>
+          <a:p>
+            <a:pPr algn="l">
+              <a:spcAft>
+                <a:spcPts val="600"/>
+              </a:spcAft>
+            </a:pPr>
+            <a:r>
+              <a:rPr sz="4000" b="1">
+                <a:solidFill>
+                  <a:srgbClr val="EDF2F7"/>
+                </a:solidFill>
+                <a:latin typeface="Space Grotesk"/>
+              </a:rPr>
+              <a:t>Adaptive vs fixed timers, on identical traffic.</a:t>
+            </a:r>
+          </a:p>
+        </p:txBody>
+      </p:sp>
+      <p:sp>
+        <p:nvSpPr>
+          <p:cNvPr id="4" name="TextBox 3"/>
+          <p:cNvSpPr txBox="1"/>
+          <p:nvPr/>
+        </p:nvSpPr>
+        <p:spPr>
+          <a:xfrm>
+            <a:off x="640080" y="2148840"/>
+            <a:ext cx="10881360" cy="457200"/>
+          </a:xfrm>
+          <a:prstGeom prst="rect">
+            <a:avLst/>
+          </a:prstGeom>
+          <a:noFill/>
+        </p:spPr>
+        <p:txBody>
+          <a:bodyPr wrap="square">
+            <a:spAutoFit/>
+          </a:bodyPr>
+          <a:lstStyle/>
+          <a:p>
+            <a:pPr algn="l">
+              <a:spcAft>
+                <a:spcPts val="600"/>
+              </a:spcAft>
+            </a:pPr>
+            <a:r>
+              <a:rPr sz="1500" b="0">
                 <a:solidFill>
                   <a:srgbClr val="93A1C0"/>
                 </a:solidFill>
                 <a:latin typeface="Inter"/>
               </a:rPr>
-              <a:t>4</a:t>
+              <a:t>7 scenarios x 5 held-out seeds x 600 s, safety kernel on. Mean delay per vehicle (seconds):</a:t>
+            </a:r>
+          </a:p>
+        </p:txBody>
+      </p:sp>
+      <p:graphicFrame>
+        <p:nvGraphicFramePr>
+          <p:cNvPr id="5" name="Table 4"/>
+          <p:cNvGraphicFramePr>
+            <a:graphicFrameLocks noGrp="1"/>
+          </p:cNvGraphicFramePr>
+          <p:nvPr/>
+        </p:nvGraphicFramePr>
+        <p:xfrm>
+          <a:off x="640080" y="2697480"/>
+          <a:ext cx="10881360" cy="3291840"/>
+        </p:xfrm>
+        <a:graphic>
+          <a:graphicData uri="http://schemas.openxmlformats.org/drawingml/2006/table">
+            <a:tbl>
+              <a:tblPr firstRow="1" bandRow="1">
+                <a:tableStyleId>{5C22544A-7EE6-4342-B048-85BDC9FD1C3A}</a:tableStyleId>
+              </a:tblPr>
+              <a:tblGrid>
+                <a:gridCol w="2176272"/>
+                <a:gridCol w="2176272"/>
+                <a:gridCol w="2176272"/>
+                <a:gridCol w="2176272"/>
+                <a:gridCol w="2176272"/>
+              </a:tblGrid>
+              <a:tr h="411480">
+                <a:tc>
+                  <a:txBody>
+                    <a:bodyPr/>
+                    <a:lstStyle/>
+                    <a:p>
+                      <a:r>
+                        <a:rPr sz="1400" b="1">
+                          <a:solidFill>
+                            <a:srgbClr val="00E676"/>
+                          </a:solidFill>
+                          <a:latin typeface="Space Grotesk"/>
+                        </a:rPr>
+                        <a:t>Scenario</a:t>
+                      </a:r>
+                    </a:p>
+                  </a:txBody>
+                  <a:tcPr>
+                    <a:solidFill>
+                      <a:srgbClr val="0B1220"/>
+                    </a:solidFill>
+                  </a:tcPr>
+                </a:tc>
+                <a:tc>
+                  <a:txBody>
+                    <a:bodyPr/>
+                    <a:lstStyle/>
+                    <a:p>
+                      <a:r>
+                        <a:rPr sz="1400" b="1">
+                          <a:solidFill>
+                            <a:srgbClr val="00E676"/>
+                          </a:solidFill>
+                          <a:latin typeface="Space Grotesk"/>
+                        </a:rPr>
+                        <a:t>Fixed</a:t>
+                      </a:r>
+                    </a:p>
+                  </a:txBody>
+                  <a:tcPr>
+                    <a:solidFill>
+                      <a:srgbClr val="0B1220"/>
+                    </a:solidFill>
+                  </a:tcPr>
+                </a:tc>
+                <a:tc>
+                  <a:txBody>
+                    <a:bodyPr/>
+                    <a:lstStyle/>
+                    <a:p>
+                      <a:r>
+                        <a:rPr sz="1400" b="1">
+                          <a:solidFill>
+                            <a:srgbClr val="00E676"/>
+                          </a:solidFill>
+                          <a:latin typeface="Space Grotesk"/>
+                        </a:rPr>
+                        <a:t>Actuated</a:t>
+                      </a:r>
+                    </a:p>
+                  </a:txBody>
+                  <a:tcPr>
+                    <a:solidFill>
+                      <a:srgbClr val="0B1220"/>
+                    </a:solidFill>
+                  </a:tcPr>
+                </a:tc>
+                <a:tc>
+                  <a:txBody>
+                    <a:bodyPr/>
+                    <a:lstStyle/>
+                    <a:p>
+                      <a:r>
+                        <a:rPr sz="1400" b="1">
+                          <a:solidFill>
+                            <a:srgbClr val="00E676"/>
+                          </a:solidFill>
+                          <a:latin typeface="Space Grotesk"/>
+                        </a:rPr>
+                        <a:t>Adaptive</a:t>
+                      </a:r>
+                    </a:p>
+                  </a:txBody>
+                  <a:tcPr>
+                    <a:solidFill>
+                      <a:srgbClr val="0B1220"/>
+                    </a:solidFill>
+                  </a:tcPr>
+                </a:tc>
+                <a:tc>
+                  <a:txBody>
+                    <a:bodyPr/>
+                    <a:lstStyle/>
+                    <a:p>
+                      <a:r>
+                        <a:rPr sz="1400" b="1">
+                          <a:solidFill>
+                            <a:srgbClr val="00E676"/>
+                          </a:solidFill>
+                          <a:latin typeface="Space Grotesk"/>
+                        </a:rPr>
+                        <a:t>vs fixed</a:t>
+                      </a:r>
+                    </a:p>
+                  </a:txBody>
+                  <a:tcPr>
+                    <a:solidFill>
+                      <a:srgbClr val="0B1220"/>
+                    </a:solidFill>
+                  </a:tcPr>
+                </a:tc>
+              </a:tr>
+              <a:tr h="411480">
+                <a:tc>
+                  <a:txBody>
+                    <a:bodyPr/>
+                    <a:lstStyle/>
+                    <a:p>
+                      <a:r>
+                        <a:rPr sz="1400">
+                          <a:solidFill>
+                            <a:srgbClr val="EDF2F7"/>
+                          </a:solidFill>
+                          <a:latin typeface="Inter"/>
+                        </a:rPr>
+                        <a:t>Tidal surge</a:t>
+                      </a:r>
+                    </a:p>
+                  </a:txBody>
+                  <a:tcPr>
+                    <a:solidFill>
+                      <a:srgbClr val="141D33"/>
+                    </a:solidFill>
+                  </a:tcPr>
+                </a:tc>
+                <a:tc>
+                  <a:txBody>
+                    <a:bodyPr/>
+                    <a:lstStyle/>
+                    <a:p>
+                      <a:r>
+                        <a:rPr sz="1400">
+                          <a:solidFill>
+                            <a:srgbClr val="EDF2F7"/>
+                          </a:solidFill>
+                          <a:latin typeface="Inter"/>
+                        </a:rPr>
+                        <a:t>59.7</a:t>
+                      </a:r>
+                    </a:p>
+                  </a:txBody>
+                  <a:tcPr>
+                    <a:solidFill>
+                      <a:srgbClr val="141D33"/>
+                    </a:solidFill>
+                  </a:tcPr>
+                </a:tc>
+                <a:tc>
+                  <a:txBody>
+                    <a:bodyPr/>
+                    <a:lstStyle/>
+                    <a:p>
+                      <a:r>
+                        <a:rPr sz="1400">
+                          <a:solidFill>
+                            <a:srgbClr val="EDF2F7"/>
+                          </a:solidFill>
+                          <a:latin typeface="Inter"/>
+                        </a:rPr>
+                        <a:t>13.9</a:t>
+                      </a:r>
+                    </a:p>
+                  </a:txBody>
+                  <a:tcPr>
+                    <a:solidFill>
+                      <a:srgbClr val="141D33"/>
+                    </a:solidFill>
+                  </a:tcPr>
+                </a:tc>
+                <a:tc>
+                  <a:txBody>
+                    <a:bodyPr/>
+                    <a:lstStyle/>
+                    <a:p>
+                      <a:r>
+                        <a:rPr sz="1400">
+                          <a:solidFill>
+                            <a:srgbClr val="EDF2F7"/>
+                          </a:solidFill>
+                          <a:latin typeface="Inter"/>
+                        </a:rPr>
+                        <a:t>16.2</a:t>
+                      </a:r>
+                    </a:p>
+                  </a:txBody>
+                  <a:tcPr>
+                    <a:solidFill>
+                      <a:srgbClr val="141D33"/>
+                    </a:solidFill>
+                  </a:tcPr>
+                </a:tc>
+                <a:tc>
+                  <a:txBody>
+                    <a:bodyPr/>
+                    <a:lstStyle/>
+                    <a:p>
+                      <a:r>
+                        <a:rPr sz="1400" b="1">
+                          <a:solidFill>
+                            <a:srgbClr val="00E676"/>
+                          </a:solidFill>
+                          <a:latin typeface="Inter"/>
+                        </a:rPr>
+                        <a:t>-72.8%</a:t>
+                      </a:r>
+                    </a:p>
+                  </a:txBody>
+                  <a:tcPr>
+                    <a:solidFill>
+                      <a:srgbClr val="141D33"/>
+                    </a:solidFill>
+                  </a:tcPr>
+                </a:tc>
+              </a:tr>
+              <a:tr h="411480">
+                <a:tc>
+                  <a:txBody>
+                    <a:bodyPr/>
+                    <a:lstStyle/>
+                    <a:p>
+                      <a:r>
+                        <a:rPr sz="1400">
+                          <a:solidFill>
+                            <a:srgbClr val="EDF2F7"/>
+                          </a:solidFill>
+                          <a:latin typeface="Inter"/>
+                        </a:rPr>
+                        <a:t>Balanced</a:t>
+                      </a:r>
+                    </a:p>
+                  </a:txBody>
+                  <a:tcPr>
+                    <a:solidFill>
+                      <a:srgbClr val="141D33"/>
+                    </a:solidFill>
+                  </a:tcPr>
+                </a:tc>
+                <a:tc>
+                  <a:txBody>
+                    <a:bodyPr/>
+                    <a:lstStyle/>
+                    <a:p>
+                      <a:r>
+                        <a:rPr sz="1400">
+                          <a:solidFill>
+                            <a:srgbClr val="EDF2F7"/>
+                          </a:solidFill>
+                          <a:latin typeface="Inter"/>
+                        </a:rPr>
+                        <a:t>22.5</a:t>
+                      </a:r>
+                    </a:p>
+                  </a:txBody>
+                  <a:tcPr>
+                    <a:solidFill>
+                      <a:srgbClr val="141D33"/>
+                    </a:solidFill>
+                  </a:tcPr>
+                </a:tc>
+                <a:tc>
+                  <a:txBody>
+                    <a:bodyPr/>
+                    <a:lstStyle/>
+                    <a:p>
+                      <a:r>
+                        <a:rPr sz="1400">
+                          <a:solidFill>
+                            <a:srgbClr val="EDF2F7"/>
+                          </a:solidFill>
+                          <a:latin typeface="Inter"/>
+                        </a:rPr>
+                        <a:t>44.6</a:t>
+                      </a:r>
+                    </a:p>
+                  </a:txBody>
+                  <a:tcPr>
+                    <a:solidFill>
+                      <a:srgbClr val="141D33"/>
+                    </a:solidFill>
+                  </a:tcPr>
+                </a:tc>
+                <a:tc>
+                  <a:txBody>
+                    <a:bodyPr/>
+                    <a:lstStyle/>
+                    <a:p>
+                      <a:r>
+                        <a:rPr sz="1400">
+                          <a:solidFill>
+                            <a:srgbClr val="EDF2F7"/>
+                          </a:solidFill>
+                          <a:latin typeface="Inter"/>
+                        </a:rPr>
+                        <a:t>22.5</a:t>
+                      </a:r>
+                    </a:p>
+                  </a:txBody>
+                  <a:tcPr>
+                    <a:solidFill>
+                      <a:srgbClr val="141D33"/>
+                    </a:solidFill>
+                  </a:tcPr>
+                </a:tc>
+                <a:tc>
+                  <a:txBody>
+                    <a:bodyPr/>
+                    <a:lstStyle/>
+                    <a:p>
+                      <a:r>
+                        <a:rPr sz="1400" b="1">
+                          <a:solidFill>
+                            <a:srgbClr val="FBBF24"/>
+                          </a:solidFill>
+                          <a:latin typeface="Inter"/>
+                        </a:rPr>
+                        <a:t>-0.2%</a:t>
+                      </a:r>
+                    </a:p>
+                  </a:txBody>
+                  <a:tcPr>
+                    <a:solidFill>
+                      <a:srgbClr val="141D33"/>
+                    </a:solidFill>
+                  </a:tcPr>
+                </a:tc>
+              </a:tr>
+              <a:tr h="411480">
+                <a:tc>
+                  <a:txBody>
+                    <a:bodyPr/>
+                    <a:lstStyle/>
+                    <a:p>
+                      <a:r>
+                        <a:rPr sz="1400">
+                          <a:solidFill>
+                            <a:srgbClr val="EDF2F7"/>
+                          </a:solidFill>
+                          <a:latin typeface="Inter"/>
+                        </a:rPr>
+                        <a:t>Bursts</a:t>
+                      </a:r>
+                    </a:p>
+                  </a:txBody>
+                  <a:tcPr>
+                    <a:solidFill>
+                      <a:srgbClr val="141D33"/>
+                    </a:solidFill>
+                  </a:tcPr>
+                </a:tc>
+                <a:tc>
+                  <a:txBody>
+                    <a:bodyPr/>
+                    <a:lstStyle/>
+                    <a:p>
+                      <a:r>
+                        <a:rPr sz="1400">
+                          <a:solidFill>
+                            <a:srgbClr val="EDF2F7"/>
+                          </a:solidFill>
+                          <a:latin typeface="Inter"/>
+                        </a:rPr>
+                        <a:t>17.7</a:t>
+                      </a:r>
+                    </a:p>
+                  </a:txBody>
+                  <a:tcPr>
+                    <a:solidFill>
+                      <a:srgbClr val="141D33"/>
+                    </a:solidFill>
+                  </a:tcPr>
+                </a:tc>
+                <a:tc>
+                  <a:txBody>
+                    <a:bodyPr/>
+                    <a:lstStyle/>
+                    <a:p>
+                      <a:r>
+                        <a:rPr sz="1400">
+                          <a:solidFill>
+                            <a:srgbClr val="EDF2F7"/>
+                          </a:solidFill>
+                          <a:latin typeface="Inter"/>
+                        </a:rPr>
+                        <a:t>8.7</a:t>
+                      </a:r>
+                    </a:p>
+                  </a:txBody>
+                  <a:tcPr>
+                    <a:solidFill>
+                      <a:srgbClr val="141D33"/>
+                    </a:solidFill>
+                  </a:tcPr>
+                </a:tc>
+                <a:tc>
+                  <a:txBody>
+                    <a:bodyPr/>
+                    <a:lstStyle/>
+                    <a:p>
+                      <a:r>
+                        <a:rPr sz="1400">
+                          <a:solidFill>
+                            <a:srgbClr val="EDF2F7"/>
+                          </a:solidFill>
+                          <a:latin typeface="Inter"/>
+                        </a:rPr>
+                        <a:t>5.4</a:t>
+                      </a:r>
+                    </a:p>
+                  </a:txBody>
+                  <a:tcPr>
+                    <a:solidFill>
+                      <a:srgbClr val="141D33"/>
+                    </a:solidFill>
+                  </a:tcPr>
+                </a:tc>
+                <a:tc>
+                  <a:txBody>
+                    <a:bodyPr/>
+                    <a:lstStyle/>
+                    <a:p>
+                      <a:r>
+                        <a:rPr sz="1400" b="1">
+                          <a:solidFill>
+                            <a:srgbClr val="00E676"/>
+                          </a:solidFill>
+                          <a:latin typeface="Inter"/>
+                        </a:rPr>
+                        <a:t>-69.5%</a:t>
+                      </a:r>
+                    </a:p>
+                  </a:txBody>
+                  <a:tcPr>
+                    <a:solidFill>
+                      <a:srgbClr val="141D33"/>
+                    </a:solidFill>
+                  </a:tcPr>
+                </a:tc>
+              </a:tr>
+              <a:tr h="411480">
+                <a:tc>
+                  <a:txBody>
+                    <a:bodyPr/>
+                    <a:lstStyle/>
+                    <a:p>
+                      <a:r>
+                        <a:rPr sz="1400">
+                          <a:solidFill>
+                            <a:srgbClr val="EDF2F7"/>
+                          </a:solidFill>
+                          <a:latin typeface="Inter"/>
+                        </a:rPr>
+                        <a:t>Spillback</a:t>
+                      </a:r>
+                    </a:p>
+                  </a:txBody>
+                  <a:tcPr>
+                    <a:solidFill>
+                      <a:srgbClr val="141D33"/>
+                    </a:solidFill>
+                  </a:tcPr>
+                </a:tc>
+                <a:tc>
+                  <a:txBody>
+                    <a:bodyPr/>
+                    <a:lstStyle/>
+                    <a:p>
+                      <a:r>
+                        <a:rPr sz="1400">
+                          <a:solidFill>
+                            <a:srgbClr val="EDF2F7"/>
+                          </a:solidFill>
+                          <a:latin typeface="Inter"/>
+                        </a:rPr>
+                        <a:t>65.6</a:t>
+                      </a:r>
+                    </a:p>
+                  </a:txBody>
+                  <a:tcPr>
+                    <a:solidFill>
+                      <a:srgbClr val="141D33"/>
+                    </a:solidFill>
+                  </a:tcPr>
+                </a:tc>
+                <a:tc>
+                  <a:txBody>
+                    <a:bodyPr/>
+                    <a:lstStyle/>
+                    <a:p>
+                      <a:r>
+                        <a:rPr sz="1400">
+                          <a:solidFill>
+                            <a:srgbClr val="EDF2F7"/>
+                          </a:solidFill>
+                          <a:latin typeface="Inter"/>
+                        </a:rPr>
+                        <a:t>89.3</a:t>
+                      </a:r>
+                    </a:p>
+                  </a:txBody>
+                  <a:tcPr>
+                    <a:solidFill>
+                      <a:srgbClr val="141D33"/>
+                    </a:solidFill>
+                  </a:tcPr>
+                </a:tc>
+                <a:tc>
+                  <a:txBody>
+                    <a:bodyPr/>
+                    <a:lstStyle/>
+                    <a:p>
+                      <a:r>
+                        <a:rPr sz="1400">
+                          <a:solidFill>
+                            <a:srgbClr val="EDF2F7"/>
+                          </a:solidFill>
+                          <a:latin typeface="Inter"/>
+                        </a:rPr>
+                        <a:t>41.7</a:t>
+                      </a:r>
+                    </a:p>
+                  </a:txBody>
+                  <a:tcPr>
+                    <a:solidFill>
+                      <a:srgbClr val="141D33"/>
+                    </a:solidFill>
+                  </a:tcPr>
+                </a:tc>
+                <a:tc>
+                  <a:txBody>
+                    <a:bodyPr/>
+                    <a:lstStyle/>
+                    <a:p>
+                      <a:r>
+                        <a:rPr sz="1400" b="1">
+                          <a:solidFill>
+                            <a:srgbClr val="00E676"/>
+                          </a:solidFill>
+                          <a:latin typeface="Inter"/>
+                        </a:rPr>
+                        <a:t>-36.5%</a:t>
+                      </a:r>
+                    </a:p>
+                  </a:txBody>
+                  <a:tcPr>
+                    <a:solidFill>
+                      <a:srgbClr val="141D33"/>
+                    </a:solidFill>
+                  </a:tcPr>
+                </a:tc>
+              </a:tr>
+              <a:tr h="411480">
+                <a:tc>
+                  <a:txBody>
+                    <a:bodyPr/>
+                    <a:lstStyle/>
+                    <a:p>
+                      <a:r>
+                        <a:rPr sz="1400">
+                          <a:solidFill>
+                            <a:srgbClr val="EDF2F7"/>
+                          </a:solidFill>
+                          <a:latin typeface="Inter"/>
+                        </a:rPr>
+                        <a:t>Night</a:t>
+                      </a:r>
+                    </a:p>
+                  </a:txBody>
+                  <a:tcPr>
+                    <a:solidFill>
+                      <a:srgbClr val="141D33"/>
+                    </a:solidFill>
+                  </a:tcPr>
+                </a:tc>
+                <a:tc>
+                  <a:txBody>
+                    <a:bodyPr/>
+                    <a:lstStyle/>
+                    <a:p>
+                      <a:r>
+                        <a:rPr sz="1400">
+                          <a:solidFill>
+                            <a:srgbClr val="EDF2F7"/>
+                          </a:solidFill>
+                          <a:latin typeface="Inter"/>
+                        </a:rPr>
+                        <a:t>12.3</a:t>
+                      </a:r>
+                    </a:p>
+                  </a:txBody>
+                  <a:tcPr>
+                    <a:solidFill>
+                      <a:srgbClr val="141D33"/>
+                    </a:solidFill>
+                  </a:tcPr>
+                </a:tc>
+                <a:tc>
+                  <a:txBody>
+                    <a:bodyPr/>
+                    <a:lstStyle/>
+                    <a:p>
+                      <a:r>
+                        <a:rPr sz="1400">
+                          <a:solidFill>
+                            <a:srgbClr val="EDF2F7"/>
+                          </a:solidFill>
+                          <a:latin typeface="Inter"/>
+                        </a:rPr>
+                        <a:t>3.7</a:t>
+                      </a:r>
+                    </a:p>
+                  </a:txBody>
+                  <a:tcPr>
+                    <a:solidFill>
+                      <a:srgbClr val="141D33"/>
+                    </a:solidFill>
+                  </a:tcPr>
+                </a:tc>
+                <a:tc>
+                  <a:txBody>
+                    <a:bodyPr/>
+                    <a:lstStyle/>
+                    <a:p>
+                      <a:r>
+                        <a:rPr sz="1400">
+                          <a:solidFill>
+                            <a:srgbClr val="EDF2F7"/>
+                          </a:solidFill>
+                          <a:latin typeface="Inter"/>
+                        </a:rPr>
+                        <a:t>2.8</a:t>
+                      </a:r>
+                    </a:p>
+                  </a:txBody>
+                  <a:tcPr>
+                    <a:solidFill>
+                      <a:srgbClr val="141D33"/>
+                    </a:solidFill>
+                  </a:tcPr>
+                </a:tc>
+                <a:tc>
+                  <a:txBody>
+                    <a:bodyPr/>
+                    <a:lstStyle/>
+                    <a:p>
+                      <a:r>
+                        <a:rPr sz="1400" b="1">
+                          <a:solidFill>
+                            <a:srgbClr val="00E676"/>
+                          </a:solidFill>
+                          <a:latin typeface="Inter"/>
+                        </a:rPr>
+                        <a:t>-77.6%</a:t>
+                      </a:r>
+                    </a:p>
+                  </a:txBody>
+                  <a:tcPr>
+                    <a:solidFill>
+                      <a:srgbClr val="141D33"/>
+                    </a:solidFill>
+                  </a:tcPr>
+                </a:tc>
+              </a:tr>
+              <a:tr h="411480">
+                <a:tc>
+                  <a:txBody>
+                    <a:bodyPr/>
+                    <a:lstStyle/>
+                    <a:p>
+                      <a:r>
+                        <a:rPr sz="1400">
+                          <a:solidFill>
+                            <a:srgbClr val="EDF2F7"/>
+                          </a:solidFill>
+                          <a:latin typeface="Inter"/>
+                        </a:rPr>
+                        <a:t>Sensor faults</a:t>
+                      </a:r>
+                    </a:p>
+                  </a:txBody>
+                  <a:tcPr>
+                    <a:solidFill>
+                      <a:srgbClr val="141D33"/>
+                    </a:solidFill>
+                  </a:tcPr>
+                </a:tc>
+                <a:tc>
+                  <a:txBody>
+                    <a:bodyPr/>
+                    <a:lstStyle/>
+                    <a:p>
+                      <a:r>
+                        <a:rPr sz="1400">
+                          <a:solidFill>
+                            <a:srgbClr val="EDF2F7"/>
+                          </a:solidFill>
+                          <a:latin typeface="Inter"/>
+                        </a:rPr>
+                        <a:t>24.0</a:t>
+                      </a:r>
+                    </a:p>
+                  </a:txBody>
+                  <a:tcPr>
+                    <a:solidFill>
+                      <a:srgbClr val="141D33"/>
+                    </a:solidFill>
+                  </a:tcPr>
+                </a:tc>
+                <a:tc>
+                  <a:txBody>
+                    <a:bodyPr/>
+                    <a:lstStyle/>
+                    <a:p>
+                      <a:r>
+                        <a:rPr sz="1400">
+                          <a:solidFill>
+                            <a:srgbClr val="EDF2F7"/>
+                          </a:solidFill>
+                          <a:latin typeface="Inter"/>
+                        </a:rPr>
+                        <a:t>37.5</a:t>
+                      </a:r>
+                    </a:p>
+                  </a:txBody>
+                  <a:tcPr>
+                    <a:solidFill>
+                      <a:srgbClr val="141D33"/>
+                    </a:solidFill>
+                  </a:tcPr>
+                </a:tc>
+                <a:tc>
+                  <a:txBody>
+                    <a:bodyPr/>
+                    <a:lstStyle/>
+                    <a:p>
+                      <a:r>
+                        <a:rPr sz="1400">
+                          <a:solidFill>
+                            <a:srgbClr val="EDF2F7"/>
+                          </a:solidFill>
+                          <a:latin typeface="Inter"/>
+                        </a:rPr>
+                        <a:t>25.8</a:t>
+                      </a:r>
+                    </a:p>
+                  </a:txBody>
+                  <a:tcPr>
+                    <a:solidFill>
+                      <a:srgbClr val="141D33"/>
+                    </a:solidFill>
+                  </a:tcPr>
+                </a:tc>
+                <a:tc>
+                  <a:txBody>
+                    <a:bodyPr/>
+                    <a:lstStyle/>
+                    <a:p>
+                      <a:r>
+                        <a:rPr sz="1400" b="1">
+                          <a:solidFill>
+                            <a:srgbClr val="00E676"/>
+                          </a:solidFill>
+                          <a:latin typeface="Inter"/>
+                        </a:rPr>
+                        <a:t>-7.6%</a:t>
+                      </a:r>
+                    </a:p>
+                  </a:txBody>
+                  <a:tcPr>
+                    <a:solidFill>
+                      <a:srgbClr val="141D33"/>
+                    </a:solidFill>
+                  </a:tcPr>
+                </a:tc>
+              </a:tr>
+              <a:tr h="411480">
+                <a:tc>
+                  <a:txBody>
+                    <a:bodyPr/>
+                    <a:lstStyle/>
+                    <a:p>
+                      <a:r>
+                        <a:rPr sz="1400">
+                          <a:solidFill>
+                            <a:srgbClr val="EDF2F7"/>
+                          </a:solidFill>
+                          <a:latin typeface="Inter"/>
+                        </a:rPr>
+                        <a:t>School zone</a:t>
+                      </a:r>
+                    </a:p>
+                  </a:txBody>
+                  <a:tcPr>
+                    <a:solidFill>
+                      <a:srgbClr val="141D33"/>
+                    </a:solidFill>
+                  </a:tcPr>
+                </a:tc>
+                <a:tc>
+                  <a:txBody>
+                    <a:bodyPr/>
+                    <a:lstStyle/>
+                    <a:p>
+                      <a:r>
+                        <a:rPr sz="1400">
+                          <a:solidFill>
+                            <a:srgbClr val="EDF2F7"/>
+                          </a:solidFill>
+                          <a:latin typeface="Inter"/>
+                        </a:rPr>
+                        <a:t>46.5</a:t>
+                      </a:r>
+                    </a:p>
+                  </a:txBody>
+                  <a:tcPr>
+                    <a:solidFill>
+                      <a:srgbClr val="141D33"/>
+                    </a:solidFill>
+                  </a:tcPr>
+                </a:tc>
+                <a:tc>
+                  <a:txBody>
+                    <a:bodyPr/>
+                    <a:lstStyle/>
+                    <a:p>
+                      <a:r>
+                        <a:rPr sz="1400">
+                          <a:solidFill>
+                            <a:srgbClr val="EDF2F7"/>
+                          </a:solidFill>
+                          <a:latin typeface="Inter"/>
+                        </a:rPr>
+                        <a:t>25.7</a:t>
+                      </a:r>
+                    </a:p>
+                  </a:txBody>
+                  <a:tcPr>
+                    <a:solidFill>
+                      <a:srgbClr val="141D33"/>
+                    </a:solidFill>
+                  </a:tcPr>
+                </a:tc>
+                <a:tc>
+                  <a:txBody>
+                    <a:bodyPr/>
+                    <a:lstStyle/>
+                    <a:p>
+                      <a:r>
+                        <a:rPr sz="1400">
+                          <a:solidFill>
+                            <a:srgbClr val="EDF2F7"/>
+                          </a:solidFill>
+                          <a:latin typeface="Inter"/>
+                        </a:rPr>
+                        <a:t>25.8</a:t>
+                      </a:r>
+                    </a:p>
+                  </a:txBody>
+                  <a:tcPr>
+                    <a:solidFill>
+                      <a:srgbClr val="141D33"/>
+                    </a:solidFill>
+                  </a:tcPr>
+                </a:tc>
+                <a:tc>
+                  <a:txBody>
+                    <a:bodyPr/>
+                    <a:lstStyle/>
+                    <a:p>
+                      <a:r>
+                        <a:rPr sz="1400" b="1">
+                          <a:solidFill>
+                            <a:srgbClr val="00E676"/>
+                          </a:solidFill>
+                          <a:latin typeface="Inter"/>
+                        </a:rPr>
+                        <a:t>-44.5%</a:t>
+                      </a:r>
+                    </a:p>
+                  </a:txBody>
+                  <a:tcPr>
+                    <a:solidFill>
+                      <a:srgbClr val="141D33"/>
+                    </a:solidFill>
+                  </a:tcPr>
+                </a:tc>
+              </a:tr>
+            </a:tbl>
+          </a:graphicData>
+        </a:graphic>
+      </p:graphicFrame>
+      <p:sp>
+        <p:nvSpPr>
+          <p:cNvPr id="6" name="TextBox 5"/>
+          <p:cNvSpPr txBox="1"/>
+          <p:nvPr/>
+        </p:nvSpPr>
+        <p:spPr>
+          <a:xfrm>
+            <a:off x="640080" y="6126480"/>
+            <a:ext cx="10881360" cy="548640"/>
+          </a:xfrm>
+          <a:prstGeom prst="rect">
+            <a:avLst/>
+          </a:prstGeom>
+          <a:noFill/>
+        </p:spPr>
+        <p:txBody>
+          <a:bodyPr wrap="square">
+            <a:spAutoFit/>
+          </a:bodyPr>
+          <a:lstStyle/>
+          <a:p>
+            <a:pPr algn="ctr">
+              <a:spcAft>
+                <a:spcPts val="600"/>
+              </a:spcAft>
+            </a:pPr>
+            <a:r>
+              <a:rPr sz="1500" b="0">
+                <a:solidFill>
+                  <a:srgbClr val="93A1C0"/>
+                </a:solidFill>
+                <a:latin typeface="Inter"/>
+              </a:rPr>
+              <a:t>105 runs, seeds never seen during tuning. Ties disclosed, not hidden. Reproducible harness ships with the code.</a:t>
             </a:r>
           </a:p>
         </p:txBody>
@@ -6761,4 +9887,324 @@
   </a:objectDefaults>
   <a:extraClrSchemeLst/>
 </a:theme>
+</file>
+
+<file path=ppt/theme/theme2.xml><?xml version="1.0" encoding="utf-8"?>
+<a:theme xmlns:a="http://schemas.openxmlformats.org/drawingml/2006/main" name="Office Theme">
+  <a:themeElements>
+    <a:clrScheme name="Office">
+      <a:dk1>
+        <a:sysClr val="windowText" lastClr="000000"/>
+      </a:dk1>
+      <a:lt1>
+        <a:sysClr val="window" lastClr="FFFFFF"/>
+      </a:lt1>
+      <a:dk2>
+        <a:srgbClr val="1F497D"/>
+      </a:dk2>
+      <a:lt2>
+        <a:srgbClr val="EEECE1"/>
+      </a:lt2>
+      <a:accent1>
+        <a:srgbClr val="4F81BD"/>
+      </a:accent1>
+      <a:accent2>
+        <a:srgbClr val="C0504D"/>
+      </a:accent2>
+      <a:accent3>
+        <a:srgbClr val="9BBB59"/>
+      </a:accent3>
+      <a:accent4>
+        <a:srgbClr val="8064A2"/>
+      </a:accent4>
+      <a:accent5>
+        <a:srgbClr val="4BACC6"/>
+      </a:accent5>
+      <a:accent6>
+        <a:srgbClr val="F79646"/>
+      </a:accent6>
+      <a:hlink>
+        <a:srgbClr val="0000FF"/>
+      </a:hlink>
+      <a:folHlink>
+        <a:srgbClr val="800080"/>
+      </a:folHlink>
+    </a:clrScheme>
+    <a:fontScheme name="Office">
+      <a:majorFont>
+        <a:latin typeface="Calibri"/>
+        <a:ea typeface=""/>
+        <a:cs typeface=""/>
+        <a:font script="Jpan" typeface="ＭＳ Ｐゴシック"/>
+        <a:font script="Hang" typeface="맑은 고딕"/>
+        <a:font script="Hans" typeface="宋体"/>
+        <a:font script="Hant" typeface="新細明體"/>
+        <a:font script="Arab" typeface="Times New Roman"/>
+        <a:font script="Hebr" typeface="Times New Roman"/>
+        <a:font script="Thai" typeface="Angsana New"/>
+        <a:font script="Ethi" typeface="Nyala"/>
+        <a:font script="Beng" typeface="Vrinda"/>
+        <a:font script="Gujr" typeface="Shruti"/>
+        <a:font script="Khmr" typeface="MoolBoran"/>
+        <a:font script="Knda" typeface="Tunga"/>
+        <a:font script="Guru" typeface="Raavi"/>
+        <a:font script="Cans" typeface="Euphemia"/>
+        <a:font script="Cher" typeface="Plantagenet Cherokee"/>
+        <a:font script="Yiii" typeface="Microsoft Yi Baiti"/>
+        <a:font script="Tibt" typeface="Microsoft Himalaya"/>
+        <a:font script="Thaa" typeface="MV Boli"/>
+        <a:font script="Deva" typeface="Mangal"/>
+        <a:font script="Telu" typeface="Gautami"/>
+        <a:font script="Taml" typeface="Latha"/>
+        <a:font script="Syrc" typeface="Estrangelo Edessa"/>
+        <a:font script="Orya" typeface="Kalinga"/>
+        <a:font script="Mlym" typeface="Kartika"/>
+        <a:font script="Laoo" typeface="DokChampa"/>
+        <a:font script="Sinh" typeface="Iskoola Pota"/>
+        <a:font script="Mong" typeface="Mongolian Baiti"/>
+        <a:font script="Viet" typeface="Times New Roman"/>
+        <a:font script="Uigh" typeface="Microsoft Uighur"/>
+        <a:font script="Geor" typeface="Sylfaen"/>
+      </a:majorFont>
+      <a:minorFont>
+        <a:latin typeface="Calibri"/>
+        <a:ea typeface=""/>
+        <a:cs typeface=""/>
+        <a:font script="Jpan" typeface="ＭＳ Ｐゴシック"/>
+        <a:font script="Hang" typeface="맑은 고딕"/>
+        <a:font script="Hans" typeface="宋体"/>
+        <a:font script="Hant" typeface="新細明體"/>
+        <a:font script="Arab" typeface="Arial"/>
+        <a:font script="Hebr" typeface="Arial"/>
+        <a:font script="Thai" typeface="Cordia New"/>
+        <a:font script="Ethi" typeface="Nyala"/>
+        <a:font script="Beng" typeface="Vrinda"/>
+        <a:font script="Gujr" typeface="Shruti"/>
+        <a:font script="Khmr" typeface="DaunPenh"/>
+        <a:font script="Knda" typeface="Tunga"/>
+        <a:font script="Guru" typeface="Raavi"/>
+        <a:font script="Cans" typeface="Euphemia"/>
+        <a:font script="Cher" typeface="Plantagenet Cherokee"/>
+        <a:font script="Yiii" typeface="Microsoft Yi Baiti"/>
+        <a:font script="Tibt" typeface="Microsoft Himalaya"/>
+        <a:font script="Thaa" typeface="MV Boli"/>
+        <a:font script="Deva" typeface="Mangal"/>
+        <a:font script="Telu" typeface="Gautami"/>
+        <a:font script="Taml" typeface="Latha"/>
+        <a:font script="Syrc" typeface="Estrangelo Edessa"/>
+        <a:font script="Orya" typeface="Kalinga"/>
+        <a:font script="Mlym" typeface="Kartika"/>
+        <a:font script="Laoo" typeface="DokChampa"/>
+        <a:font script="Sinh" typeface="Iskoola Pota"/>
+        <a:font script="Mong" typeface="Mongolian Baiti"/>
+        <a:font script="Viet" typeface="Arial"/>
+        <a:font script="Uigh" typeface="Microsoft Uighur"/>
+        <a:font script="Geor" typeface="Sylfaen"/>
+      </a:minorFont>
+    </a:fontScheme>
+    <a:fmtScheme name="Office">
+      <a:fillStyleLst>
+        <a:solidFill>
+          <a:schemeClr val="phClr"/>
+        </a:solidFill>
+        <a:gradFill rotWithShape="1">
+          <a:gsLst>
+            <a:gs pos="0">
+              <a:schemeClr val="phClr">
+                <a:tint val="50000"/>
+                <a:satMod val="300000"/>
+              </a:schemeClr>
+            </a:gs>
+            <a:gs pos="35000">
+              <a:schemeClr val="phClr">
+                <a:tint val="37000"/>
+                <a:satMod val="300000"/>
+              </a:schemeClr>
+            </a:gs>
+            <a:gs pos="100000">
+              <a:schemeClr val="phClr">
+                <a:tint val="15000"/>
+                <a:satMod val="350000"/>
+              </a:schemeClr>
+            </a:gs>
+          </a:gsLst>
+          <a:lin ang="16200000" scaled="1"/>
+        </a:gradFill>
+        <a:gradFill rotWithShape="1">
+          <a:gsLst>
+            <a:gs pos="0">
+              <a:schemeClr val="phClr">
+                <a:tint val="100000"/>
+                <a:shade val="100000"/>
+                <a:satMod val="130000"/>
+              </a:schemeClr>
+            </a:gs>
+            <a:gs pos="100000">
+              <a:schemeClr val="phClr">
+                <a:tint val="50000"/>
+                <a:shade val="100000"/>
+                <a:satMod val="350000"/>
+              </a:schemeClr>
+            </a:gs>
+          </a:gsLst>
+          <a:lin ang="16200000" scaled="0"/>
+        </a:gradFill>
+      </a:fillStyleLst>
+      <a:lnStyleLst>
+        <a:ln w="9525" cap="flat" cmpd="sng" algn="ctr">
+          <a:solidFill>
+            <a:schemeClr val="phClr">
+              <a:shade val="95000"/>
+              <a:satMod val="105000"/>
+            </a:schemeClr>
+          </a:solidFill>
+          <a:prstDash val="solid"/>
+        </a:ln>
+        <a:ln w="25400" cap="flat" cmpd="sng" algn="ctr">
+          <a:solidFill>
+            <a:schemeClr val="phClr"/>
+          </a:solidFill>
+          <a:prstDash val="solid"/>
+        </a:ln>
+        <a:ln w="38100" cap="flat" cmpd="sng" algn="ctr">
+          <a:solidFill>
+            <a:schemeClr val="phClr"/>
+          </a:solidFill>
+          <a:prstDash val="solid"/>
+        </a:ln>
+      </a:lnStyleLst>
+      <a:effectStyleLst>
+        <a:effectStyle>
+          <a:effectLst>
+            <a:outerShdw blurRad="40000" dist="20000" dir="5400000" rotWithShape="0">
+              <a:srgbClr val="000000">
+                <a:alpha val="38000"/>
+              </a:srgbClr>
+            </a:outerShdw>
+          </a:effectLst>
+        </a:effectStyle>
+        <a:effectStyle>
+          <a:effectLst>
+            <a:outerShdw blurRad="40000" dist="23000" dir="5400000" rotWithShape="0">
+              <a:srgbClr val="000000">
+                <a:alpha val="35000"/>
+              </a:srgbClr>
+            </a:outerShdw>
+          </a:effectLst>
+        </a:effectStyle>
+        <a:effectStyle>
+          <a:effectLst>
+            <a:outerShdw blurRad="40000" dist="23000" dir="5400000" rotWithShape="0">
+              <a:srgbClr val="000000">
+                <a:alpha val="35000"/>
+              </a:srgbClr>
+            </a:outerShdw>
+          </a:effectLst>
+          <a:scene3d>
+            <a:camera prst="orthographicFront">
+              <a:rot lat="0" lon="0" rev="0"/>
+            </a:camera>
+            <a:lightRig rig="threePt" dir="t">
+              <a:rot lat="0" lon="0" rev="1200000"/>
+            </a:lightRig>
+          </a:scene3d>
+          <a:sp3d>
+            <a:bevelT w="63500" h="25400"/>
+          </a:sp3d>
+        </a:effectStyle>
+      </a:effectStyleLst>
+      <a:bgFillStyleLst>
+        <a:solidFill>
+          <a:schemeClr val="phClr"/>
+        </a:solidFill>
+        <a:gradFill rotWithShape="1">
+          <a:gsLst>
+            <a:gs pos="0">
+              <a:schemeClr val="phClr">
+                <a:tint val="40000"/>
+                <a:satMod val="350000"/>
+              </a:schemeClr>
+            </a:gs>
+            <a:gs pos="40000">
+              <a:schemeClr val="phClr">
+                <a:tint val="45000"/>
+                <a:shade val="99000"/>
+                <a:satMod val="350000"/>
+              </a:schemeClr>
+            </a:gs>
+            <a:gs pos="100000">
+              <a:schemeClr val="phClr">
+                <a:shade val="20000"/>
+                <a:satMod val="255000"/>
+              </a:schemeClr>
+            </a:gs>
+          </a:gsLst>
+          <a:path path="circle">
+            <a:fillToRect l="50000" t="-80000" r="50000" b="180000"/>
+          </a:path>
+        </a:gradFill>
+        <a:gradFill rotWithShape="1">
+          <a:gsLst>
+            <a:gs pos="0">
+              <a:schemeClr val="phClr">
+                <a:tint val="80000"/>
+                <a:satMod val="300000"/>
+              </a:schemeClr>
+            </a:gs>
+            <a:gs pos="100000">
+              <a:schemeClr val="phClr">
+                <a:shade val="30000"/>
+                <a:satMod val="200000"/>
+              </a:schemeClr>
+            </a:gs>
+          </a:gsLst>
+          <a:path path="circle">
+            <a:fillToRect l="50000" t="50000" r="50000" b="50000"/>
+          </a:path>
+        </a:gradFill>
+      </a:bgFillStyleLst>
+    </a:fmtScheme>
+  </a:themeElements>
+  <a:objectDefaults>
+    <a:spDef>
+      <a:spPr/>
+      <a:bodyPr/>
+      <a:lstStyle/>
+      <a:style>
+        <a:lnRef idx="1">
+          <a:schemeClr val="accent1"/>
+        </a:lnRef>
+        <a:fillRef idx="3">
+          <a:schemeClr val="accent1"/>
+        </a:fillRef>
+        <a:effectRef idx="2">
+          <a:schemeClr val="accent1"/>
+        </a:effectRef>
+        <a:fontRef idx="minor">
+          <a:schemeClr val="lt1"/>
+        </a:fontRef>
+      </a:style>
+    </a:spDef>
+    <a:lnDef>
+      <a:spPr/>
+      <a:bodyPr/>
+      <a:lstStyle/>
+      <a:style>
+        <a:lnRef idx="2">
+          <a:schemeClr val="accent1"/>
+        </a:lnRef>
+        <a:fillRef idx="0">
+          <a:schemeClr val="accent1"/>
+        </a:fillRef>
+        <a:effectRef idx="1">
+          <a:schemeClr val="accent1"/>
+        </a:effectRef>
+        <a:fontRef idx="minor">
+          <a:schemeClr val="tx1"/>
+        </a:fontRef>
+      </a:style>
+    </a:lnDef>
+  </a:objectDefaults>
+  <a:extraClrSchemeLst/>
+</a:theme>
 </file>